--- a/public/documents/PetCare+_사업계획서.pptx
+++ b/public/documents/PetCare+_사업계획서.pptx
@@ -3320,130 +3320,130 @@
               </a:defRPr>
             </a:pPr>
             <a:r>
-              <a:t>💰 초기 투자 5,000만원:</a:t>
-            </a:r>
-          </a:p>
-          <a:p>
-            <a:pPr>
-              <a:spcBef>
-                <a:spcPts val="800"/>
-              </a:spcBef>
-              <a:spcAft>
-                <a:spcPts val="800"/>
-              </a:spcAft>
-              <a:defRPr sz="1800">
-                <a:solidFill>
-                  <a:srgbClr val="1E293B"/>
-                </a:solidFill>
-              </a:defRPr>
-            </a:pPr>
-            <a:r>
-              <a:t>• 개발 비용: 1,000만원</a:t>
-            </a:r>
-          </a:p>
-          <a:p>
-            <a:pPr>
-              <a:spcBef>
-                <a:spcPts val="800"/>
-              </a:spcBef>
-              <a:spcAft>
-                <a:spcPts val="800"/>
-              </a:spcAft>
-              <a:defRPr sz="1800">
-                <a:solidFill>
-                  <a:srgbClr val="1E293B"/>
-                </a:solidFill>
-              </a:defRPr>
-            </a:pPr>
-            <a:r>
-              <a:t>• 마케팅 비용: 1,500만원</a:t>
-            </a:r>
-          </a:p>
-          <a:p>
-            <a:pPr>
-              <a:spcBef>
-                <a:spcPts val="800"/>
-              </a:spcBef>
-              <a:spcAft>
-                <a:spcPts val="800"/>
-              </a:spcAft>
-              <a:defRPr sz="1800">
-                <a:solidFill>
-                  <a:srgbClr val="1E293B"/>
-                </a:solidFill>
-              </a:defRPr>
-            </a:pPr>
-            <a:r>
-              <a:t>• 인프라/운영: 1,500만원</a:t>
-            </a:r>
-          </a:p>
-          <a:p>
-            <a:pPr>
-              <a:spcBef>
-                <a:spcPts val="800"/>
-              </a:spcBef>
-              <a:spcAft>
-                <a:spcPts val="800"/>
-              </a:spcAft>
-              <a:defRPr sz="1800">
-                <a:solidFill>
-                  <a:srgbClr val="1E293B"/>
-                </a:solidFill>
-              </a:defRPr>
-            </a:pPr>
-            <a:r>
-              <a:t>• 인건비: 1,000만원</a:t>
-            </a:r>
-          </a:p>
-          <a:p>
-            <a:pPr>
-              <a:spcBef>
-                <a:spcPts val="800"/>
-              </a:spcBef>
-              <a:spcAft>
-                <a:spcPts val="800"/>
-              </a:spcAft>
-              <a:defRPr sz="1800">
-                <a:solidFill>
-                  <a:srgbClr val="1E293B"/>
-                </a:solidFill>
-              </a:defRPr>
-            </a:pPr>
-          </a:p>
-          <a:p>
-            <a:pPr>
-              <a:spcBef>
-                <a:spcPts val="800"/>
-              </a:spcBef>
-              <a:spcAft>
-                <a:spcPts val="800"/>
-              </a:spcAft>
-              <a:defRPr sz="1800">
-                <a:solidFill>
-                  <a:srgbClr val="1E293B"/>
-                </a:solidFill>
-              </a:defRPr>
-            </a:pPr>
-            <a:r>
-              <a:t>월 고정 운영비: 100만원</a:t>
-            </a:r>
-          </a:p>
-          <a:p>
-            <a:pPr>
-              <a:spcBef>
-                <a:spcPts val="800"/>
-              </a:spcBef>
-              <a:spcAft>
-                <a:spcPts val="800"/>
-              </a:spcAft>
-              <a:defRPr sz="1800">
-                <a:solidFill>
-                  <a:srgbClr val="1E293B"/>
-                </a:solidFill>
-              </a:defRPr>
-            </a:pPr>
-            <a:r>
-              <a:t>(기존 모델 3,000만원 대비 90% 절감)</a:t>
+              <a:t>💰 초기 투자 10,000만원:</a:t>
+            </a:r>
+          </a:p>
+          <a:p>
+            <a:pPr>
+              <a:spcBef>
+                <a:spcPts val="800"/>
+              </a:spcBef>
+              <a:spcAft>
+                <a:spcPts val="800"/>
+              </a:spcAft>
+              <a:defRPr sz="1800">
+                <a:solidFill>
+                  <a:srgbClr val="1E293B"/>
+                </a:solidFill>
+              </a:defRPr>
+            </a:pPr>
+            <a:r>
+              <a:t>• 개발 비용: 2,000만원</a:t>
+            </a:r>
+          </a:p>
+          <a:p>
+            <a:pPr>
+              <a:spcBef>
+                <a:spcPts val="800"/>
+              </a:spcBef>
+              <a:spcAft>
+                <a:spcPts val="800"/>
+              </a:spcAft>
+              <a:defRPr sz="1800">
+                <a:solidFill>
+                  <a:srgbClr val="1E293B"/>
+                </a:solidFill>
+              </a:defRPr>
+            </a:pPr>
+            <a:r>
+              <a:t>• 마케팅 비용: 3,000만원</a:t>
+            </a:r>
+          </a:p>
+          <a:p>
+            <a:pPr>
+              <a:spcBef>
+                <a:spcPts val="800"/>
+              </a:spcBef>
+              <a:spcAft>
+                <a:spcPts val="800"/>
+              </a:spcAft>
+              <a:defRPr sz="1800">
+                <a:solidFill>
+                  <a:srgbClr val="1E293B"/>
+                </a:solidFill>
+              </a:defRPr>
+            </a:pPr>
+            <a:r>
+              <a:t>• 인프라/운영: 3,000만원</a:t>
+            </a:r>
+          </a:p>
+          <a:p>
+            <a:pPr>
+              <a:spcBef>
+                <a:spcPts val="800"/>
+              </a:spcBef>
+              <a:spcAft>
+                <a:spcPts val="800"/>
+              </a:spcAft>
+              <a:defRPr sz="1800">
+                <a:solidFill>
+                  <a:srgbClr val="1E293B"/>
+                </a:solidFill>
+              </a:defRPr>
+            </a:pPr>
+            <a:r>
+              <a:t>• 인건비: 2,000만원</a:t>
+            </a:r>
+          </a:p>
+          <a:p>
+            <a:pPr>
+              <a:spcBef>
+                <a:spcPts val="800"/>
+              </a:spcBef>
+              <a:spcAft>
+                <a:spcPts val="800"/>
+              </a:spcAft>
+              <a:defRPr sz="1800">
+                <a:solidFill>
+                  <a:srgbClr val="1E293B"/>
+                </a:solidFill>
+              </a:defRPr>
+            </a:pPr>
+          </a:p>
+          <a:p>
+            <a:pPr>
+              <a:spcBef>
+                <a:spcPts val="800"/>
+              </a:spcBef>
+              <a:spcAft>
+                <a:spcPts val="800"/>
+              </a:spcAft>
+              <a:defRPr sz="1800">
+                <a:solidFill>
+                  <a:srgbClr val="1E293B"/>
+                </a:solidFill>
+              </a:defRPr>
+            </a:pPr>
+            <a:r>
+              <a:t>월 고정 운영비: 150만원</a:t>
+            </a:r>
+          </a:p>
+          <a:p>
+            <a:pPr>
+              <a:spcBef>
+                <a:spcPts val="800"/>
+              </a:spcBef>
+              <a:spcAft>
+                <a:spcPts val="800"/>
+              </a:spcAft>
+              <a:defRPr sz="1800">
+                <a:solidFill>
+                  <a:srgbClr val="1E293B"/>
+                </a:solidFill>
+              </a:defRPr>
+            </a:pPr>
+            <a:r>
+              <a:t>(기존 모델 3,000만원 대비 95% 절감)</a:t>
             </a:r>
           </a:p>
         </p:txBody>
@@ -3989,7 +3989,7 @@
               </a:defRPr>
             </a:pPr>
             <a:r>
-              <a:t>• 마케팅 비용: 1,300만원</a:t>
+              <a:t>• 마케팅 비용: 2,500만원</a:t>
             </a:r>
           </a:p>
           <a:p>
@@ -4058,7 +4058,7 @@
               </a:defRPr>
             </a:pPr>
             <a:r>
-              <a:t>• ROI 150% 달성</a:t>
+              <a:t>• ROI 200% 달성</a:t>
             </a:r>
           </a:p>
         </p:txBody>
@@ -5294,7 +5294,7 @@
               </a:defRPr>
             </a:pPr>
             <a:r>
-              <a:t>신청자금: 5천만원</a:t>
+              <a:t>신청자금: 1억원</a:t>
             </a:r>
           </a:p>
         </p:txBody>

--- a/public/documents/PetCare+_사업계획서.pptx
+++ b/public/documents/PetCare+_사업계획서.pptx
@@ -18,9 +18,6 @@
     <p:sldId id="266" r:id="rId17"/>
     <p:sldId id="267" r:id="rId18"/>
     <p:sldId id="268" r:id="rId19"/>
-    <p:sldId id="269" r:id="rId20"/>
-    <p:sldId id="270" r:id="rId21"/>
-    <p:sldId id="271" r:id="rId22"/>
   </p:sldIdLst>
   <p:sldSz cx="9144000" cy="6858000" type="screen4x3"/>
   <p:notesSz cx="6858000" cy="9144000"/>
@@ -3099,7 +3096,7 @@
     <p:bg>
       <p:bgPr>
         <a:solidFill>
-          <a:srgbClr val="2563EB"/>
+          <a:srgbClr val="194D8A"/>
         </a:solidFill>
         <a:effectLst/>
       </p:bgPr>
@@ -3134,7 +3131,7 @@
           <a:lstStyle/>
           <a:p>
             <a:pPr algn="ctr">
-              <a:defRPr sz="6000" b="1">
+              <a:defRPr sz="5400" b="1">
                 <a:solidFill>
                   <a:srgbClr val="FFFFFF"/>
                 </a:solidFill>
@@ -3155,7 +3152,7 @@
         <p:spPr>
           <a:xfrm>
             <a:off x="457200" y="3840480"/>
-            <a:ext cx="8229600" cy="914400"/>
+            <a:ext cx="8229600" cy="1828800"/>
           </a:xfrm>
           <a:prstGeom prst="rect">
             <a:avLst/>
@@ -3163,20 +3160,29 @@
           <a:noFill/>
         </p:spPr>
         <p:txBody>
-          <a:bodyPr wrap="none">
+          <a:bodyPr wrap="square">
             <a:spAutoFit/>
           </a:bodyPr>
           <a:lstStyle/>
           <a:p>
             <a:pPr algn="ctr">
-              <a:defRPr sz="3200">
-                <a:solidFill>
-                  <a:srgbClr val="F8FAFC"/>
-                </a:solidFill>
-              </a:defRPr>
-            </a:pPr>
-            <a:r>
-              <a:t>AI 기반 펫보험 비교 플랫폼</a:t>
+              <a:defRPr sz="2400">
+                <a:solidFill>
+                  <a:srgbClr val="AED6F1"/>
+                </a:solidFill>
+              </a:defRPr>
+            </a:pPr>
+            <a:r>
+              <a:t>대한민국 최고의 AI 기반 펫보험 비교 플랫폼</a:t>
+            </a:r>
+            <a:br/>
+            <a:r>
+              <a:t>사업계획서</a:t>
+            </a:r>
+            <a:br/>
+            <a:br/>
+            <a:r>
+              <a:t>2026년 02월</a:t>
             </a:r>
           </a:p>
         </p:txBody>
@@ -3192,14 +3198,6 @@
 <file path=ppt/slides/slide10.xml><?xml version="1.0" encoding="utf-8"?>
 <p:sld xmlns:a="http://schemas.openxmlformats.org/drawingml/2006/main" xmlns:p="http://schemas.openxmlformats.org/presentationml/2006/main" xmlns:r="http://schemas.openxmlformats.org/officeDocument/2006/relationships">
   <p:cSld>
-    <p:bg>
-      <p:bgPr>
-        <a:solidFill>
-          <a:srgbClr val="FFFFFF"/>
-        </a:solidFill>
-        <a:effectLst/>
-      </p:bgPr>
-    </p:bg>
     <p:spTree>
       <p:nvGrpSpPr>
         <p:cNvPr id="1" name=""/>
@@ -3209,56 +3207,24 @@
       <p:grpSpPr/>
       <p:sp>
         <p:nvSpPr>
-          <p:cNvPr id="2" name="TextBox 1"/>
-          <p:cNvSpPr txBox="1"/>
+          <p:cNvPr id="2" name="Rectangle 1"/>
+          <p:cNvSpPr/>
           <p:nvPr/>
         </p:nvSpPr>
         <p:spPr>
           <a:xfrm>
-            <a:off x="457200" y="274320"/>
-            <a:ext cx="8229600" cy="731520"/>
+            <a:off x="0" y="0"/>
+            <a:ext cx="9144000" cy="731520"/>
           </a:xfrm>
           <a:prstGeom prst="rect">
             <a:avLst/>
           </a:prstGeom>
-          <a:noFill/>
-        </p:spPr>
-        <p:txBody>
-          <a:bodyPr wrap="none">
-            <a:spAutoFit/>
-          </a:bodyPr>
-          <a:lstStyle/>
-          <a:p>
-            <a:pPr>
-              <a:defRPr sz="4400" b="1">
-                <a:solidFill>
-                  <a:srgbClr val="1E293B"/>
-                </a:solidFill>
-              </a:defRPr>
-            </a:pPr>
-            <a:r>
-              <a:t>4️⃣ 재무 계획</a:t>
-            </a:r>
-          </a:p>
-        </p:txBody>
-      </p:sp>
-      <p:sp>
-        <p:nvSpPr>
-          <p:cNvPr id="3" name="Rectangle 2"/>
-          <p:cNvSpPr/>
-          <p:nvPr/>
-        </p:nvSpPr>
-        <p:spPr>
-          <a:xfrm>
-            <a:off x="457200" y="1097280"/>
-            <a:ext cx="8229600" cy="0"/>
-          </a:xfrm>
-          <a:prstGeom prst="rect">
-            <a:avLst/>
-          </a:prstGeom>
-          <a:ln w="38100">
+          <a:solidFill>
+            <a:srgbClr val="2980B9"/>
+          </a:solidFill>
+          <a:ln>
             <a:solidFill>
-              <a:srgbClr val="2563EB"/>
+              <a:srgbClr val="2980B9"/>
             </a:solidFill>
           </a:ln>
         </p:spPr>
@@ -3286,14 +3252,14 @@
       </p:sp>
       <p:sp>
         <p:nvSpPr>
-          <p:cNvPr id="4" name="TextBox 3"/>
+          <p:cNvPr id="3" name="TextBox 2"/>
           <p:cNvSpPr txBox="1"/>
           <p:nvPr/>
         </p:nvSpPr>
         <p:spPr>
           <a:xfrm>
-            <a:off x="731520" y="1371600"/>
-            <a:ext cx="7680960" cy="5029200"/>
+            <a:off x="457200" y="91440"/>
+            <a:ext cx="8229600" cy="548640"/>
           </a:xfrm>
           <a:prstGeom prst="rect">
             <a:avLst/>
@@ -3301,6 +3267,41 @@
           <a:noFill/>
         </p:spPr>
         <p:txBody>
+          <a:bodyPr wrap="none">
+            <a:spAutoFit/>
+          </a:bodyPr>
+          <a:lstStyle/>
+          <a:p>
+            <a:pPr>
+              <a:defRPr sz="4000" b="1">
+                <a:solidFill>
+                  <a:srgbClr val="FFFFFF"/>
+                </a:solidFill>
+              </a:defRPr>
+            </a:pPr>
+            <a:r>
+              <a:t>🚀 자율진화형 플랫폼 (향후 계획)</a:t>
+            </a:r>
+          </a:p>
+        </p:txBody>
+      </p:sp>
+      <p:sp>
+        <p:nvSpPr>
+          <p:cNvPr id="4" name="TextBox 3"/>
+          <p:cNvSpPr txBox="1"/>
+          <p:nvPr/>
+        </p:nvSpPr>
+        <p:spPr>
+          <a:xfrm>
+            <a:off x="731520" y="1097280"/>
+            <a:ext cx="7680960" cy="5303520"/>
+          </a:xfrm>
+          <a:prstGeom prst="rect">
+            <a:avLst/>
+          </a:prstGeom>
+          <a:noFill/>
+        </p:spPr>
+        <p:txBody>
           <a:bodyPr wrap="square">
             <a:spAutoFit/>
           </a:bodyPr>
@@ -3315,135 +3316,237 @@
               </a:spcAft>
               <a:defRPr sz="1800">
                 <a:solidFill>
-                  <a:srgbClr val="1E293B"/>
-                </a:solidFill>
-              </a:defRPr>
-            </a:pPr>
-            <a:r>
-              <a:t>💰 초기 투자 10,000만원:</a:t>
-            </a:r>
-          </a:p>
-          <a:p>
-            <a:pPr>
-              <a:spcBef>
-                <a:spcPts val="800"/>
-              </a:spcBef>
-              <a:spcAft>
-                <a:spcPts val="800"/>
-              </a:spcAft>
-              <a:defRPr sz="1800">
-                <a:solidFill>
-                  <a:srgbClr val="1E293B"/>
-                </a:solidFill>
-              </a:defRPr>
-            </a:pPr>
-            <a:r>
-              <a:t>• 개발 비용: 2,000만원</a:t>
-            </a:r>
-          </a:p>
-          <a:p>
-            <a:pPr>
-              <a:spcBef>
-                <a:spcPts val="800"/>
-              </a:spcBef>
-              <a:spcAft>
-                <a:spcPts val="800"/>
-              </a:spcAft>
-              <a:defRPr sz="1800">
-                <a:solidFill>
-                  <a:srgbClr val="1E293B"/>
-                </a:solidFill>
-              </a:defRPr>
-            </a:pPr>
-            <a:r>
-              <a:t>• 마케팅 비용: 3,000만원</a:t>
-            </a:r>
-          </a:p>
-          <a:p>
-            <a:pPr>
-              <a:spcBef>
-                <a:spcPts val="800"/>
-              </a:spcBef>
-              <a:spcAft>
-                <a:spcPts val="800"/>
-              </a:spcAft>
-              <a:defRPr sz="1800">
-                <a:solidFill>
-                  <a:srgbClr val="1E293B"/>
-                </a:solidFill>
-              </a:defRPr>
-            </a:pPr>
-            <a:r>
-              <a:t>• 인프라/운영: 3,000만원</a:t>
-            </a:r>
-          </a:p>
-          <a:p>
-            <a:pPr>
-              <a:spcBef>
-                <a:spcPts val="800"/>
-              </a:spcBef>
-              <a:spcAft>
-                <a:spcPts val="800"/>
-              </a:spcAft>
-              <a:defRPr sz="1800">
-                <a:solidFill>
-                  <a:srgbClr val="1E293B"/>
-                </a:solidFill>
-              </a:defRPr>
-            </a:pPr>
-            <a:r>
-              <a:t>• 인건비: 2,000만원</a:t>
-            </a:r>
-          </a:p>
-          <a:p>
-            <a:pPr>
-              <a:spcBef>
-                <a:spcPts val="800"/>
-              </a:spcBef>
-              <a:spcAft>
-                <a:spcPts val="800"/>
-              </a:spcAft>
-              <a:defRPr sz="1800">
-                <a:solidFill>
-                  <a:srgbClr val="1E293B"/>
-                </a:solidFill>
-              </a:defRPr>
-            </a:pPr>
-          </a:p>
-          <a:p>
-            <a:pPr>
-              <a:spcBef>
-                <a:spcPts val="800"/>
-              </a:spcBef>
-              <a:spcAft>
-                <a:spcPts val="800"/>
-              </a:spcAft>
-              <a:defRPr sz="1800">
-                <a:solidFill>
-                  <a:srgbClr val="1E293B"/>
-                </a:solidFill>
-              </a:defRPr>
-            </a:pPr>
-            <a:r>
-              <a:t>월 고정 운영비: 150만원</a:t>
-            </a:r>
-          </a:p>
-          <a:p>
-            <a:pPr>
-              <a:spcBef>
-                <a:spcPts val="800"/>
-              </a:spcBef>
-              <a:spcAft>
-                <a:spcPts val="800"/>
-              </a:spcAft>
-              <a:defRPr sz="1800">
-                <a:solidFill>
-                  <a:srgbClr val="1E293B"/>
-                </a:solidFill>
-              </a:defRPr>
-            </a:pPr>
-            <a:r>
-              <a:t>(기존 모델 3,000만원 대비 95% 절감)</a:t>
+                  <a:srgbClr val="34495E"/>
+                </a:solidFill>
+              </a:defRPr>
+            </a:pPr>
+            <a:r>
+              <a:t>📊 자동 데이터 갱신</a:t>
+            </a:r>
+          </a:p>
+          <a:p>
+            <a:pPr>
+              <a:spcBef>
+                <a:spcPts val="800"/>
+              </a:spcBef>
+              <a:spcAft>
+                <a:spcPts val="800"/>
+              </a:spcAft>
+              <a:defRPr sz="1800">
+                <a:solidFill>
+                  <a:srgbClr val="34495E"/>
+                </a:solidFill>
+              </a:defRPr>
+            </a:pPr>
+            <a:r>
+              <a:t>  • 보험료 일일 자동 수집 및 동기화</a:t>
+            </a:r>
+          </a:p>
+          <a:p>
+            <a:pPr>
+              <a:spcBef>
+                <a:spcPts val="800"/>
+              </a:spcBef>
+              <a:spcAft>
+                <a:spcPts val="800"/>
+              </a:spcAft>
+              <a:defRPr sz="1800">
+                <a:solidFill>
+                  <a:srgbClr val="34495E"/>
+                </a:solidFill>
+              </a:defRPr>
+            </a:pPr>
+            <a:r>
+              <a:t>  • 변경사항 자동 감지 및 반영</a:t>
+            </a:r>
+          </a:p>
+          <a:p>
+            <a:pPr>
+              <a:spcBef>
+                <a:spcPts val="800"/>
+              </a:spcBef>
+              <a:spcAft>
+                <a:spcPts val="800"/>
+              </a:spcAft>
+              <a:defRPr sz="1800">
+                <a:solidFill>
+                  <a:srgbClr val="34495E"/>
+                </a:solidFill>
+              </a:defRPr>
+            </a:pPr>
+          </a:p>
+          <a:p>
+            <a:pPr>
+              <a:spcBef>
+                <a:spcPts val="800"/>
+              </a:spcBef>
+              <a:spcAft>
+                <a:spcPts val="800"/>
+              </a:spcAft>
+              <a:defRPr sz="1800">
+                <a:solidFill>
+                  <a:srgbClr val="34495E"/>
+                </a:solidFill>
+              </a:defRPr>
+            </a:pPr>
+            <a:r>
+              <a:t>📝 콘텐츠 자동 생성</a:t>
+            </a:r>
+          </a:p>
+          <a:p>
+            <a:pPr>
+              <a:spcBef>
+                <a:spcPts val="800"/>
+              </a:spcBef>
+              <a:spcAft>
+                <a:spcPts val="800"/>
+              </a:spcAft>
+              <a:defRPr sz="1800">
+                <a:solidFill>
+                  <a:srgbClr val="34495E"/>
+                </a:solidFill>
+              </a:defRPr>
+            </a:pPr>
+            <a:r>
+              <a:t>  • Claude API로 일일 블로그 포스트 생성</a:t>
+            </a:r>
+          </a:p>
+          <a:p>
+            <a:pPr>
+              <a:spcBef>
+                <a:spcPts val="800"/>
+              </a:spcBef>
+              <a:spcAft>
+                <a:spcPts val="800"/>
+              </a:spcAft>
+              <a:defRPr sz="1800">
+                <a:solidFill>
+                  <a:srgbClr val="34495E"/>
+                </a:solidFill>
+              </a:defRPr>
+            </a:pPr>
+            <a:r>
+              <a:t>  • SNS 콘텐츠 자동화 (Instagram, Twitter, Facebook)</a:t>
+            </a:r>
+          </a:p>
+          <a:p>
+            <a:pPr>
+              <a:spcBef>
+                <a:spcPts val="800"/>
+              </a:spcBef>
+              <a:spcAft>
+                <a:spcPts val="800"/>
+              </a:spcAft>
+              <a:defRPr sz="1800">
+                <a:solidFill>
+                  <a:srgbClr val="34495E"/>
+                </a:solidFill>
+              </a:defRPr>
+            </a:pPr>
+          </a:p>
+          <a:p>
+            <a:pPr>
+              <a:spcBef>
+                <a:spcPts val="800"/>
+              </a:spcBef>
+              <a:spcAft>
+                <a:spcPts val="800"/>
+              </a:spcAft>
+              <a:defRPr sz="1800">
+                <a:solidFill>
+                  <a:srgbClr val="34495E"/>
+                </a:solidFill>
+              </a:defRPr>
+            </a:pPr>
+            <a:r>
+              <a:t>🤖 AI 기반 자동 최적화</a:t>
+            </a:r>
+          </a:p>
+          <a:p>
+            <a:pPr>
+              <a:spcBef>
+                <a:spcPts val="800"/>
+              </a:spcBef>
+              <a:spcAft>
+                <a:spcPts val="800"/>
+              </a:spcAft>
+              <a:defRPr sz="1800">
+                <a:solidFill>
+                  <a:srgbClr val="34495E"/>
+                </a:solidFill>
+              </a:defRPr>
+            </a:pPr>
+            <a:r>
+              <a:t>  • 사용자 행동 분석 (Analytics)</a:t>
+            </a:r>
+          </a:p>
+          <a:p>
+            <a:pPr>
+              <a:spcBef>
+                <a:spcPts val="800"/>
+              </a:spcBef>
+              <a:spcAft>
+                <a:spcPts val="800"/>
+              </a:spcAft>
+              <a:defRPr sz="1800">
+                <a:solidFill>
+                  <a:srgbClr val="34495E"/>
+                </a:solidFill>
+              </a:defRPr>
+            </a:pPr>
+            <a:r>
+              <a:t>  • 개선안 자동 도출 및 배포</a:t>
+            </a:r>
+          </a:p>
+          <a:p>
+            <a:pPr>
+              <a:spcBef>
+                <a:spcPts val="800"/>
+              </a:spcBef>
+              <a:spcAft>
+                <a:spcPts val="800"/>
+              </a:spcAft>
+              <a:defRPr sz="1800">
+                <a:solidFill>
+                  <a:srgbClr val="34495E"/>
+                </a:solidFill>
+              </a:defRPr>
+            </a:pPr>
+            <a:r>
+              <a:t>  • A/B 테스트 자동화</a:t>
+            </a:r>
+          </a:p>
+          <a:p>
+            <a:pPr>
+              <a:spcBef>
+                <a:spcPts val="800"/>
+              </a:spcBef>
+              <a:spcAft>
+                <a:spcPts val="800"/>
+              </a:spcAft>
+              <a:defRPr sz="1800">
+                <a:solidFill>
+                  <a:srgbClr val="34495E"/>
+                </a:solidFill>
+              </a:defRPr>
+            </a:pPr>
+          </a:p>
+          <a:p>
+            <a:pPr>
+              <a:spcBef>
+                <a:spcPts val="800"/>
+              </a:spcBef>
+              <a:spcAft>
+                <a:spcPts val="800"/>
+              </a:spcAft>
+              <a:defRPr sz="1800">
+                <a:solidFill>
+                  <a:srgbClr val="34495E"/>
+                </a:solidFill>
+              </a:defRPr>
+            </a:pPr>
+            <a:r>
+              <a:t>🎯 목표: 90% 자동화 (인간 개입 최소화)</a:t>
             </a:r>
           </a:p>
         </p:txBody>
@@ -3459,14 +3562,6 @@
 <file path=ppt/slides/slide11.xml><?xml version="1.0" encoding="utf-8"?>
 <p:sld xmlns:a="http://schemas.openxmlformats.org/drawingml/2006/main" xmlns:p="http://schemas.openxmlformats.org/presentationml/2006/main" xmlns:r="http://schemas.openxmlformats.org/officeDocument/2006/relationships">
   <p:cSld>
-    <p:bg>
-      <p:bgPr>
-        <a:solidFill>
-          <a:srgbClr val="FFFFFF"/>
-        </a:solidFill>
-        <a:effectLst/>
-      </p:bgPr>
-    </p:bg>
     <p:spTree>
       <p:nvGrpSpPr>
         <p:cNvPr id="1" name=""/>
@@ -3476,56 +3571,24 @@
       <p:grpSpPr/>
       <p:sp>
         <p:nvSpPr>
-          <p:cNvPr id="2" name="TextBox 1"/>
-          <p:cNvSpPr txBox="1"/>
+          <p:cNvPr id="2" name="Rectangle 1"/>
+          <p:cNvSpPr/>
           <p:nvPr/>
         </p:nvSpPr>
         <p:spPr>
           <a:xfrm>
-            <a:off x="457200" y="274320"/>
-            <a:ext cx="8229600" cy="731520"/>
+            <a:off x="0" y="0"/>
+            <a:ext cx="9144000" cy="731520"/>
           </a:xfrm>
           <a:prstGeom prst="rect">
             <a:avLst/>
           </a:prstGeom>
-          <a:noFill/>
-        </p:spPr>
-        <p:txBody>
-          <a:bodyPr wrap="none">
-            <a:spAutoFit/>
-          </a:bodyPr>
-          <a:lstStyle/>
-          <a:p>
-            <a:pPr>
-              <a:defRPr sz="4400" b="1">
-                <a:solidFill>
-                  <a:srgbClr val="1E293B"/>
-                </a:solidFill>
-              </a:defRPr>
-            </a:pPr>
-            <a:r>
-              <a:t>📊 3년 매출 전망</a:t>
-            </a:r>
-          </a:p>
-        </p:txBody>
-      </p:sp>
-      <p:sp>
-        <p:nvSpPr>
-          <p:cNvPr id="3" name="Rectangle 2"/>
-          <p:cNvSpPr/>
-          <p:nvPr/>
-        </p:nvSpPr>
-        <p:spPr>
-          <a:xfrm>
-            <a:off x="457200" y="1097280"/>
-            <a:ext cx="8229600" cy="0"/>
-          </a:xfrm>
-          <a:prstGeom prst="rect">
-            <a:avLst/>
-          </a:prstGeom>
-          <a:ln w="38100">
+          <a:solidFill>
+            <a:srgbClr val="2980B9"/>
+          </a:solidFill>
+          <a:ln>
             <a:solidFill>
-              <a:srgbClr val="2563EB"/>
+              <a:srgbClr val="2980B9"/>
             </a:solidFill>
           </a:ln>
         </p:spPr>
@@ -3553,14 +3616,14 @@
       </p:sp>
       <p:sp>
         <p:nvSpPr>
-          <p:cNvPr id="4" name="TextBox 3"/>
+          <p:cNvPr id="3" name="TextBox 2"/>
           <p:cNvSpPr txBox="1"/>
           <p:nvPr/>
         </p:nvSpPr>
         <p:spPr>
           <a:xfrm>
-            <a:off x="731520" y="1371600"/>
-            <a:ext cx="7680960" cy="5029200"/>
+            <a:off x="457200" y="91440"/>
+            <a:ext cx="8229600" cy="548640"/>
           </a:xfrm>
           <a:prstGeom prst="rect">
             <a:avLst/>
@@ -3568,6 +3631,41 @@
           <a:noFill/>
         </p:spPr>
         <p:txBody>
+          <a:bodyPr wrap="none">
+            <a:spAutoFit/>
+          </a:bodyPr>
+          <a:lstStyle/>
+          <a:p>
+            <a:pPr>
+              <a:defRPr sz="4000" b="1">
+                <a:solidFill>
+                  <a:srgbClr val="FFFFFF"/>
+                </a:solidFill>
+              </a:defRPr>
+            </a:pPr>
+            <a:r>
+              <a:t>📅 개발 시간표 (Roadmap)</a:t>
+            </a:r>
+          </a:p>
+        </p:txBody>
+      </p:sp>
+      <p:sp>
+        <p:nvSpPr>
+          <p:cNvPr id="4" name="TextBox 3"/>
+          <p:cNvSpPr txBox="1"/>
+          <p:nvPr/>
+        </p:nvSpPr>
+        <p:spPr>
+          <a:xfrm>
+            <a:off x="731520" y="1097280"/>
+            <a:ext cx="7680960" cy="5303520"/>
+          </a:xfrm>
+          <a:prstGeom prst="rect">
+            <a:avLst/>
+          </a:prstGeom>
+          <a:noFill/>
+        </p:spPr>
+        <p:txBody>
           <a:bodyPr wrap="square">
             <a:spAutoFit/>
           </a:bodyPr>
@@ -3582,183 +3680,222 @@
               </a:spcAft>
               <a:defRPr sz="1800">
                 <a:solidFill>
-                  <a:srgbClr val="1E293B"/>
-                </a:solidFill>
-              </a:defRPr>
-            </a:pPr>
-            <a:r>
-              <a:t>Year 1 (2026): 1,500만원 (투자 대비 3배)</a:t>
-            </a:r>
-          </a:p>
-          <a:p>
-            <a:pPr>
-              <a:spcBef>
-                <a:spcPts val="800"/>
-              </a:spcBef>
-              <a:spcAft>
-                <a:spcPts val="800"/>
-              </a:spcAft>
-              <a:defRPr sz="1800">
-                <a:solidFill>
-                  <a:srgbClr val="1E293B"/>
-                </a:solidFill>
-              </a:defRPr>
-            </a:pPr>
-            <a:r>
-              <a:t>• 월 방문자: 2,000명 → 10,000명</a:t>
-            </a:r>
-          </a:p>
-          <a:p>
-            <a:pPr>
-              <a:spcBef>
-                <a:spcPts val="800"/>
-              </a:spcBef>
-              <a:spcAft>
-                <a:spcPts val="800"/>
-              </a:spcAft>
-              <a:defRPr sz="1800">
-                <a:solidFill>
-                  <a:srgbClr val="1E293B"/>
-                </a:solidFill>
-              </a:defRPr>
-            </a:pPr>
-            <a:r>
-              <a:t>• 월 계약: 100건 → 200건</a:t>
-            </a:r>
-          </a:p>
-          <a:p>
-            <a:pPr>
-              <a:spcBef>
-                <a:spcPts val="800"/>
-              </a:spcBef>
-              <a:spcAft>
-                <a:spcPts val="800"/>
-              </a:spcAft>
-              <a:defRPr sz="1800">
-                <a:solidFill>
-                  <a:srgbClr val="1E293B"/>
-                </a:solidFill>
-              </a:defRPr>
-            </a:pPr>
-          </a:p>
-          <a:p>
-            <a:pPr>
-              <a:spcBef>
-                <a:spcPts val="800"/>
-              </a:spcBef>
-              <a:spcAft>
-                <a:spcPts val="800"/>
-              </a:spcAft>
-              <a:defRPr sz="1800">
-                <a:solidFill>
-                  <a:srgbClr val="1E293B"/>
-                </a:solidFill>
-              </a:defRPr>
-            </a:pPr>
-            <a:r>
-              <a:t>Year 2 (2027): 1억 2,000만원</a:t>
-            </a:r>
-          </a:p>
-          <a:p>
-            <a:pPr>
-              <a:spcBef>
-                <a:spcPts val="800"/>
-              </a:spcBef>
-              <a:spcAft>
-                <a:spcPts val="800"/>
-              </a:spcAft>
-              <a:defRPr sz="1800">
-                <a:solidFill>
-                  <a:srgbClr val="1E293B"/>
-                </a:solidFill>
-              </a:defRPr>
-            </a:pPr>
-            <a:r>
-              <a:t>• 월 계약: 200건</a:t>
-            </a:r>
-          </a:p>
-          <a:p>
-            <a:pPr>
-              <a:spcBef>
-                <a:spcPts val="800"/>
-              </a:spcBef>
-              <a:spcAft>
-                <a:spcPts val="800"/>
-              </a:spcAft>
-              <a:defRPr sz="1800">
-                <a:solidFill>
-                  <a:srgbClr val="1E293B"/>
-                </a:solidFill>
-              </a:defRPr>
-            </a:pPr>
-          </a:p>
-          <a:p>
-            <a:pPr>
-              <a:spcBef>
-                <a:spcPts val="800"/>
-              </a:spcBef>
-              <a:spcAft>
-                <a:spcPts val="800"/>
-              </a:spcAft>
-              <a:defRPr sz="1800">
-                <a:solidFill>
-                  <a:srgbClr val="1E293B"/>
-                </a:solidFill>
-              </a:defRPr>
-            </a:pPr>
-            <a:r>
-              <a:t>Year 3 (2028): 3억원</a:t>
-            </a:r>
-          </a:p>
-          <a:p>
-            <a:pPr>
-              <a:spcBef>
-                <a:spcPts val="800"/>
-              </a:spcBef>
-              <a:spcAft>
-                <a:spcPts val="800"/>
-              </a:spcAft>
-              <a:defRPr sz="1800">
-                <a:solidFill>
-                  <a:srgbClr val="1E293B"/>
-                </a:solidFill>
-              </a:defRPr>
-            </a:pPr>
-            <a:r>
-              <a:t>• 월 계약: 500건</a:t>
-            </a:r>
-          </a:p>
-          <a:p>
-            <a:pPr>
-              <a:spcBef>
-                <a:spcPts val="800"/>
-              </a:spcBef>
-              <a:spcAft>
-                <a:spcPts val="800"/>
-              </a:spcAft>
-              <a:defRPr sz="1800">
-                <a:solidFill>
-                  <a:srgbClr val="1E293B"/>
-                </a:solidFill>
-              </a:defRPr>
-            </a:pPr>
-          </a:p>
-          <a:p>
-            <a:pPr>
-              <a:spcBef>
-                <a:spcPts val="800"/>
-              </a:spcBef>
-              <a:spcAft>
-                <a:spcPts val="800"/>
-              </a:spcAft>
-              <a:defRPr sz="1800">
-                <a:solidFill>
-                  <a:srgbClr val="1E293B"/>
-                </a:solidFill>
-              </a:defRPr>
-            </a:pPr>
-            <a:r>
-              <a:t>손익분기점: 6개월</a:t>
+                  <a:srgbClr val="34495E"/>
+                </a:solidFill>
+              </a:defRPr>
+            </a:pPr>
+            <a:r>
+              <a:t>✅ Phase 1: MVP 완성 (2026.02.28 완료)</a:t>
+            </a:r>
+          </a:p>
+          <a:p>
+            <a:pPr>
+              <a:spcBef>
+                <a:spcPts val="800"/>
+              </a:spcBef>
+              <a:spcAft>
+                <a:spcPts val="800"/>
+              </a:spcAft>
+              <a:defRPr sz="1800">
+                <a:solidFill>
+                  <a:srgbClr val="34495E"/>
+                </a:solidFill>
+              </a:defRPr>
+            </a:pPr>
+            <a:r>
+              <a:t>  • 6가지 이슈 해결 완료</a:t>
+            </a:r>
+          </a:p>
+          <a:p>
+            <a:pPr>
+              <a:spcBef>
+                <a:spcPts val="800"/>
+              </a:spcBef>
+              <a:spcAft>
+                <a:spcPts val="800"/>
+              </a:spcAft>
+              <a:defRPr sz="1800">
+                <a:solidFill>
+                  <a:srgbClr val="34495E"/>
+                </a:solidFill>
+              </a:defRPr>
+            </a:pPr>
+            <a:r>
+              <a:t>  • 프로덕션 배포 준비</a:t>
+            </a:r>
+          </a:p>
+          <a:p>
+            <a:pPr>
+              <a:spcBef>
+                <a:spcPts val="800"/>
+              </a:spcBef>
+              <a:spcAft>
+                <a:spcPts val="800"/>
+              </a:spcAft>
+              <a:defRPr sz="1800">
+                <a:solidFill>
+                  <a:srgbClr val="34495E"/>
+                </a:solidFill>
+              </a:defRPr>
+            </a:pPr>
+          </a:p>
+          <a:p>
+            <a:pPr>
+              <a:spcBef>
+                <a:spcPts val="800"/>
+              </a:spcBef>
+              <a:spcAft>
+                <a:spcPts val="800"/>
+              </a:spcAft>
+              <a:defRPr sz="1800">
+                <a:solidFill>
+                  <a:srgbClr val="34495E"/>
+                </a:solidFill>
+              </a:defRPr>
+            </a:pPr>
+            <a:r>
+              <a:t>🟡 Phase 2: 자율진화형 플랫폼 (2026.03~05)</a:t>
+            </a:r>
+          </a:p>
+          <a:p>
+            <a:pPr>
+              <a:spcBef>
+                <a:spcPts val="800"/>
+              </a:spcBef>
+              <a:spcAft>
+                <a:spcPts val="800"/>
+              </a:spcAft>
+              <a:defRPr sz="1800">
+                <a:solidFill>
+                  <a:srgbClr val="34495E"/>
+                </a:solidFill>
+              </a:defRPr>
+            </a:pPr>
+            <a:r>
+              <a:t>  • 데이터 자동 갱신 시스템</a:t>
+            </a:r>
+          </a:p>
+          <a:p>
+            <a:pPr>
+              <a:spcBef>
+                <a:spcPts val="800"/>
+              </a:spcBef>
+              <a:spcAft>
+                <a:spcPts val="800"/>
+              </a:spcAft>
+              <a:defRPr sz="1800">
+                <a:solidFill>
+                  <a:srgbClr val="34495E"/>
+                </a:solidFill>
+              </a:defRPr>
+            </a:pPr>
+            <a:r>
+              <a:t>  • 콘텐츠 자동 생성</a:t>
+            </a:r>
+          </a:p>
+          <a:p>
+            <a:pPr>
+              <a:spcBef>
+                <a:spcPts val="800"/>
+              </a:spcBef>
+              <a:spcAft>
+                <a:spcPts val="800"/>
+              </a:spcAft>
+              <a:defRPr sz="1800">
+                <a:solidFill>
+                  <a:srgbClr val="34495E"/>
+                </a:solidFill>
+              </a:defRPr>
+            </a:pPr>
+            <a:r>
+              <a:t>  • Analytics 고도화</a:t>
+            </a:r>
+          </a:p>
+          <a:p>
+            <a:pPr>
+              <a:spcBef>
+                <a:spcPts val="800"/>
+              </a:spcBef>
+              <a:spcAft>
+                <a:spcPts val="800"/>
+              </a:spcAft>
+              <a:defRPr sz="1800">
+                <a:solidFill>
+                  <a:srgbClr val="34495E"/>
+                </a:solidFill>
+              </a:defRPr>
+            </a:pPr>
+          </a:p>
+          <a:p>
+            <a:pPr>
+              <a:spcBef>
+                <a:spcPts val="800"/>
+              </a:spcBef>
+              <a:spcAft>
+                <a:spcPts val="800"/>
+              </a:spcAft>
+              <a:defRPr sz="1800">
+                <a:solidFill>
+                  <a:srgbClr val="34495E"/>
+                </a:solidFill>
+              </a:defRPr>
+            </a:pPr>
+            <a:r>
+              <a:t>🟢 Phase 3: 사업 확장 (2026.06~12)</a:t>
+            </a:r>
+          </a:p>
+          <a:p>
+            <a:pPr>
+              <a:spcBef>
+                <a:spcPts val="800"/>
+              </a:spcBef>
+              <a:spcAft>
+                <a:spcPts val="800"/>
+              </a:spcAft>
+              <a:defRPr sz="1800">
+                <a:solidFill>
+                  <a:srgbClr val="34495E"/>
+                </a:solidFill>
+              </a:defRPr>
+            </a:pPr>
+            <a:r>
+              <a:t>  • 보험사 제휴 확대</a:t>
+            </a:r>
+          </a:p>
+          <a:p>
+            <a:pPr>
+              <a:spcBef>
+                <a:spcPts val="800"/>
+              </a:spcBef>
+              <a:spcAft>
+                <a:spcPts val="800"/>
+              </a:spcAft>
+              <a:defRPr sz="1800">
+                <a:solidFill>
+                  <a:srgbClr val="34495E"/>
+                </a:solidFill>
+              </a:defRPr>
+            </a:pPr>
+            <a:r>
+              <a:t>  • 광고 수익 활성화</a:t>
+            </a:r>
+          </a:p>
+          <a:p>
+            <a:pPr>
+              <a:spcBef>
+                <a:spcPts val="800"/>
+              </a:spcBef>
+              <a:spcAft>
+                <a:spcPts val="800"/>
+              </a:spcAft>
+              <a:defRPr sz="1800">
+                <a:solidFill>
+                  <a:srgbClr val="34495E"/>
+                </a:solidFill>
+              </a:defRPr>
+            </a:pPr>
+            <a:r>
+              <a:t>  • 국제 확장 (영문 지원)</a:t>
             </a:r>
           </a:p>
         </p:txBody>
@@ -3774,14 +3911,6 @@
 <file path=ppt/slides/slide12.xml><?xml version="1.0" encoding="utf-8"?>
 <p:sld xmlns:a="http://schemas.openxmlformats.org/drawingml/2006/main" xmlns:p="http://schemas.openxmlformats.org/presentationml/2006/main" xmlns:r="http://schemas.openxmlformats.org/officeDocument/2006/relationships">
   <p:cSld>
-    <p:bg>
-      <p:bgPr>
-        <a:solidFill>
-          <a:srgbClr val="FFFFFF"/>
-        </a:solidFill>
-        <a:effectLst/>
-      </p:bgPr>
-    </p:bg>
     <p:spTree>
       <p:nvGrpSpPr>
         <p:cNvPr id="1" name=""/>
@@ -3791,56 +3920,24 @@
       <p:grpSpPr/>
       <p:sp>
         <p:nvSpPr>
-          <p:cNvPr id="2" name="TextBox 1"/>
-          <p:cNvSpPr txBox="1"/>
+          <p:cNvPr id="2" name="Rectangle 1"/>
+          <p:cNvSpPr/>
           <p:nvPr/>
         </p:nvSpPr>
         <p:spPr>
           <a:xfrm>
-            <a:off x="457200" y="274320"/>
-            <a:ext cx="8229600" cy="731520"/>
+            <a:off x="0" y="0"/>
+            <a:ext cx="9144000" cy="731520"/>
           </a:xfrm>
           <a:prstGeom prst="rect">
             <a:avLst/>
           </a:prstGeom>
-          <a:noFill/>
-        </p:spPr>
-        <p:txBody>
-          <a:bodyPr wrap="none">
-            <a:spAutoFit/>
-          </a:bodyPr>
-          <a:lstStyle/>
-          <a:p>
-            <a:pPr>
-              <a:defRPr sz="4400" b="1">
-                <a:solidFill>
-                  <a:srgbClr val="1E293B"/>
-                </a:solidFill>
-              </a:defRPr>
-            </a:pPr>
-            <a:r>
-              <a:t>5️⃣ 실행 계획</a:t>
-            </a:r>
-          </a:p>
-        </p:txBody>
-      </p:sp>
-      <p:sp>
-        <p:nvSpPr>
-          <p:cNvPr id="3" name="Rectangle 2"/>
-          <p:cNvSpPr/>
-          <p:nvPr/>
-        </p:nvSpPr>
-        <p:spPr>
-          <a:xfrm>
-            <a:off x="457200" y="1097280"/>
-            <a:ext cx="8229600" cy="0"/>
-          </a:xfrm>
-          <a:prstGeom prst="rect">
-            <a:avLst/>
-          </a:prstGeom>
-          <a:ln w="38100">
+          <a:solidFill>
+            <a:srgbClr val="2980B9"/>
+          </a:solidFill>
+          <a:ln>
             <a:solidFill>
-              <a:srgbClr val="2563EB"/>
+              <a:srgbClr val="2980B9"/>
             </a:solidFill>
           </a:ln>
         </p:spPr>
@@ -3868,14 +3965,14 @@
       </p:sp>
       <p:sp>
         <p:nvSpPr>
-          <p:cNvPr id="4" name="TextBox 3"/>
+          <p:cNvPr id="3" name="TextBox 2"/>
           <p:cNvSpPr txBox="1"/>
           <p:nvPr/>
         </p:nvSpPr>
         <p:spPr>
           <a:xfrm>
-            <a:off x="731520" y="1371600"/>
-            <a:ext cx="7680960" cy="5029200"/>
+            <a:off x="457200" y="91440"/>
+            <a:ext cx="8229600" cy="548640"/>
           </a:xfrm>
           <a:prstGeom prst="rect">
             <a:avLst/>
@@ -3883,6 +3980,41 @@
           <a:noFill/>
         </p:spPr>
         <p:txBody>
+          <a:bodyPr wrap="none">
+            <a:spAutoFit/>
+          </a:bodyPr>
+          <a:lstStyle/>
+          <a:p>
+            <a:pPr>
+              <a:defRPr sz="4000" b="1">
+                <a:solidFill>
+                  <a:srgbClr val="FFFFFF"/>
+                </a:solidFill>
+              </a:defRPr>
+            </a:pPr>
+            <a:r>
+              <a:t>⚖️ 법적 준칙 및 준수사항</a:t>
+            </a:r>
+          </a:p>
+        </p:txBody>
+      </p:sp>
+      <p:sp>
+        <p:nvSpPr>
+          <p:cNvPr id="4" name="TextBox 3"/>
+          <p:cNvSpPr txBox="1"/>
+          <p:nvPr/>
+        </p:nvSpPr>
+        <p:spPr>
+          <a:xfrm>
+            <a:off x="731520" y="1097280"/>
+            <a:ext cx="7680960" cy="5303520"/>
+          </a:xfrm>
+          <a:prstGeom prst="rect">
+            <a:avLst/>
+          </a:prstGeom>
+          <a:noFill/>
+        </p:spPr>
+        <p:txBody>
           <a:bodyPr wrap="square">
             <a:spAutoFit/>
           </a:bodyPr>
@@ -3897,168 +4029,219 @@
               </a:spcAft>
               <a:defRPr sz="1800">
                 <a:solidFill>
-                  <a:srgbClr val="1E293B"/>
-                </a:solidFill>
-              </a:defRPr>
-            </a:pPr>
-            <a:r>
-              <a:t>Phase 1 (1월-3월): 기반 조성 ✅ 완료</a:t>
-            </a:r>
-          </a:p>
-          <a:p>
-            <a:pPr>
-              <a:spcBef>
-                <a:spcPts val="800"/>
-              </a:spcBef>
-              <a:spcAft>
-                <a:spcPts val="800"/>
-              </a:spcAft>
-              <a:defRPr sz="1800">
-                <a:solidFill>
-                  <a:srgbClr val="1E293B"/>
-                </a:solidFill>
-              </a:defRPr>
-            </a:pPr>
-            <a:r>
-              <a:t>• AI 챗봇, 자동화 시스템 개발</a:t>
-            </a:r>
-          </a:p>
-          <a:p>
-            <a:pPr>
-              <a:spcBef>
-                <a:spcPts val="800"/>
-              </a:spcBef>
-              <a:spcAft>
-                <a:spcPts val="800"/>
-              </a:spcAft>
-              <a:defRPr sz="1800">
-                <a:solidFill>
-                  <a:srgbClr val="1E293B"/>
-                </a:solidFill>
-              </a:defRPr>
-            </a:pPr>
-          </a:p>
-          <a:p>
-            <a:pPr>
-              <a:spcBef>
-                <a:spcPts val="800"/>
-              </a:spcBef>
-              <a:spcAft>
-                <a:spcPts val="800"/>
-              </a:spcAft>
-              <a:defRPr sz="1800">
-                <a:solidFill>
-                  <a:srgbClr val="1E293B"/>
-                </a:solidFill>
-              </a:defRPr>
-            </a:pPr>
-            <a:r>
-              <a:t>Phase 2 (4월-6월): 마켓 진출</a:t>
-            </a:r>
-          </a:p>
-          <a:p>
-            <a:pPr>
-              <a:spcBef>
-                <a:spcPts val="800"/>
-              </a:spcBef>
-              <a:spcAft>
-                <a:spcPts val="800"/>
-              </a:spcAft>
-              <a:defRPr sz="1800">
-                <a:solidFill>
-                  <a:srgbClr val="1E293B"/>
-                </a:solidFill>
-              </a:defRPr>
-            </a:pPr>
-            <a:r>
-              <a:t>• 목표: 월 2,000명, 100건 상담신청</a:t>
-            </a:r>
-          </a:p>
-          <a:p>
-            <a:pPr>
-              <a:spcBef>
-                <a:spcPts val="800"/>
-              </a:spcBef>
-              <a:spcAft>
-                <a:spcPts val="800"/>
-              </a:spcAft>
-              <a:defRPr sz="1800">
-                <a:solidFill>
-                  <a:srgbClr val="1E293B"/>
-                </a:solidFill>
-              </a:defRPr>
-            </a:pPr>
-            <a:r>
-              <a:t>• 마케팅 비용: 2,500만원</a:t>
-            </a:r>
-          </a:p>
-          <a:p>
-            <a:pPr>
-              <a:spcBef>
-                <a:spcPts val="800"/>
-              </a:spcBef>
-              <a:spcAft>
-                <a:spcPts val="800"/>
-              </a:spcAft>
-              <a:defRPr sz="1800">
-                <a:solidFill>
-                  <a:srgbClr val="1E293B"/>
-                </a:solidFill>
-              </a:defRPr>
-            </a:pPr>
-          </a:p>
-          <a:p>
-            <a:pPr>
-              <a:spcBef>
-                <a:spcPts val="800"/>
-              </a:spcBef>
-              <a:spcAft>
-                <a:spcPts val="800"/>
-              </a:spcAft>
-              <a:defRPr sz="1800">
-                <a:solidFill>
-                  <a:srgbClr val="1E293B"/>
-                </a:solidFill>
-              </a:defRPr>
-            </a:pPr>
-            <a:r>
-              <a:t>Phase 3 (7월-12월): 성장 단계</a:t>
-            </a:r>
-          </a:p>
-          <a:p>
-            <a:pPr>
-              <a:spcBef>
-                <a:spcPts val="800"/>
-              </a:spcBef>
-              <a:spcAft>
-                <a:spcPts val="800"/>
-              </a:spcAft>
-              <a:defRPr sz="1800">
-                <a:solidFill>
-                  <a:srgbClr val="1E293B"/>
-                </a:solidFill>
-              </a:defRPr>
-            </a:pPr>
-            <a:r>
-              <a:t>• 목표: 월 10,000명, 500건 상담</a:t>
-            </a:r>
-          </a:p>
-          <a:p>
-            <a:pPr>
-              <a:spcBef>
-                <a:spcPts val="800"/>
-              </a:spcBef>
-              <a:spcAft>
-                <a:spcPts val="800"/>
-              </a:spcAft>
-              <a:defRPr sz="1800">
-                <a:solidFill>
-                  <a:srgbClr val="1E293B"/>
-                </a:solidFill>
-              </a:defRPr>
-            </a:pPr>
-            <a:r>
-              <a:t>• ROI 200% 달성</a:t>
+                  <a:srgbClr val="34495E"/>
+                </a:solidFill>
+              </a:defRPr>
+            </a:pPr>
+            <a:r>
+              <a:t>✅ 면책 공고 3곳 배치</a:t>
+            </a:r>
+          </a:p>
+          <a:p>
+            <a:pPr>
+              <a:spcBef>
+                <a:spcPts val="800"/>
+              </a:spcBef>
+              <a:spcAft>
+                <a:spcPts val="800"/>
+              </a:spcAft>
+              <a:defRPr sz="1800">
+                <a:solidFill>
+                  <a:srgbClr val="34495E"/>
+                </a:solidFill>
+              </a:defRPr>
+            </a:pPr>
+            <a:r>
+              <a:t>  '본 페이지는 정보 제공이며 상품 권유가 아님'</a:t>
+            </a:r>
+          </a:p>
+          <a:p>
+            <a:pPr>
+              <a:spcBef>
+                <a:spcPts val="800"/>
+              </a:spcBef>
+              <a:spcAft>
+                <a:spcPts val="800"/>
+              </a:spcAft>
+              <a:defRPr sz="1800">
+                <a:solidFill>
+                  <a:srgbClr val="34495E"/>
+                </a:solidFill>
+              </a:defRPr>
+            </a:pPr>
+          </a:p>
+          <a:p>
+            <a:pPr>
+              <a:spcBef>
+                <a:spcPts val="800"/>
+              </a:spcBef>
+              <a:spcAft>
+                <a:spcPts val="800"/>
+              </a:spcAft>
+              <a:defRPr sz="1800">
+                <a:solidFill>
+                  <a:srgbClr val="34495E"/>
+                </a:solidFill>
+              </a:defRPr>
+            </a:pPr>
+            <a:r>
+              <a:t>✅ 보험업법 준수</a:t>
+            </a:r>
+          </a:p>
+          <a:p>
+            <a:pPr>
+              <a:spcBef>
+                <a:spcPts val="800"/>
+              </a:spcBef>
+              <a:spcAft>
+                <a:spcPts val="800"/>
+              </a:spcAft>
+              <a:defRPr sz="1800">
+                <a:solidFill>
+                  <a:srgbClr val="34495E"/>
+                </a:solidFill>
+              </a:defRPr>
+            </a:pPr>
+            <a:r>
+              <a:t>  • 확정적 표현 제거 ('최저가', '무조건 보상')</a:t>
+            </a:r>
+          </a:p>
+          <a:p>
+            <a:pPr>
+              <a:spcBef>
+                <a:spcPts val="800"/>
+              </a:spcBef>
+              <a:spcAft>
+                <a:spcPts val="800"/>
+              </a:spcAft>
+              <a:defRPr sz="1800">
+                <a:solidFill>
+                  <a:srgbClr val="34495E"/>
+                </a:solidFill>
+              </a:defRPr>
+            </a:pPr>
+            <a:r>
+              <a:t>  • 약관 확인 필수 안내</a:t>
+            </a:r>
+          </a:p>
+          <a:p>
+            <a:pPr>
+              <a:spcBef>
+                <a:spcPts val="800"/>
+              </a:spcBef>
+              <a:spcAft>
+                <a:spcPts val="800"/>
+              </a:spcAft>
+              <a:defRPr sz="1800">
+                <a:solidFill>
+                  <a:srgbClr val="34495E"/>
+                </a:solidFill>
+              </a:defRPr>
+            </a:pPr>
+          </a:p>
+          <a:p>
+            <a:pPr>
+              <a:spcBef>
+                <a:spcPts val="800"/>
+              </a:spcBef>
+              <a:spcAft>
+                <a:spcPts val="800"/>
+              </a:spcAft>
+              <a:defRPr sz="1800">
+                <a:solidFill>
+                  <a:srgbClr val="34495E"/>
+                </a:solidFill>
+              </a:defRPr>
+            </a:pPr>
+            <a:r>
+              <a:t>✅ 개인정보보호법 준수</a:t>
+            </a:r>
+          </a:p>
+          <a:p>
+            <a:pPr>
+              <a:spcBef>
+                <a:spcPts val="800"/>
+              </a:spcBef>
+              <a:spcAft>
+                <a:spcPts val="800"/>
+              </a:spcAft>
+              <a:defRPr sz="1800">
+                <a:solidFill>
+                  <a:srgbClr val="34495E"/>
+                </a:solidFill>
+              </a:defRPr>
+            </a:pPr>
+            <a:r>
+              <a:t>  • Supabase 암호화 저장</a:t>
+            </a:r>
+          </a:p>
+          <a:p>
+            <a:pPr>
+              <a:spcBef>
+                <a:spcPts val="800"/>
+              </a:spcBef>
+              <a:spcAft>
+                <a:spcPts val="800"/>
+              </a:spcAft>
+              <a:defRPr sz="1800">
+                <a:solidFill>
+                  <a:srgbClr val="34495E"/>
+                </a:solidFill>
+              </a:defRPr>
+            </a:pPr>
+            <a:r>
+              <a:t>  • GDPR 호환</a:t>
+            </a:r>
+          </a:p>
+          <a:p>
+            <a:pPr>
+              <a:spcBef>
+                <a:spcPts val="800"/>
+              </a:spcBef>
+              <a:spcAft>
+                <a:spcPts val="800"/>
+              </a:spcAft>
+              <a:defRPr sz="1800">
+                <a:solidFill>
+                  <a:srgbClr val="34495E"/>
+                </a:solidFill>
+              </a:defRPr>
+            </a:pPr>
+          </a:p>
+          <a:p>
+            <a:pPr>
+              <a:spcBef>
+                <a:spcPts val="800"/>
+              </a:spcBef>
+              <a:spcAft>
+                <a:spcPts val="800"/>
+              </a:spcAft>
+              <a:defRPr sz="1800">
+                <a:solidFill>
+                  <a:srgbClr val="34495E"/>
+                </a:solidFill>
+              </a:defRPr>
+            </a:pPr>
+            <a:r>
+              <a:t>✅ 금융감독 준비</a:t>
+            </a:r>
+          </a:p>
+          <a:p>
+            <a:pPr>
+              <a:spcBef>
+                <a:spcPts val="800"/>
+              </a:spcBef>
+              <a:spcAft>
+                <a:spcPts val="800"/>
+              </a:spcAft>
+              <a:defRPr sz="1800">
+                <a:solidFill>
+                  <a:srgbClr val="34495E"/>
+                </a:solidFill>
+              </a:defRPr>
+            </a:pPr>
+            <a:r>
+              <a:t>  • Gemini AI 법률 자문 적용완료</a:t>
             </a:r>
           </a:p>
         </p:txBody>
@@ -4077,7 +4260,7 @@
     <p:bg>
       <p:bgPr>
         <a:solidFill>
-          <a:srgbClr val="FFFFFF"/>
+          <a:srgbClr val="194D8A"/>
         </a:solidFill>
         <a:effectLst/>
       </p:bgPr>
@@ -4097,8 +4280,8 @@
         </p:nvSpPr>
         <p:spPr>
           <a:xfrm>
-            <a:off x="457200" y="274320"/>
-            <a:ext cx="8229600" cy="731520"/>
+            <a:off x="457200" y="2286000"/>
+            <a:ext cx="8229600" cy="1371600"/>
           </a:xfrm>
           <a:prstGeom prst="rect">
             <a:avLst/>
@@ -4106,41 +4289,124 @@
           <a:noFill/>
         </p:spPr>
         <p:txBody>
-          <a:bodyPr wrap="none">
+          <a:bodyPr wrap="square">
             <a:spAutoFit/>
           </a:bodyPr>
           <a:lstStyle/>
           <a:p>
-            <a:pPr>
-              <a:defRPr sz="4400" b="1">
-                <a:solidFill>
-                  <a:srgbClr val="1E293B"/>
-                </a:solidFill>
-              </a:defRPr>
-            </a:pPr>
-            <a:r>
-              <a:t>🎯 성공 지표 (KPI)</a:t>
-            </a:r>
-          </a:p>
-        </p:txBody>
-      </p:sp>
-      <p:sp>
-        <p:nvSpPr>
-          <p:cNvPr id="3" name="Rectangle 2"/>
-          <p:cNvSpPr/>
+            <a:pPr algn="ctr">
+              <a:defRPr sz="5400" b="1">
+                <a:solidFill>
+                  <a:srgbClr val="FFFFFF"/>
+                </a:solidFill>
+              </a:defRPr>
+            </a:pPr>
+            <a:r>
+              <a:t>📞 연락처</a:t>
+            </a:r>
+          </a:p>
+        </p:txBody>
+      </p:sp>
+      <p:sp>
+        <p:nvSpPr>
+          <p:cNvPr id="3" name="TextBox 2"/>
+          <p:cNvSpPr txBox="1"/>
           <p:nvPr/>
         </p:nvSpPr>
         <p:spPr>
           <a:xfrm>
-            <a:off x="457200" y="1097280"/>
-            <a:ext cx="8229600" cy="0"/>
+            <a:off x="457200" y="3840480"/>
+            <a:ext cx="8229600" cy="1828800"/>
           </a:xfrm>
           <a:prstGeom prst="rect">
             <a:avLst/>
           </a:prstGeom>
-          <a:ln w="38100">
+          <a:noFill/>
+        </p:spPr>
+        <p:txBody>
+          <a:bodyPr wrap="square">
+            <a:spAutoFit/>
+          </a:bodyPr>
+          <a:lstStyle/>
+          <a:p>
+            <a:pPr algn="ctr">
+              <a:defRPr sz="2400">
+                <a:solidFill>
+                  <a:srgbClr val="AED6F1"/>
+                </a:solidFill>
+              </a:defRPr>
+            </a:pPr>
+            <a:r>
+              <a:t>회사명: 수인AI브릿지</a:t>
+            </a:r>
+            <a:br/>
+            <a:br/>
+            <a:r>
+              <a:t>대표자: 이희천</a:t>
+            </a:r>
+            <a:br/>
+            <a:r>
+              <a:t>연락처: 010-5650-0670</a:t>
+            </a:r>
+            <a:br/>
+            <a:r>
+              <a:t>이메일: hejunl@hanmail.net</a:t>
+            </a:r>
+            <a:br/>
+            <a:br/>
+            <a:r>
+              <a:t>웹사이트: https://petcare-plus.vercel.app</a:t>
+            </a:r>
+            <a:br/>
+            <a:r>
+              <a:t>GitHub: https://github.com/HeeJeonLee/petcare-plus-v2</a:t>
+            </a:r>
+            <a:br/>
+            <a:br/>
+            <a:r>
+              <a:t>🙏 감사합니다!</a:t>
+            </a:r>
+          </a:p>
+        </p:txBody>
+      </p:sp>
+    </p:spTree>
+  </p:cSld>
+  <p:clrMapOvr>
+    <a:masterClrMapping/>
+  </p:clrMapOvr>
+</p:sld>
+</file>
+
+<file path=ppt/slides/slide2.xml><?xml version="1.0" encoding="utf-8"?>
+<p:sld xmlns:a="http://schemas.openxmlformats.org/drawingml/2006/main" xmlns:p="http://schemas.openxmlformats.org/presentationml/2006/main" xmlns:r="http://schemas.openxmlformats.org/officeDocument/2006/relationships">
+  <p:cSld>
+    <p:spTree>
+      <p:nvGrpSpPr>
+        <p:cNvPr id="1" name=""/>
+        <p:cNvGrpSpPr/>
+        <p:nvPr/>
+      </p:nvGrpSpPr>
+      <p:grpSpPr/>
+      <p:sp>
+        <p:nvSpPr>
+          <p:cNvPr id="2" name="Rectangle 1"/>
+          <p:cNvSpPr/>
+          <p:nvPr/>
+        </p:nvSpPr>
+        <p:spPr>
+          <a:xfrm>
+            <a:off x="0" y="0"/>
+            <a:ext cx="9144000" cy="731520"/>
+          </a:xfrm>
+          <a:prstGeom prst="rect">
+            <a:avLst/>
+          </a:prstGeom>
+          <a:solidFill>
+            <a:srgbClr val="2980B9"/>
+          </a:solidFill>
+          <a:ln>
             <a:solidFill>
-              <a:srgbClr val="2563EB"/>
+              <a:srgbClr val="2980B9"/>
             </a:solidFill>
           </a:ln>
         </p:spPr>
@@ -4168,14 +4434,14 @@
       </p:sp>
       <p:sp>
         <p:nvSpPr>
-          <p:cNvPr id="4" name="TextBox 3"/>
+          <p:cNvPr id="3" name="TextBox 2"/>
           <p:cNvSpPr txBox="1"/>
           <p:nvPr/>
         </p:nvSpPr>
         <p:spPr>
           <a:xfrm>
-            <a:off x="731520" y="1371600"/>
-            <a:ext cx="7680960" cy="5029200"/>
+            <a:off x="457200" y="91440"/>
+            <a:ext cx="8229600" cy="548640"/>
           </a:xfrm>
           <a:prstGeom prst="rect">
             <a:avLst/>
@@ -4183,6 +4449,41 @@
           <a:noFill/>
         </p:spPr>
         <p:txBody>
+          <a:bodyPr wrap="none">
+            <a:spAutoFit/>
+          </a:bodyPr>
+          <a:lstStyle/>
+          <a:p>
+            <a:pPr>
+              <a:defRPr sz="4000" b="1">
+                <a:solidFill>
+                  <a:srgbClr val="FFFFFF"/>
+                </a:solidFill>
+              </a:defRPr>
+            </a:pPr>
+            <a:r>
+              <a:t>📋 회사 개요</a:t>
+            </a:r>
+          </a:p>
+        </p:txBody>
+      </p:sp>
+      <p:sp>
+        <p:nvSpPr>
+          <p:cNvPr id="4" name="TextBox 3"/>
+          <p:cNvSpPr txBox="1"/>
+          <p:nvPr/>
+        </p:nvSpPr>
+        <p:spPr>
+          <a:xfrm>
+            <a:off x="731520" y="1097280"/>
+            <a:ext cx="7680960" cy="5303520"/>
+          </a:xfrm>
+          <a:prstGeom prst="rect">
+            <a:avLst/>
+          </a:prstGeom>
+          <a:noFill/>
+        </p:spPr>
+        <p:txBody>
           <a:bodyPr wrap="square">
             <a:spAutoFit/>
           </a:bodyPr>
@@ -4197,222 +4498,213 @@
               </a:spcAft>
               <a:defRPr sz="1800">
                 <a:solidFill>
-                  <a:srgbClr val="1E293B"/>
-                </a:solidFill>
-              </a:defRPr>
-            </a:pPr>
-            <a:r>
-              <a:t>📍 6개월 목표:</a:t>
-            </a:r>
-          </a:p>
-          <a:p>
-            <a:pPr>
-              <a:spcBef>
-                <a:spcPts val="800"/>
-              </a:spcBef>
-              <a:spcAft>
-                <a:spcPts val="800"/>
-              </a:spcAft>
-              <a:defRPr sz="1800">
-                <a:solidFill>
-                  <a:srgbClr val="1E293B"/>
-                </a:solidFill>
-              </a:defRPr>
-            </a:pPr>
-            <a:r>
-              <a:t>• 월간 방문자: 2,000명 이상</a:t>
-            </a:r>
-          </a:p>
-          <a:p>
-            <a:pPr>
-              <a:spcBef>
-                <a:spcPts val="800"/>
-              </a:spcBef>
-              <a:spcAft>
-                <a:spcPts val="800"/>
-              </a:spcAft>
-              <a:defRPr sz="1800">
-                <a:solidFill>
-                  <a:srgbClr val="1E293B"/>
-                </a:solidFill>
-              </a:defRPr>
-            </a:pPr>
-            <a:r>
-              <a:t>• 상담 신청률: 5% 이상</a:t>
-            </a:r>
-          </a:p>
-          <a:p>
-            <a:pPr>
-              <a:spcBef>
-                <a:spcPts val="800"/>
-              </a:spcBef>
-              <a:spcAft>
-                <a:spcPts val="800"/>
-              </a:spcAft>
-              <a:defRPr sz="1800">
-                <a:solidFill>
-                  <a:srgbClr val="1E293B"/>
-                </a:solidFill>
-              </a:defRPr>
-            </a:pPr>
-            <a:r>
-              <a:t>• 고객 만족도: 4.5/5.0 이상</a:t>
-            </a:r>
-          </a:p>
-          <a:p>
-            <a:pPr>
-              <a:spcBef>
-                <a:spcPts val="800"/>
-              </a:spcBef>
-              <a:spcAft>
-                <a:spcPts val="800"/>
-              </a:spcAft>
-              <a:defRPr sz="1800">
-                <a:solidFill>
-                  <a:srgbClr val="1E293B"/>
-                </a:solidFill>
-              </a:defRPr>
-            </a:pPr>
-          </a:p>
-          <a:p>
-            <a:pPr>
-              <a:spcBef>
-                <a:spcPts val="800"/>
-              </a:spcBef>
-              <a:spcAft>
-                <a:spcPts val="800"/>
-              </a:spcAft>
-              <a:defRPr sz="1800">
-                <a:solidFill>
-                  <a:srgbClr val="1E293B"/>
-                </a:solidFill>
-              </a:defRPr>
-            </a:pPr>
-            <a:r>
-              <a:t>📍 1년 목표:</a:t>
-            </a:r>
-          </a:p>
-          <a:p>
-            <a:pPr>
-              <a:spcBef>
-                <a:spcPts val="800"/>
-              </a:spcBef>
-              <a:spcAft>
-                <a:spcPts val="800"/>
-              </a:spcAft>
-              <a:defRPr sz="1800">
-                <a:solidFill>
-                  <a:srgbClr val="1E293B"/>
-                </a:solidFill>
-              </a:defRPr>
-            </a:pPr>
-            <a:r>
-              <a:t>• 월간 방문자: 10,000명 이상</a:t>
-            </a:r>
-          </a:p>
-          <a:p>
-            <a:pPr>
-              <a:spcBef>
-                <a:spcPts val="800"/>
-              </a:spcBef>
-              <a:spcAft>
-                <a:spcPts val="800"/>
-              </a:spcAft>
-              <a:defRPr sz="1800">
-                <a:solidFill>
-                  <a:srgbClr val="1E293B"/>
-                </a:solidFill>
-              </a:defRPr>
-            </a:pPr>
-            <a:r>
-              <a:t>• 월간 계약: 200건 이상</a:t>
-            </a:r>
-          </a:p>
-          <a:p>
-            <a:pPr>
-              <a:spcBef>
-                <a:spcPts val="800"/>
-              </a:spcBef>
-              <a:spcAft>
-                <a:spcPts val="800"/>
-              </a:spcAft>
-              <a:defRPr sz="1800">
-                <a:solidFill>
-                  <a:srgbClr val="1E293B"/>
-                </a:solidFill>
-              </a:defRPr>
-            </a:pPr>
-            <a:r>
-              <a:t>• 손익분기점 달성</a:t>
-            </a:r>
-          </a:p>
-          <a:p>
-            <a:pPr>
-              <a:spcBef>
-                <a:spcPts val="800"/>
-              </a:spcBef>
-              <a:spcAft>
-                <a:spcPts val="800"/>
-              </a:spcAft>
-              <a:defRPr sz="1800">
-                <a:solidFill>
-                  <a:srgbClr val="1E293B"/>
-                </a:solidFill>
-              </a:defRPr>
-            </a:pPr>
-          </a:p>
-          <a:p>
-            <a:pPr>
-              <a:spcBef>
-                <a:spcPts val="800"/>
-              </a:spcBef>
-              <a:spcAft>
-                <a:spcPts val="800"/>
-              </a:spcAft>
-              <a:defRPr sz="1800">
-                <a:solidFill>
-                  <a:srgbClr val="1E293B"/>
-                </a:solidFill>
-              </a:defRPr>
-            </a:pPr>
-            <a:r>
-              <a:t>📍 3년 목표:</a:t>
-            </a:r>
-          </a:p>
-          <a:p>
-            <a:pPr>
-              <a:spcBef>
-                <a:spcPts val="800"/>
-              </a:spcBef>
-              <a:spcAft>
-                <a:spcPts val="800"/>
-              </a:spcAft>
-              <a:defRPr sz="1800">
-                <a:solidFill>
-                  <a:srgbClr val="1E293B"/>
-                </a:solidFill>
-              </a:defRPr>
-            </a:pPr>
-            <a:r>
-              <a:t>• 월간 방문자: 50,000명 이상</a:t>
-            </a:r>
-          </a:p>
-          <a:p>
-            <a:pPr>
-              <a:spcBef>
-                <a:spcPts val="800"/>
-              </a:spcBef>
-              <a:spcAft>
-                <a:spcPts val="800"/>
-              </a:spcAft>
-              <a:defRPr sz="1800">
-                <a:solidFill>
-                  <a:srgbClr val="1E293B"/>
-                </a:solidFill>
-              </a:defRPr>
-            </a:pPr>
-            <a:r>
-              <a:t>• 연간 수익: 3억원 이상</a:t>
+                  <a:srgbClr val="34495E"/>
+                </a:solidFill>
+              </a:defRPr>
+            </a:pPr>
+            <a:r>
+              <a:t>🏢 회사명: 수인AI브릿지</a:t>
+            </a:r>
+          </a:p>
+          <a:p>
+            <a:pPr>
+              <a:spcBef>
+                <a:spcPts val="800"/>
+              </a:spcBef>
+              <a:spcAft>
+                <a:spcPts val="800"/>
+              </a:spcAft>
+              <a:defRPr sz="1800">
+                <a:solidFill>
+                  <a:srgbClr val="34495E"/>
+                </a:solidFill>
+              </a:defRPr>
+            </a:pPr>
+          </a:p>
+          <a:p>
+            <a:pPr>
+              <a:spcBef>
+                <a:spcPts val="800"/>
+              </a:spcBef>
+              <a:spcAft>
+                <a:spcPts val="800"/>
+              </a:spcAft>
+              <a:defRPr sz="1800">
+                <a:solidFill>
+                  <a:srgbClr val="34495E"/>
+                </a:solidFill>
+              </a:defRPr>
+            </a:pPr>
+            <a:r>
+              <a:t>📍 주소: 경기도 수원시 영통구</a:t>
+            </a:r>
+          </a:p>
+          <a:p>
+            <a:pPr>
+              <a:spcBef>
+                <a:spcPts val="800"/>
+              </a:spcBef>
+              <a:spcAft>
+                <a:spcPts val="800"/>
+              </a:spcAft>
+              <a:defRPr sz="1800">
+                <a:solidFill>
+                  <a:srgbClr val="34495E"/>
+                </a:solidFill>
+              </a:defRPr>
+            </a:pPr>
+            <a:r>
+              <a:t>   (상세: 동탄원천로1109번길 37, 103층 502호)</a:t>
+            </a:r>
+          </a:p>
+          <a:p>
+            <a:pPr>
+              <a:spcBef>
+                <a:spcPts val="800"/>
+              </a:spcBef>
+              <a:spcAft>
+                <a:spcPts val="800"/>
+              </a:spcAft>
+              <a:defRPr sz="1800">
+                <a:solidFill>
+                  <a:srgbClr val="34495E"/>
+                </a:solidFill>
+              </a:defRPr>
+            </a:pPr>
+          </a:p>
+          <a:p>
+            <a:pPr>
+              <a:spcBef>
+                <a:spcPts val="800"/>
+              </a:spcBef>
+              <a:spcAft>
+                <a:spcPts val="800"/>
+              </a:spcAft>
+              <a:defRPr sz="1800">
+                <a:solidFill>
+                  <a:srgbClr val="34495E"/>
+                </a:solidFill>
+              </a:defRPr>
+            </a:pPr>
+            <a:r>
+              <a:t>📊 사업자등록번호: 151-09-03201</a:t>
+            </a:r>
+          </a:p>
+          <a:p>
+            <a:pPr>
+              <a:spcBef>
+                <a:spcPts val="800"/>
+              </a:spcBef>
+              <a:spcAft>
+                <a:spcPts val="800"/>
+              </a:spcAft>
+              <a:defRPr sz="1800">
+                <a:solidFill>
+                  <a:srgbClr val="34495E"/>
+                </a:solidFill>
+              </a:defRPr>
+            </a:pPr>
+          </a:p>
+          <a:p>
+            <a:pPr>
+              <a:spcBef>
+                <a:spcPts val="800"/>
+              </a:spcBef>
+              <a:spcAft>
+                <a:spcPts val="800"/>
+              </a:spcAft>
+              <a:defRPr sz="1800">
+                <a:solidFill>
+                  <a:srgbClr val="34495E"/>
+                </a:solidFill>
+              </a:defRPr>
+            </a:pPr>
+            <a:r>
+              <a:t>📅 개업일: 2026년 02월 25일</a:t>
+            </a:r>
+          </a:p>
+          <a:p>
+            <a:pPr>
+              <a:spcBef>
+                <a:spcPts val="800"/>
+              </a:spcBef>
+              <a:spcAft>
+                <a:spcPts val="800"/>
+              </a:spcAft>
+              <a:defRPr sz="1800">
+                <a:solidFill>
+                  <a:srgbClr val="34495E"/>
+                </a:solidFill>
+              </a:defRPr>
+            </a:pPr>
+          </a:p>
+          <a:p>
+            <a:pPr>
+              <a:spcBef>
+                <a:spcPts val="800"/>
+              </a:spcBef>
+              <a:spcAft>
+                <a:spcPts val="800"/>
+              </a:spcAft>
+              <a:defRPr sz="1800">
+                <a:solidFill>
+                  <a:srgbClr val="34495E"/>
+                </a:solidFill>
+              </a:defRPr>
+            </a:pPr>
+            <a:r>
+              <a:t>👤 대표자: 이희천</a:t>
+            </a:r>
+          </a:p>
+          <a:p>
+            <a:pPr>
+              <a:spcBef>
+                <a:spcPts val="800"/>
+              </a:spcBef>
+              <a:spcAft>
+                <a:spcPts val="800"/>
+              </a:spcAft>
+              <a:defRPr sz="1800">
+                <a:solidFill>
+                  <a:srgbClr val="34495E"/>
+                </a:solidFill>
+              </a:defRPr>
+            </a:pPr>
+          </a:p>
+          <a:p>
+            <a:pPr>
+              <a:spcBef>
+                <a:spcPts val="800"/>
+              </a:spcBef>
+              <a:spcAft>
+                <a:spcPts val="800"/>
+              </a:spcAft>
+              <a:defRPr sz="1800">
+                <a:solidFill>
+                  <a:srgbClr val="34495E"/>
+                </a:solidFill>
+              </a:defRPr>
+            </a:pPr>
+            <a:r>
+              <a:t>📱 연락처: 010-5650-0670</a:t>
+            </a:r>
+          </a:p>
+          <a:p>
+            <a:pPr>
+              <a:spcBef>
+                <a:spcPts val="800"/>
+              </a:spcBef>
+              <a:spcAft>
+                <a:spcPts val="800"/>
+              </a:spcAft>
+              <a:defRPr sz="1800">
+                <a:solidFill>
+                  <a:srgbClr val="34495E"/>
+                </a:solidFill>
+              </a:defRPr>
+            </a:pPr>
+            <a:r>
+              <a:t>   이메일: hejunl@hanmail.net</a:t>
             </a:r>
           </a:p>
         </p:txBody>
@@ -4425,17 +4717,9 @@
 </p:sld>
 </file>
 
-<file path=ppt/slides/slide14.xml><?xml version="1.0" encoding="utf-8"?>
+<file path=ppt/slides/slide3.xml><?xml version="1.0" encoding="utf-8"?>
 <p:sld xmlns:a="http://schemas.openxmlformats.org/drawingml/2006/main" xmlns:p="http://schemas.openxmlformats.org/presentationml/2006/main" xmlns:r="http://schemas.openxmlformats.org/officeDocument/2006/relationships">
   <p:cSld>
-    <p:bg>
-      <p:bgPr>
-        <a:solidFill>
-          <a:srgbClr val="FFFFFF"/>
-        </a:solidFill>
-        <a:effectLst/>
-      </p:bgPr>
-    </p:bg>
     <p:spTree>
       <p:nvGrpSpPr>
         <p:cNvPr id="1" name=""/>
@@ -4445,56 +4729,24 @@
       <p:grpSpPr/>
       <p:sp>
         <p:nvSpPr>
-          <p:cNvPr id="2" name="TextBox 1"/>
-          <p:cNvSpPr txBox="1"/>
+          <p:cNvPr id="2" name="Rectangle 1"/>
+          <p:cNvSpPr/>
           <p:nvPr/>
         </p:nvSpPr>
         <p:spPr>
           <a:xfrm>
-            <a:off x="457200" y="274320"/>
-            <a:ext cx="8229600" cy="731520"/>
+            <a:off x="0" y="0"/>
+            <a:ext cx="9144000" cy="731520"/>
           </a:xfrm>
           <a:prstGeom prst="rect">
             <a:avLst/>
           </a:prstGeom>
-          <a:noFill/>
-        </p:spPr>
-        <p:txBody>
-          <a:bodyPr wrap="none">
-            <a:spAutoFit/>
-          </a:bodyPr>
-          <a:lstStyle/>
-          <a:p>
-            <a:pPr>
-              <a:defRPr sz="4400" b="1">
-                <a:solidFill>
-                  <a:srgbClr val="1E293B"/>
-                </a:solidFill>
-              </a:defRPr>
-            </a:pPr>
-            <a:r>
-              <a:t>💎 핵심 가치</a:t>
-            </a:r>
-          </a:p>
-        </p:txBody>
-      </p:sp>
-      <p:sp>
-        <p:nvSpPr>
-          <p:cNvPr id="3" name="Rectangle 2"/>
-          <p:cNvSpPr/>
-          <p:nvPr/>
-        </p:nvSpPr>
-        <p:spPr>
-          <a:xfrm>
-            <a:off x="457200" y="1097280"/>
-            <a:ext cx="8229600" cy="0"/>
-          </a:xfrm>
-          <a:prstGeom prst="rect">
-            <a:avLst/>
-          </a:prstGeom>
-          <a:ln w="38100">
+          <a:solidFill>
+            <a:srgbClr val="2980B9"/>
+          </a:solidFill>
+          <a:ln>
             <a:solidFill>
-              <a:srgbClr val="2563EB"/>
+              <a:srgbClr val="2980B9"/>
             </a:solidFill>
           </a:ln>
         </p:spPr>
@@ -4522,14 +4774,14 @@
       </p:sp>
       <p:sp>
         <p:nvSpPr>
-          <p:cNvPr id="4" name="TextBox 3"/>
+          <p:cNvPr id="3" name="TextBox 2"/>
           <p:cNvSpPr txBox="1"/>
           <p:nvPr/>
         </p:nvSpPr>
         <p:spPr>
           <a:xfrm>
-            <a:off x="731520" y="1371600"/>
-            <a:ext cx="7680960" cy="5029200"/>
+            <a:off x="457200" y="91440"/>
+            <a:ext cx="8229600" cy="548640"/>
           </a:xfrm>
           <a:prstGeom prst="rect">
             <a:avLst/>
@@ -4537,6 +4789,41 @@
           <a:noFill/>
         </p:spPr>
         <p:txBody>
+          <a:bodyPr wrap="none">
+            <a:spAutoFit/>
+          </a:bodyPr>
+          <a:lstStyle/>
+          <a:p>
+            <a:pPr>
+              <a:defRPr sz="4000" b="1">
+                <a:solidFill>
+                  <a:srgbClr val="FFFFFF"/>
+                </a:solidFill>
+              </a:defRPr>
+            </a:pPr>
+            <a:r>
+              <a:t>🎯 사업 개요</a:t>
+            </a:r>
+          </a:p>
+        </p:txBody>
+      </p:sp>
+      <p:sp>
+        <p:nvSpPr>
+          <p:cNvPr id="4" name="TextBox 3"/>
+          <p:cNvSpPr txBox="1"/>
+          <p:nvPr/>
+        </p:nvSpPr>
+        <p:spPr>
+          <a:xfrm>
+            <a:off x="731520" y="1097280"/>
+            <a:ext cx="7680960" cy="5303520"/>
+          </a:xfrm>
+          <a:prstGeom prst="rect">
+            <a:avLst/>
+          </a:prstGeom>
+          <a:noFill/>
+        </p:spPr>
+        <p:txBody>
           <a:bodyPr wrap="square">
             <a:spAutoFit/>
           </a:bodyPr>
@@ -4551,144 +4838,204 @@
               </a:spcAft>
               <a:defRPr sz="1800">
                 <a:solidFill>
-                  <a:srgbClr val="1E293B"/>
-                </a:solidFill>
-              </a:defRPr>
-            </a:pPr>
-            <a:r>
-              <a:t>✅ 기술 혁신: AI 기반 자동화로 90% 비용 절감</a:t>
-            </a:r>
-          </a:p>
-          <a:p>
-            <a:pPr>
-              <a:spcBef>
-                <a:spcPts val="800"/>
-              </a:spcBef>
-              <a:spcAft>
-                <a:spcPts val="800"/>
-              </a:spcAft>
-              <a:defRPr sz="1800">
-                <a:solidFill>
-                  <a:srgbClr val="1E293B"/>
-                </a:solidFill>
-              </a:defRPr>
-            </a:pPr>
-          </a:p>
-          <a:p>
-            <a:pPr>
-              <a:spcBef>
-                <a:spcPts val="800"/>
-              </a:spcBef>
-              <a:spcAft>
-                <a:spcPts val="800"/>
-              </a:spcAft>
-              <a:defRPr sz="1800">
-                <a:solidFill>
-                  <a:srgbClr val="1E293B"/>
-                </a:solidFill>
-              </a:defRPr>
-            </a:pPr>
-            <a:r>
-              <a:t>✅ 시장 타이밍: 펫보험 시장 급성장 초입</a:t>
-            </a:r>
-          </a:p>
-          <a:p>
-            <a:pPr>
-              <a:spcBef>
-                <a:spcPts val="800"/>
-              </a:spcBef>
-              <a:spcAft>
-                <a:spcPts val="800"/>
-              </a:spcAft>
-              <a:defRPr sz="1800">
-                <a:solidFill>
-                  <a:srgbClr val="1E293B"/>
-                </a:solidFill>
-              </a:defRPr>
-            </a:pPr>
-          </a:p>
-          <a:p>
-            <a:pPr>
-              <a:spcBef>
-                <a:spcPts val="800"/>
-              </a:spcBef>
-              <a:spcAft>
-                <a:spcPts val="800"/>
-              </a:spcAft>
-              <a:defRPr sz="1800">
-                <a:solidFill>
-                  <a:srgbClr val="1E293B"/>
-                </a:solidFill>
-              </a:defRPr>
-            </a:pPr>
-            <a:r>
-              <a:t>✅ 비즈니스 모델: 검증된 수수료 기반 수익구조</a:t>
-            </a:r>
-          </a:p>
-          <a:p>
-            <a:pPr>
-              <a:spcBef>
-                <a:spcPts val="800"/>
-              </a:spcBef>
-              <a:spcAft>
-                <a:spcPts val="800"/>
-              </a:spcAft>
-              <a:defRPr sz="1800">
-                <a:solidFill>
-                  <a:srgbClr val="1E293B"/>
-                </a:solidFill>
-              </a:defRPr>
-            </a:pPr>
-          </a:p>
-          <a:p>
-            <a:pPr>
-              <a:spcBef>
-                <a:spcPts val="800"/>
-              </a:spcBef>
-              <a:spcAft>
-                <a:spcPts val="800"/>
-              </a:spcAft>
-              <a:defRPr sz="1800">
-                <a:solidFill>
-                  <a:srgbClr val="1E293B"/>
-                </a:solidFill>
-              </a:defRPr>
-            </a:pPr>
-            <a:r>
-              <a:t>✅ 확장성: 자동화로 무한 스케일 가능</a:t>
-            </a:r>
-          </a:p>
-          <a:p>
-            <a:pPr>
-              <a:spcBef>
-                <a:spcPts val="800"/>
-              </a:spcBef>
-              <a:spcAft>
-                <a:spcPts val="800"/>
-              </a:spcAft>
-              <a:defRPr sz="1800">
-                <a:solidFill>
-                  <a:srgbClr val="1E293B"/>
-                </a:solidFill>
-              </a:defRPr>
-            </a:pPr>
-          </a:p>
-          <a:p>
-            <a:pPr>
-              <a:spcBef>
-                <a:spcPts val="800"/>
-              </a:spcBef>
-              <a:spcAft>
-                <a:spcPts val="800"/>
-              </a:spcAft>
-              <a:defRPr sz="1800">
-                <a:solidFill>
-                  <a:srgbClr val="1E293B"/>
-                </a:solidFill>
-              </a:defRPr>
-            </a:pPr>
-            <a:r>
-              <a:t>✅ 지속성: 자율진화로 경쟁력 자동 유지</a:t>
+                  <a:srgbClr val="34495E"/>
+                </a:solidFill>
+              </a:defRPr>
+            </a:pPr>
+            <a:r>
+              <a:t>💡 비전</a:t>
+            </a:r>
+          </a:p>
+          <a:p>
+            <a:pPr>
+              <a:spcBef>
+                <a:spcPts val="800"/>
+              </a:spcBef>
+              <a:spcAft>
+                <a:spcPts val="800"/>
+              </a:spcAft>
+              <a:defRPr sz="1800">
+                <a:solidFill>
+                  <a:srgbClr val="34495E"/>
+                </a:solidFill>
+              </a:defRPr>
+            </a:pPr>
+            <a:r>
+              <a:t>  대한민국 최고의 AI 기반 펫보험 비교 플랫폼</a:t>
+            </a:r>
+          </a:p>
+          <a:p>
+            <a:pPr>
+              <a:spcBef>
+                <a:spcPts val="800"/>
+              </a:spcBef>
+              <a:spcAft>
+                <a:spcPts val="800"/>
+              </a:spcAft>
+              <a:defRPr sz="1800">
+                <a:solidFill>
+                  <a:srgbClr val="34495E"/>
+                </a:solidFill>
+              </a:defRPr>
+            </a:pPr>
+          </a:p>
+          <a:p>
+            <a:pPr>
+              <a:spcBef>
+                <a:spcPts val="800"/>
+              </a:spcBef>
+              <a:spcAft>
+                <a:spcPts val="800"/>
+              </a:spcAft>
+              <a:defRPr sz="1800">
+                <a:solidFill>
+                  <a:srgbClr val="34495E"/>
+                </a:solidFill>
+              </a:defRPr>
+            </a:pPr>
+            <a:r>
+              <a:t>🎁 핵심 가치</a:t>
+            </a:r>
+          </a:p>
+          <a:p>
+            <a:pPr>
+              <a:spcBef>
+                <a:spcPts val="800"/>
+              </a:spcBef>
+              <a:spcAft>
+                <a:spcPts val="800"/>
+              </a:spcAft>
+              <a:defRPr sz="1800">
+                <a:solidFill>
+                  <a:srgbClr val="34495E"/>
+                </a:solidFill>
+              </a:defRPr>
+            </a:pPr>
+            <a:r>
+              <a:t>  • 24시간 무료 AI 상담 (Claude AI 기반)</a:t>
+            </a:r>
+          </a:p>
+          <a:p>
+            <a:pPr>
+              <a:spcBef>
+                <a:spcPts val="800"/>
+              </a:spcBef>
+              <a:spcAft>
+                <a:spcPts val="800"/>
+              </a:spcAft>
+              <a:defRPr sz="1800">
+                <a:solidFill>
+                  <a:srgbClr val="34495E"/>
+                </a:solidFill>
+              </a:defRPr>
+            </a:pPr>
+            <a:r>
+              <a:t>  • 8개 보험사 실시간 비교</a:t>
+            </a:r>
+          </a:p>
+          <a:p>
+            <a:pPr>
+              <a:spcBef>
+                <a:spcPts val="800"/>
+              </a:spcBef>
+              <a:spcAft>
+                <a:spcPts val="800"/>
+              </a:spcAft>
+              <a:defRPr sz="1800">
+                <a:solidFill>
+                  <a:srgbClr val="34495E"/>
+                </a:solidFill>
+              </a:defRPr>
+            </a:pPr>
+            <a:r>
+              <a:t>  • 펫보험 가입 전 완벽한 정보 제공</a:t>
+            </a:r>
+          </a:p>
+          <a:p>
+            <a:pPr>
+              <a:spcBef>
+                <a:spcPts val="800"/>
+              </a:spcBef>
+              <a:spcAft>
+                <a:spcPts val="800"/>
+              </a:spcAft>
+              <a:defRPr sz="1800">
+                <a:solidFill>
+                  <a:srgbClr val="34495E"/>
+                </a:solidFill>
+              </a:defRPr>
+            </a:pPr>
+          </a:p>
+          <a:p>
+            <a:pPr>
+              <a:spcBef>
+                <a:spcPts val="800"/>
+              </a:spcBef>
+              <a:spcAft>
+                <a:spcPts val="800"/>
+              </a:spcAft>
+              <a:defRPr sz="1800">
+                <a:solidFill>
+                  <a:srgbClr val="34495E"/>
+                </a:solidFill>
+              </a:defRPr>
+            </a:pPr>
+            <a:r>
+              <a:t>🚀 사업 모델</a:t>
+            </a:r>
+          </a:p>
+          <a:p>
+            <a:pPr>
+              <a:spcBef>
+                <a:spcPts val="800"/>
+              </a:spcBef>
+              <a:spcAft>
+                <a:spcPts val="800"/>
+              </a:spcAft>
+              <a:defRPr sz="1800">
+                <a:solidFill>
+                  <a:srgbClr val="34495E"/>
+                </a:solidFill>
+              </a:defRPr>
+            </a:pPr>
+            <a:r>
+              <a:t>  • B2C: 반려동물 보호자 대상 무료 서비스</a:t>
+            </a:r>
+          </a:p>
+          <a:p>
+            <a:pPr>
+              <a:spcBef>
+                <a:spcPts val="800"/>
+              </a:spcBef>
+              <a:spcAft>
+                <a:spcPts val="800"/>
+              </a:spcAft>
+              <a:defRPr sz="1800">
+                <a:solidFill>
+                  <a:srgbClr val="34495E"/>
+                </a:solidFill>
+              </a:defRPr>
+            </a:pPr>
+            <a:r>
+              <a:t>  • B2B: 보험사 제휴 및 마케팅 파트너십</a:t>
+            </a:r>
+          </a:p>
+          <a:p>
+            <a:pPr>
+              <a:spcBef>
+                <a:spcPts val="800"/>
+              </a:spcBef>
+              <a:spcAft>
+                <a:spcPts val="800"/>
+              </a:spcAft>
+              <a:defRPr sz="1800">
+                <a:solidFill>
+                  <a:srgbClr val="34495E"/>
+                </a:solidFill>
+              </a:defRPr>
+            </a:pPr>
+            <a:r>
+              <a:t>  • 향후: 광고, 제휴 수수료 기반 수익화</a:t>
             </a:r>
           </a:p>
         </p:txBody>
@@ -4701,17 +5048,9 @@
 </p:sld>
 </file>
 
-<file path=ppt/slides/slide15.xml><?xml version="1.0" encoding="utf-8"?>
+<file path=ppt/slides/slide4.xml><?xml version="1.0" encoding="utf-8"?>
 <p:sld xmlns:a="http://schemas.openxmlformats.org/drawingml/2006/main" xmlns:p="http://schemas.openxmlformats.org/presentationml/2006/main" xmlns:r="http://schemas.openxmlformats.org/officeDocument/2006/relationships">
   <p:cSld>
-    <p:bg>
-      <p:bgPr>
-        <a:solidFill>
-          <a:srgbClr val="FFFFFF"/>
-        </a:solidFill>
-        <a:effectLst/>
-      </p:bgPr>
-    </p:bg>
     <p:spTree>
       <p:nvGrpSpPr>
         <p:cNvPr id="1" name=""/>
@@ -4721,56 +5060,24 @@
       <p:grpSpPr/>
       <p:sp>
         <p:nvSpPr>
-          <p:cNvPr id="2" name="TextBox 1"/>
-          <p:cNvSpPr txBox="1"/>
+          <p:cNvPr id="2" name="Rectangle 1"/>
+          <p:cNvSpPr/>
           <p:nvPr/>
         </p:nvSpPr>
         <p:spPr>
           <a:xfrm>
-            <a:off x="457200" y="274320"/>
-            <a:ext cx="8229600" cy="731520"/>
+            <a:off x="0" y="0"/>
+            <a:ext cx="9144000" cy="731520"/>
           </a:xfrm>
           <a:prstGeom prst="rect">
             <a:avLst/>
           </a:prstGeom>
-          <a:noFill/>
-        </p:spPr>
-        <p:txBody>
-          <a:bodyPr wrap="none">
-            <a:spAutoFit/>
-          </a:bodyPr>
-          <a:lstStyle/>
-          <a:p>
-            <a:pPr>
-              <a:defRPr sz="4400" b="1">
-                <a:solidFill>
-                  <a:srgbClr val="1E293B"/>
-                </a:solidFill>
-              </a:defRPr>
-            </a:pPr>
-            <a:r>
-              <a:t>🏛️ 정책자금 신청 사유</a:t>
-            </a:r>
-          </a:p>
-        </p:txBody>
-      </p:sp>
-      <p:sp>
-        <p:nvSpPr>
-          <p:cNvPr id="3" name="Rectangle 2"/>
-          <p:cNvSpPr/>
-          <p:nvPr/>
-        </p:nvSpPr>
-        <p:spPr>
-          <a:xfrm>
-            <a:off x="457200" y="1097280"/>
-            <a:ext cx="8229600" cy="0"/>
-          </a:xfrm>
-          <a:prstGeom prst="rect">
-            <a:avLst/>
-          </a:prstGeom>
-          <a:ln w="38100">
+          <a:solidFill>
+            <a:srgbClr val="2980B9"/>
+          </a:solidFill>
+          <a:ln>
             <a:solidFill>
-              <a:srgbClr val="2563EB"/>
+              <a:srgbClr val="2980B9"/>
             </a:solidFill>
           </a:ln>
         </p:spPr>
@@ -4798,14 +5105,14 @@
       </p:sp>
       <p:sp>
         <p:nvSpPr>
-          <p:cNvPr id="4" name="TextBox 3"/>
+          <p:cNvPr id="3" name="TextBox 2"/>
           <p:cNvSpPr txBox="1"/>
           <p:nvPr/>
         </p:nvSpPr>
         <p:spPr>
           <a:xfrm>
-            <a:off x="731520" y="1371600"/>
-            <a:ext cx="7680960" cy="5029200"/>
+            <a:off x="457200" y="91440"/>
+            <a:ext cx="8229600" cy="548640"/>
           </a:xfrm>
           <a:prstGeom prst="rect">
             <a:avLst/>
@@ -4813,6 +5120,41 @@
           <a:noFill/>
         </p:spPr>
         <p:txBody>
+          <a:bodyPr wrap="none">
+            <a:spAutoFit/>
+          </a:bodyPr>
+          <a:lstStyle/>
+          <a:p>
+            <a:pPr>
+              <a:defRPr sz="4000" b="1">
+                <a:solidFill>
+                  <a:srgbClr val="FFFFFF"/>
+                </a:solidFill>
+              </a:defRPr>
+            </a:pPr>
+            <a:r>
+              <a:t>⭐ 핵심 기능 (1/2)</a:t>
+            </a:r>
+          </a:p>
+        </p:txBody>
+      </p:sp>
+      <p:sp>
+        <p:nvSpPr>
+          <p:cNvPr id="4" name="TextBox 3"/>
+          <p:cNvSpPr txBox="1"/>
+          <p:nvPr/>
+        </p:nvSpPr>
+        <p:spPr>
+          <a:xfrm>
+            <a:off x="731520" y="1097280"/>
+            <a:ext cx="7680960" cy="5303520"/>
+          </a:xfrm>
+          <a:prstGeom prst="rect">
+            <a:avLst/>
+          </a:prstGeom>
+          <a:noFill/>
+        </p:spPr>
+        <p:txBody>
           <a:bodyPr wrap="square">
             <a:spAutoFit/>
           </a:bodyPr>
@@ -4827,144 +5169,186 @@
               </a:spcAft>
               <a:defRPr sz="1800">
                 <a:solidFill>
-                  <a:srgbClr val="1E293B"/>
-                </a:solidFill>
-              </a:defRPr>
-            </a:pPr>
-            <a:r>
-              <a:t>1️⃣ 기술 혁신: Claude AI 활용한 K-스타트업 모델</a:t>
-            </a:r>
-          </a:p>
-          <a:p>
-            <a:pPr>
-              <a:spcBef>
-                <a:spcPts val="800"/>
-              </a:spcBef>
-              <a:spcAft>
-                <a:spcPts val="800"/>
-              </a:spcAft>
-              <a:defRPr sz="1800">
-                <a:solidFill>
-                  <a:srgbClr val="1E293B"/>
-                </a:solidFill>
-              </a:defRPr>
-            </a:pPr>
-          </a:p>
-          <a:p>
-            <a:pPr>
-              <a:spcBef>
-                <a:spcPts val="800"/>
-              </a:spcBef>
-              <a:spcAft>
-                <a:spcPts val="800"/>
-              </a:spcAft>
-              <a:defRPr sz="1800">
-                <a:solidFill>
-                  <a:srgbClr val="1E293B"/>
-                </a:solidFill>
-              </a:defRPr>
-            </a:pPr>
-            <a:r>
-              <a:t>2️⃣ 일자리 창출: 자동화로 양질의 일자리 창출</a:t>
-            </a:r>
-          </a:p>
-          <a:p>
-            <a:pPr>
-              <a:spcBef>
-                <a:spcPts val="800"/>
-              </a:spcBef>
-              <a:spcAft>
-                <a:spcPts val="800"/>
-              </a:spcAft>
-              <a:defRPr sz="1800">
-                <a:solidFill>
-                  <a:srgbClr val="1E293B"/>
-                </a:solidFill>
-              </a:defRPr>
-            </a:pPr>
-          </a:p>
-          <a:p>
-            <a:pPr>
-              <a:spcBef>
-                <a:spcPts val="800"/>
-              </a:spcBef>
-              <a:spcAft>
-                <a:spcPts val="800"/>
-              </a:spcAft>
-              <a:defRPr sz="1800">
-                <a:solidFill>
-                  <a:srgbClr val="1E293B"/>
-                </a:solidFill>
-              </a:defRPr>
-            </a:pPr>
-            <a:r>
-              <a:t>3️⃣ 시장 선도: 펫보험 시장에서 AI 선도 업체</a:t>
-            </a:r>
-          </a:p>
-          <a:p>
-            <a:pPr>
-              <a:spcBef>
-                <a:spcPts val="800"/>
-              </a:spcBef>
-              <a:spcAft>
-                <a:spcPts val="800"/>
-              </a:spcAft>
-              <a:defRPr sz="1800">
-                <a:solidFill>
-                  <a:srgbClr val="1E293B"/>
-                </a:solidFill>
-              </a:defRPr>
-            </a:pPr>
-          </a:p>
-          <a:p>
-            <a:pPr>
-              <a:spcBef>
-                <a:spcPts val="800"/>
-              </a:spcBef>
-              <a:spcAft>
-                <a:spcPts val="800"/>
-              </a:spcAft>
-              <a:defRPr sz="1800">
-                <a:solidFill>
-                  <a:srgbClr val="1E293B"/>
-                </a:solidFill>
-              </a:defRPr>
-            </a:pPr>
-            <a:r>
-              <a:t>4️⃣ 수출 가능성: 자동화 시스템으로 글로벌 확장 용이</a:t>
-            </a:r>
-          </a:p>
-          <a:p>
-            <a:pPr>
-              <a:spcBef>
-                <a:spcPts val="800"/>
-              </a:spcBef>
-              <a:spcAft>
-                <a:spcPts val="800"/>
-              </a:spcAft>
-              <a:defRPr sz="1800">
-                <a:solidFill>
-                  <a:srgbClr val="1E293B"/>
-                </a:solidFill>
-              </a:defRPr>
-            </a:pPr>
-          </a:p>
-          <a:p>
-            <a:pPr>
-              <a:spcBef>
-                <a:spcPts val="800"/>
-              </a:spcBef>
-              <a:spcAft>
-                <a:spcPts val="800"/>
-              </a:spcAft>
-              <a:defRPr sz="1800">
-                <a:solidFill>
-                  <a:srgbClr val="1E293B"/>
-                </a:solidFill>
-              </a:defRPr>
-            </a:pPr>
-            <a:r>
-              <a:t>5️⃣ 경제 파급: 보험 중개 시장 활성화</a:t>
+                  <a:srgbClr val="34495E"/>
+                </a:solidFill>
+              </a:defRPr>
+            </a:pPr>
+            <a:r>
+              <a:t>1️⃣ AI 맞춤형 펫보험 추천</a:t>
+            </a:r>
+          </a:p>
+          <a:p>
+            <a:pPr>
+              <a:spcBef>
+                <a:spcPts val="800"/>
+              </a:spcBef>
+              <a:spcAft>
+                <a:spcPts val="800"/>
+              </a:spcAft>
+              <a:defRPr sz="1800">
+                <a:solidFill>
+                  <a:srgbClr val="34495E"/>
+                </a:solidFill>
+              </a:defRPr>
+            </a:pPr>
+            <a:r>
+              <a:t>  Claude AI를 활용한 개인화된 추천 알고리즘</a:t>
+            </a:r>
+          </a:p>
+          <a:p>
+            <a:pPr>
+              <a:spcBef>
+                <a:spcPts val="800"/>
+              </a:spcBef>
+              <a:spcAft>
+                <a:spcPts val="800"/>
+              </a:spcAft>
+              <a:defRPr sz="1800">
+                <a:solidFill>
+                  <a:srgbClr val="34495E"/>
+                </a:solidFill>
+              </a:defRPr>
+            </a:pPr>
+          </a:p>
+          <a:p>
+            <a:pPr>
+              <a:spcBef>
+                <a:spcPts val="800"/>
+              </a:spcBef>
+              <a:spcAft>
+                <a:spcPts val="800"/>
+              </a:spcAft>
+              <a:defRPr sz="1800">
+                <a:solidFill>
+                  <a:srgbClr val="34495E"/>
+                </a:solidFill>
+              </a:defRPr>
+            </a:pPr>
+            <a:r>
+              <a:t>2️⃣ 8개 보험사 상세 비교표</a:t>
+            </a:r>
+          </a:p>
+          <a:p>
+            <a:pPr>
+              <a:spcBef>
+                <a:spcPts val="800"/>
+              </a:spcBef>
+              <a:spcAft>
+                <a:spcPts val="800"/>
+              </a:spcAft>
+              <a:defRPr sz="1800">
+                <a:solidFill>
+                  <a:srgbClr val="34495E"/>
+                </a:solidFill>
+              </a:defRPr>
+            </a:pPr>
+            <a:r>
+              <a:t>  • 메리츠, 삼성, 현대, KB, 한화, DB, 농협, 롯데</a:t>
+            </a:r>
+          </a:p>
+          <a:p>
+            <a:pPr>
+              <a:spcBef>
+                <a:spcPts val="800"/>
+              </a:spcBef>
+              <a:spcAft>
+                <a:spcPts val="800"/>
+              </a:spcAft>
+              <a:defRPr sz="1800">
+                <a:solidFill>
+                  <a:srgbClr val="34495E"/>
+                </a:solidFill>
+              </a:defRPr>
+            </a:pPr>
+            <a:r>
+              <a:t>  • 보험료, 보장내용, 특징, 리뷰 포함</a:t>
+            </a:r>
+          </a:p>
+          <a:p>
+            <a:pPr>
+              <a:spcBef>
+                <a:spcPts val="800"/>
+              </a:spcBef>
+              <a:spcAft>
+                <a:spcPts val="800"/>
+              </a:spcAft>
+              <a:defRPr sz="1800">
+                <a:solidFill>
+                  <a:srgbClr val="34495E"/>
+                </a:solidFill>
+              </a:defRPr>
+            </a:pPr>
+          </a:p>
+          <a:p>
+            <a:pPr>
+              <a:spcBef>
+                <a:spcPts val="800"/>
+              </a:spcBef>
+              <a:spcAft>
+                <a:spcPts val="800"/>
+              </a:spcAft>
+              <a:defRPr sz="1800">
+                <a:solidFill>
+                  <a:srgbClr val="34495E"/>
+                </a:solidFill>
+              </a:defRPr>
+            </a:pPr>
+            <a:r>
+              <a:t>3️⃣ AI 챗봇 상담 (24시간)</a:t>
+            </a:r>
+          </a:p>
+          <a:p>
+            <a:pPr>
+              <a:spcBef>
+                <a:spcPts val="800"/>
+              </a:spcBef>
+              <a:spcAft>
+                <a:spcPts val="800"/>
+              </a:spcAft>
+              <a:defRPr sz="1800">
+                <a:solidFill>
+                  <a:srgbClr val="34495E"/>
+                </a:solidFill>
+              </a:defRPr>
+            </a:pPr>
+            <a:r>
+              <a:t>  Claude API 기반 고급 상담 시스템</a:t>
+            </a:r>
+          </a:p>
+          <a:p>
+            <a:pPr>
+              <a:spcBef>
+                <a:spcPts val="800"/>
+              </a:spcBef>
+              <a:spcAft>
+                <a:spcPts val="800"/>
+              </a:spcAft>
+              <a:defRPr sz="1800">
+                <a:solidFill>
+                  <a:srgbClr val="34495E"/>
+                </a:solidFill>
+              </a:defRPr>
+            </a:pPr>
+            <a:r>
+              <a:t>  • 펫 건강 정보</a:t>
+            </a:r>
+          </a:p>
+          <a:p>
+            <a:pPr>
+              <a:spcBef>
+                <a:spcPts val="800"/>
+              </a:spcBef>
+              <a:spcAft>
+                <a:spcPts val="800"/>
+              </a:spcAft>
+              <a:defRPr sz="1800">
+                <a:solidFill>
+                  <a:srgbClr val="34495E"/>
+                </a:solidFill>
+              </a:defRPr>
+            </a:pPr>
+            <a:r>
+              <a:t>  • 보험 선택 가이드</a:t>
             </a:r>
           </a:p>
         </p:txBody>
@@ -4977,17 +5361,9 @@
 </p:sld>
 </file>
 
-<file path=ppt/slides/slide16.xml><?xml version="1.0" encoding="utf-8"?>
+<file path=ppt/slides/slide5.xml><?xml version="1.0" encoding="utf-8"?>
 <p:sld xmlns:a="http://schemas.openxmlformats.org/drawingml/2006/main" xmlns:p="http://schemas.openxmlformats.org/presentationml/2006/main" xmlns:r="http://schemas.openxmlformats.org/officeDocument/2006/relationships">
   <p:cSld>
-    <p:bg>
-      <p:bgPr>
-        <a:solidFill>
-          <a:srgbClr val="7C3AED"/>
-        </a:solidFill>
-        <a:effectLst/>
-      </p:bgPr>
-    </p:bg>
     <p:spTree>
       <p:nvGrpSpPr>
         <p:cNvPr id="1" name=""/>
@@ -4997,152 +5373,24 @@
       <p:grpSpPr/>
       <p:sp>
         <p:nvSpPr>
-          <p:cNvPr id="2" name="TextBox 1"/>
-          <p:cNvSpPr txBox="1"/>
+          <p:cNvPr id="2" name="Rectangle 1"/>
+          <p:cNvSpPr/>
           <p:nvPr/>
         </p:nvSpPr>
         <p:spPr>
           <a:xfrm>
-            <a:off x="457200" y="2286000"/>
-            <a:ext cx="8229600" cy="1828800"/>
+            <a:off x="0" y="0"/>
+            <a:ext cx="9144000" cy="731520"/>
           </a:xfrm>
           <a:prstGeom prst="rect">
             <a:avLst/>
           </a:prstGeom>
-          <a:noFill/>
-        </p:spPr>
-        <p:txBody>
-          <a:bodyPr wrap="square">
-            <a:spAutoFit/>
-          </a:bodyPr>
-          <a:lstStyle/>
-          <a:p>
-            <a:pPr algn="ctr">
-              <a:defRPr sz="6600" b="1">
-                <a:solidFill>
-                  <a:srgbClr val="FFFFFF"/>
-                </a:solidFill>
-              </a:defRPr>
-            </a:pPr>
-            <a:r>
-              <a:t>감사합니다! 🐾</a:t>
-            </a:r>
-          </a:p>
-        </p:txBody>
-      </p:sp>
-      <p:sp>
-        <p:nvSpPr>
-          <p:cNvPr id="3" name="TextBox 2"/>
-          <p:cNvSpPr txBox="1"/>
-          <p:nvPr/>
-        </p:nvSpPr>
-        <p:spPr>
-          <a:xfrm>
-            <a:off x="457200" y="4114800"/>
-            <a:ext cx="8229600" cy="914400"/>
-          </a:xfrm>
-          <a:prstGeom prst="rect">
-            <a:avLst/>
-          </a:prstGeom>
-          <a:noFill/>
-        </p:spPr>
-        <p:txBody>
-          <a:bodyPr wrap="none">
-            <a:spAutoFit/>
-          </a:bodyPr>
-          <a:lstStyle/>
-          <a:p>
-            <a:pPr algn="ctr">
-              <a:defRPr sz="2800">
-                <a:solidFill>
-                  <a:srgbClr val="F8FAFC"/>
-                </a:solidFill>
-              </a:defRPr>
-            </a:pPr>
-            <a:r>
-              <a:t>수인AI브릿지 | 2026년 02월 28일</a:t>
-            </a:r>
-          </a:p>
-        </p:txBody>
-      </p:sp>
-    </p:spTree>
-  </p:cSld>
-  <p:clrMapOvr>
-    <a:masterClrMapping/>
-  </p:clrMapOvr>
-</p:sld>
-</file>
-
-<file path=ppt/slides/slide2.xml><?xml version="1.0" encoding="utf-8"?>
-<p:sld xmlns:a="http://schemas.openxmlformats.org/drawingml/2006/main" xmlns:p="http://schemas.openxmlformats.org/presentationml/2006/main" xmlns:r="http://schemas.openxmlformats.org/officeDocument/2006/relationships">
-  <p:cSld>
-    <p:bg>
-      <p:bgPr>
-        <a:solidFill>
-          <a:srgbClr val="FFFFFF"/>
-        </a:solidFill>
-        <a:effectLst/>
-      </p:bgPr>
-    </p:bg>
-    <p:spTree>
-      <p:nvGrpSpPr>
-        <p:cNvPr id="1" name=""/>
-        <p:cNvGrpSpPr/>
-        <p:nvPr/>
-      </p:nvGrpSpPr>
-      <p:grpSpPr/>
-      <p:sp>
-        <p:nvSpPr>
-          <p:cNvPr id="2" name="TextBox 1"/>
-          <p:cNvSpPr txBox="1"/>
-          <p:nvPr/>
-        </p:nvSpPr>
-        <p:spPr>
-          <a:xfrm>
-            <a:off x="457200" y="274320"/>
-            <a:ext cx="8229600" cy="731520"/>
-          </a:xfrm>
-          <a:prstGeom prst="rect">
-            <a:avLst/>
-          </a:prstGeom>
-          <a:noFill/>
-        </p:spPr>
-        <p:txBody>
-          <a:bodyPr wrap="none">
-            <a:spAutoFit/>
-          </a:bodyPr>
-          <a:lstStyle/>
-          <a:p>
-            <a:pPr>
-              <a:defRPr sz="4400" b="1">
-                <a:solidFill>
-                  <a:srgbClr val="1E293B"/>
-                </a:solidFill>
-              </a:defRPr>
-            </a:pPr>
-            <a:r>
-              <a:t>📋 기본 정보</a:t>
-            </a:r>
-          </a:p>
-        </p:txBody>
-      </p:sp>
-      <p:sp>
-        <p:nvSpPr>
-          <p:cNvPr id="3" name="Rectangle 2"/>
-          <p:cNvSpPr/>
-          <p:nvPr/>
-        </p:nvSpPr>
-        <p:spPr>
-          <a:xfrm>
-            <a:off x="457200" y="1097280"/>
-            <a:ext cx="8229600" cy="0"/>
-          </a:xfrm>
-          <a:prstGeom prst="rect">
-            <a:avLst/>
-          </a:prstGeom>
-          <a:ln w="38100">
+          <a:solidFill>
+            <a:srgbClr val="2980B9"/>
+          </a:solidFill>
+          <a:ln>
             <a:solidFill>
-              <a:srgbClr val="2563EB"/>
+              <a:srgbClr val="2980B9"/>
             </a:solidFill>
           </a:ln>
         </p:spPr>
@@ -5170,14 +5418,14 @@
       </p:sp>
       <p:sp>
         <p:nvSpPr>
-          <p:cNvPr id="4" name="TextBox 3"/>
+          <p:cNvPr id="3" name="TextBox 2"/>
           <p:cNvSpPr txBox="1"/>
           <p:nvPr/>
         </p:nvSpPr>
         <p:spPr>
           <a:xfrm>
-            <a:off x="731520" y="1371600"/>
-            <a:ext cx="7680960" cy="5029200"/>
+            <a:off x="457200" y="91440"/>
+            <a:ext cx="8229600" cy="548640"/>
           </a:xfrm>
           <a:prstGeom prst="rect">
             <a:avLst/>
@@ -5185,6 +5433,41 @@
           <a:noFill/>
         </p:spPr>
         <p:txBody>
+          <a:bodyPr wrap="none">
+            <a:spAutoFit/>
+          </a:bodyPr>
+          <a:lstStyle/>
+          <a:p>
+            <a:pPr>
+              <a:defRPr sz="4000" b="1">
+                <a:solidFill>
+                  <a:srgbClr val="FFFFFF"/>
+                </a:solidFill>
+              </a:defRPr>
+            </a:pPr>
+            <a:r>
+              <a:t>⭐ 핵심 기능 (2/2)</a:t>
+            </a:r>
+          </a:p>
+        </p:txBody>
+      </p:sp>
+      <p:sp>
+        <p:nvSpPr>
+          <p:cNvPr id="4" name="TextBox 3"/>
+          <p:cNvSpPr txBox="1"/>
+          <p:nvPr/>
+        </p:nvSpPr>
+        <p:spPr>
+          <a:xfrm>
+            <a:off x="731520" y="1097280"/>
+            <a:ext cx="7680960" cy="5303520"/>
+          </a:xfrm>
+          <a:prstGeom prst="rect">
+            <a:avLst/>
+          </a:prstGeom>
+          <a:noFill/>
+        </p:spPr>
+        <p:txBody>
           <a:bodyPr wrap="square">
             <a:spAutoFit/>
           </a:bodyPr>
@@ -5199,102 +5482,186 @@
               </a:spcAft>
               <a:defRPr sz="1800">
                 <a:solidFill>
-                  <a:srgbClr val="1E293B"/>
-                </a:solidFill>
-              </a:defRPr>
-            </a:pPr>
-            <a:r>
-              <a:t>회사명: 수인AI브릿지</a:t>
-            </a:r>
-          </a:p>
-          <a:p>
-            <a:pPr>
-              <a:spcBef>
-                <a:spcPts val="800"/>
-              </a:spcBef>
-              <a:spcAft>
-                <a:spcPts val="800"/>
-              </a:spcAft>
-              <a:defRPr sz="1800">
-                <a:solidFill>
-                  <a:srgbClr val="1E293B"/>
-                </a:solidFill>
-              </a:defRPr>
-            </a:pPr>
-            <a:r>
-              <a:t>사업자등록번호: 151-09-03201</a:t>
-            </a:r>
-          </a:p>
-          <a:p>
-            <a:pPr>
-              <a:spcBef>
-                <a:spcPts val="800"/>
-              </a:spcBef>
-              <a:spcAft>
-                <a:spcPts val="800"/>
-              </a:spcAft>
-              <a:defRPr sz="1800">
-                <a:solidFill>
-                  <a:srgbClr val="1E293B"/>
-                </a:solidFill>
-              </a:defRPr>
-            </a:pPr>
-            <a:r>
-              <a:t>개업일: 2026년 02월 25일</a:t>
-            </a:r>
-          </a:p>
-          <a:p>
-            <a:pPr>
-              <a:spcBef>
-                <a:spcPts val="800"/>
-              </a:spcBef>
-              <a:spcAft>
-                <a:spcPts val="800"/>
-              </a:spcAft>
-              <a:defRPr sz="1800">
-                <a:solidFill>
-                  <a:srgbClr val="1E293B"/>
-                </a:solidFill>
-              </a:defRPr>
-            </a:pPr>
-            <a:r>
-              <a:t>대표자: 이희전</a:t>
-            </a:r>
-          </a:p>
-          <a:p>
-            <a:pPr>
-              <a:spcBef>
-                <a:spcPts val="800"/>
-              </a:spcBef>
-              <a:spcAft>
-                <a:spcPts val="800"/>
-              </a:spcAft>
-              <a:defRPr sz="1800">
-                <a:solidFill>
-                  <a:srgbClr val="1E293B"/>
-                </a:solidFill>
-              </a:defRPr>
-            </a:pPr>
-            <a:r>
-              <a:t>사업분야: AI 기반 펫보험 비교 및 상담 플랫폼</a:t>
-            </a:r>
-          </a:p>
-          <a:p>
-            <a:pPr>
-              <a:spcBef>
-                <a:spcPts val="800"/>
-              </a:spcBef>
-              <a:spcAft>
-                <a:spcPts val="800"/>
-              </a:spcAft>
-              <a:defRPr sz="1800">
-                <a:solidFill>
-                  <a:srgbClr val="1E293B"/>
-                </a:solidFill>
-              </a:defRPr>
-            </a:pPr>
-            <a:r>
-              <a:t>신청자금: 1억원</a:t>
+                  <a:srgbClr val="34495E"/>
+                </a:solidFill>
+              </a:defRPr>
+            </a:pPr>
+            <a:r>
+              <a:t>4️⃣ 주변 동물병원 검색</a:t>
+            </a:r>
+          </a:p>
+          <a:p>
+            <a:pPr>
+              <a:spcBef>
+                <a:spcPts val="800"/>
+              </a:spcBef>
+              <a:spcAft>
+                <a:spcPts val="800"/>
+              </a:spcAft>
+              <a:defRPr sz="1800">
+                <a:solidFill>
+                  <a:srgbClr val="34495E"/>
+                </a:solidFill>
+              </a:defRPr>
+            </a:pPr>
+            <a:r>
+              <a:t>  Google Maps API를 활용한 실시간 병원 검색</a:t>
+            </a:r>
+          </a:p>
+          <a:p>
+            <a:pPr>
+              <a:spcBef>
+                <a:spcPts val="800"/>
+              </a:spcBef>
+              <a:spcAft>
+                <a:spcPts val="800"/>
+              </a:spcAft>
+              <a:defRPr sz="1800">
+                <a:solidFill>
+                  <a:srgbClr val="34495E"/>
+                </a:solidFill>
+              </a:defRPr>
+            </a:pPr>
+            <a:r>
+              <a:t>  • 위치 기반 검색</a:t>
+            </a:r>
+          </a:p>
+          <a:p>
+            <a:pPr>
+              <a:spcBef>
+                <a:spcPts val="800"/>
+              </a:spcBef>
+              <a:spcAft>
+                <a:spcPts val="800"/>
+              </a:spcAft>
+              <a:defRPr sz="1800">
+                <a:solidFill>
+                  <a:srgbClr val="34495E"/>
+                </a:solidFill>
+              </a:defRPr>
+            </a:pPr>
+            <a:r>
+              <a:t>  • 거리 표시 및 길찾기</a:t>
+            </a:r>
+          </a:p>
+          <a:p>
+            <a:pPr>
+              <a:spcBef>
+                <a:spcPts val="800"/>
+              </a:spcBef>
+              <a:spcAft>
+                <a:spcPts val="800"/>
+              </a:spcAft>
+              <a:defRPr sz="1800">
+                <a:solidFill>
+                  <a:srgbClr val="34495E"/>
+                </a:solidFill>
+              </a:defRPr>
+            </a:pPr>
+          </a:p>
+          <a:p>
+            <a:pPr>
+              <a:spcBef>
+                <a:spcPts val="800"/>
+              </a:spcBef>
+              <a:spcAft>
+                <a:spcPts val="800"/>
+              </a:spcAft>
+              <a:defRPr sz="1800">
+                <a:solidFill>
+                  <a:srgbClr val="34495E"/>
+                </a:solidFill>
+              </a:defRPr>
+            </a:pPr>
+            <a:r>
+              <a:t>5️⃣ 보험금 청구 프로세스 가이드</a:t>
+            </a:r>
+          </a:p>
+          <a:p>
+            <a:pPr>
+              <a:spcBef>
+                <a:spcPts val="800"/>
+              </a:spcBef>
+              <a:spcAft>
+                <a:spcPts val="800"/>
+              </a:spcAft>
+              <a:defRPr sz="1800">
+                <a:solidFill>
+                  <a:srgbClr val="34495E"/>
+                </a:solidFill>
+              </a:defRPr>
+            </a:pPr>
+            <a:r>
+              <a:t>  • 단계별 청구 방법</a:t>
+            </a:r>
+          </a:p>
+          <a:p>
+            <a:pPr>
+              <a:spcBef>
+                <a:spcPts val="800"/>
+              </a:spcBef>
+              <a:spcAft>
+                <a:spcPts val="800"/>
+              </a:spcAft>
+              <a:defRPr sz="1800">
+                <a:solidFill>
+                  <a:srgbClr val="34495E"/>
+                </a:solidFill>
+              </a:defRPr>
+            </a:pPr>
+            <a:r>
+              <a:t>  • 필요 서류 안내</a:t>
+            </a:r>
+          </a:p>
+          <a:p>
+            <a:pPr>
+              <a:spcBef>
+                <a:spcPts val="800"/>
+              </a:spcBef>
+              <a:spcAft>
+                <a:spcPts val="800"/>
+              </a:spcAft>
+              <a:defRPr sz="1800">
+                <a:solidFill>
+                  <a:srgbClr val="34495E"/>
+                </a:solidFill>
+              </a:defRPr>
+            </a:pPr>
+          </a:p>
+          <a:p>
+            <a:pPr>
+              <a:spcBef>
+                <a:spcPts val="800"/>
+              </a:spcBef>
+              <a:spcAft>
+                <a:spcPts val="800"/>
+              </a:spcAft>
+              <a:defRPr sz="1800">
+                <a:solidFill>
+                  <a:srgbClr val="34495E"/>
+                </a:solidFill>
+              </a:defRPr>
+            </a:pPr>
+            <a:r>
+              <a:t>6️⃣ 온라인 상담 신청</a:t>
+            </a:r>
+          </a:p>
+          <a:p>
+            <a:pPr>
+              <a:spcBef>
+                <a:spcPts val="800"/>
+              </a:spcBef>
+              <a:spcAft>
+                <a:spcPts val="800"/>
+              </a:spcAft>
+              <a:defRPr sz="1800">
+                <a:solidFill>
+                  <a:srgbClr val="34495E"/>
+                </a:solidFill>
+              </a:defRPr>
+            </a:pPr>
+            <a:r>
+              <a:t>  실시간 상담 신청 → 전문가 연결</a:t>
             </a:r>
           </a:p>
         </p:txBody>
@@ -5307,17 +5674,9 @@
 </p:sld>
 </file>
 
-<file path=ppt/slides/slide3.xml><?xml version="1.0" encoding="utf-8"?>
+<file path=ppt/slides/slide6.xml><?xml version="1.0" encoding="utf-8"?>
 <p:sld xmlns:a="http://schemas.openxmlformats.org/drawingml/2006/main" xmlns:p="http://schemas.openxmlformats.org/presentationml/2006/main" xmlns:r="http://schemas.openxmlformats.org/officeDocument/2006/relationships">
   <p:cSld>
-    <p:bg>
-      <p:bgPr>
-        <a:solidFill>
-          <a:srgbClr val="FFFFFF"/>
-        </a:solidFill>
-        <a:effectLst/>
-      </p:bgPr>
-    </p:bg>
     <p:spTree>
       <p:nvGrpSpPr>
         <p:cNvPr id="1" name=""/>
@@ -5327,56 +5686,24 @@
       <p:grpSpPr/>
       <p:sp>
         <p:nvSpPr>
-          <p:cNvPr id="2" name="TextBox 1"/>
-          <p:cNvSpPr txBox="1"/>
+          <p:cNvPr id="2" name="Rectangle 1"/>
+          <p:cNvSpPr/>
           <p:nvPr/>
         </p:nvSpPr>
         <p:spPr>
           <a:xfrm>
-            <a:off x="457200" y="274320"/>
-            <a:ext cx="8229600" cy="731520"/>
+            <a:off x="0" y="0"/>
+            <a:ext cx="9144000" cy="731520"/>
           </a:xfrm>
           <a:prstGeom prst="rect">
             <a:avLst/>
           </a:prstGeom>
-          <a:noFill/>
-        </p:spPr>
-        <p:txBody>
-          <a:bodyPr wrap="none">
-            <a:spAutoFit/>
-          </a:bodyPr>
-          <a:lstStyle/>
-          <a:p>
-            <a:pPr>
-              <a:defRPr sz="4400" b="1">
-                <a:solidFill>
-                  <a:srgbClr val="1E293B"/>
-                </a:solidFill>
-              </a:defRPr>
-            </a:pPr>
-            <a:r>
-              <a:t>1️⃣ 사업 개요</a:t>
-            </a:r>
-          </a:p>
-        </p:txBody>
-      </p:sp>
-      <p:sp>
-        <p:nvSpPr>
-          <p:cNvPr id="3" name="Rectangle 2"/>
-          <p:cNvSpPr/>
-          <p:nvPr/>
-        </p:nvSpPr>
-        <p:spPr>
-          <a:xfrm>
-            <a:off x="457200" y="1097280"/>
-            <a:ext cx="8229600" cy="0"/>
-          </a:xfrm>
-          <a:prstGeom prst="rect">
-            <a:avLst/>
-          </a:prstGeom>
-          <a:ln w="38100">
+          <a:solidFill>
+            <a:srgbClr val="2980B9"/>
+          </a:solidFill>
+          <a:ln>
             <a:solidFill>
-              <a:srgbClr val="2563EB"/>
+              <a:srgbClr val="2980B9"/>
             </a:solidFill>
           </a:ln>
         </p:spPr>
@@ -5404,14 +5731,14 @@
       </p:sp>
       <p:sp>
         <p:nvSpPr>
-          <p:cNvPr id="4" name="TextBox 3"/>
+          <p:cNvPr id="3" name="TextBox 2"/>
           <p:cNvSpPr txBox="1"/>
           <p:nvPr/>
         </p:nvSpPr>
         <p:spPr>
           <a:xfrm>
-            <a:off x="731520" y="1371600"/>
-            <a:ext cx="7680960" cy="5029200"/>
+            <a:off x="457200" y="91440"/>
+            <a:ext cx="8229600" cy="548640"/>
           </a:xfrm>
           <a:prstGeom prst="rect">
             <a:avLst/>
@@ -5419,113 +5746,360 @@
           <a:noFill/>
         </p:spPr>
         <p:txBody>
+          <a:bodyPr wrap="none">
+            <a:spAutoFit/>
+          </a:bodyPr>
+          <a:lstStyle/>
+          <a:p>
+            <a:pPr>
+              <a:defRPr sz="4000" b="1">
+                <a:solidFill>
+                  <a:srgbClr val="FFFFFF"/>
+                </a:solidFill>
+              </a:defRPr>
+            </a:pPr>
+            <a:r>
+              <a:t>📊 시장 분석</a:t>
+            </a:r>
+          </a:p>
+        </p:txBody>
+      </p:sp>
+      <p:sp>
+        <p:nvSpPr>
+          <p:cNvPr id="4" name="TextBox 3"/>
+          <p:cNvSpPr txBox="1"/>
+          <p:nvPr/>
+        </p:nvSpPr>
+        <p:spPr>
+          <a:xfrm>
+            <a:off x="457200" y="1097280"/>
+            <a:ext cx="3840480" cy="5303520"/>
+          </a:xfrm>
+          <a:prstGeom prst="rect">
+            <a:avLst/>
+          </a:prstGeom>
+          <a:noFill/>
+        </p:spPr>
+        <p:txBody>
           <a:bodyPr wrap="square">
             <a:spAutoFit/>
           </a:bodyPr>
           <a:lstStyle/>
           <a:p>
             <a:pPr>
-              <a:spcBef>
-                <a:spcPts val="800"/>
-              </a:spcBef>
-              <a:spcAft>
-                <a:spcPts val="800"/>
-              </a:spcAft>
-              <a:defRPr sz="1800">
-                <a:solidFill>
-                  <a:srgbClr val="1E293B"/>
-                </a:solidFill>
-              </a:defRPr>
-            </a:pPr>
-            <a:r>
-              <a:t>Claude AI 기반의 자동화된 펫보험 비교 및 24시간 상담 플랫폼</a:t>
-            </a:r>
-          </a:p>
-          <a:p>
-            <a:pPr>
-              <a:spcBef>
-                <a:spcPts val="800"/>
-              </a:spcBef>
-              <a:spcAft>
-                <a:spcPts val="800"/>
-              </a:spcAft>
-              <a:defRPr sz="1800">
-                <a:solidFill>
-                  <a:srgbClr val="1E293B"/>
-                </a:solidFill>
-              </a:defRPr>
-            </a:pPr>
-          </a:p>
-          <a:p>
-            <a:pPr>
-              <a:spcBef>
-                <a:spcPts val="800"/>
-              </a:spcBef>
-              <a:spcAft>
-                <a:spcPts val="800"/>
-              </a:spcAft>
-              <a:defRPr sz="1800">
-                <a:solidFill>
-                  <a:srgbClr val="1E293B"/>
-                </a:solidFill>
-              </a:defRPr>
-            </a:pPr>
-            <a:r>
-              <a:t>📊 시장 현황:</a:t>
-            </a:r>
-          </a:p>
-          <a:p>
-            <a:pPr>
-              <a:spcBef>
-                <a:spcPts val="800"/>
-              </a:spcBef>
-              <a:spcAft>
-                <a:spcPts val="800"/>
-              </a:spcAft>
-              <a:defRPr sz="1800">
-                <a:solidFill>
-                  <a:srgbClr val="1E293B"/>
-                </a:solidFill>
-              </a:defRPr>
-            </a:pPr>
-            <a:r>
-              <a:t>• 반려동물 양육 가구: 600만 가구 (2024)</a:t>
-            </a:r>
-          </a:p>
-          <a:p>
-            <a:pPr>
-              <a:spcBef>
-                <a:spcPts val="800"/>
-              </a:spcBef>
-              <a:spcAft>
-                <a:spcPts val="800"/>
-              </a:spcAft>
-              <a:defRPr sz="1800">
-                <a:solidFill>
-                  <a:srgbClr val="1E293B"/>
-                </a:solidFill>
-              </a:defRPr>
-            </a:pPr>
-            <a:r>
-              <a:t>• 펫보험 시장: 5,000억원 (연평균 15-20% 성장)</a:t>
-            </a:r>
-          </a:p>
-          <a:p>
-            <a:pPr>
-              <a:spcBef>
-                <a:spcPts val="800"/>
-              </a:spcBef>
-              <a:spcAft>
-                <a:spcPts val="800"/>
-              </a:spcAft>
-              <a:defRPr sz="1800">
-                <a:solidFill>
-                  <a:srgbClr val="1E293B"/>
-                </a:solidFill>
-              </a:defRPr>
-            </a:pPr>
-            <a:r>
-              <a:t>• 펫보험 가입률: 5% (미국 20%에 비해 저조)</a:t>
+              <a:defRPr sz="2000" b="1">
+                <a:solidFill>
+                  <a:srgbClr val="2980B9"/>
+                </a:solidFill>
+              </a:defRPr>
+            </a:pPr>
+            <a:r>
+              <a:t>시장 규모</a:t>
+            </a:r>
+          </a:p>
+          <a:p>
+            <a:pPr>
+              <a:spcBef>
+                <a:spcPts val="600"/>
+              </a:spcBef>
+              <a:defRPr sz="1400">
+                <a:solidFill>
+                  <a:srgbClr val="34495E"/>
+                </a:solidFill>
+              </a:defRPr>
+            </a:pPr>
+            <a:r>
+              <a:t>• 국내 펫보험 시장</a:t>
+            </a:r>
+          </a:p>
+          <a:p>
+            <a:pPr>
+              <a:spcBef>
+                <a:spcPts val="600"/>
+              </a:spcBef>
+              <a:defRPr sz="1400">
+                <a:solidFill>
+                  <a:srgbClr val="34495E"/>
+                </a:solidFill>
+              </a:defRPr>
+            </a:pPr>
+            <a:r>
+              <a:t>  2023년: 약 2,500억원</a:t>
+            </a:r>
+          </a:p>
+          <a:p>
+            <a:pPr>
+              <a:spcBef>
+                <a:spcPts val="600"/>
+              </a:spcBef>
+              <a:defRPr sz="1400">
+                <a:solidFill>
+                  <a:srgbClr val="34495E"/>
+                </a:solidFill>
+              </a:defRPr>
+            </a:pPr>
+            <a:r>
+              <a:t>  2026년 예상: 4,000억원+</a:t>
+            </a:r>
+          </a:p>
+          <a:p>
+            <a:pPr>
+              <a:spcBef>
+                <a:spcPts val="600"/>
+              </a:spcBef>
+              <a:defRPr sz="1400">
+                <a:solidFill>
+                  <a:srgbClr val="34495E"/>
+                </a:solidFill>
+              </a:defRPr>
+            </a:pPr>
+          </a:p>
+          <a:p>
+            <a:pPr>
+              <a:spcBef>
+                <a:spcPts val="600"/>
+              </a:spcBef>
+              <a:defRPr sz="1400">
+                <a:solidFill>
+                  <a:srgbClr val="34495E"/>
+                </a:solidFill>
+              </a:defRPr>
+            </a:pPr>
+            <a:r>
+              <a:t>• 반려동물 소유자</a:t>
+            </a:r>
+          </a:p>
+          <a:p>
+            <a:pPr>
+              <a:spcBef>
+                <a:spcPts val="600"/>
+              </a:spcBef>
+              <a:defRPr sz="1400">
+                <a:solidFill>
+                  <a:srgbClr val="34495E"/>
+                </a:solidFill>
+              </a:defRPr>
+            </a:pPr>
+            <a:r>
+              <a:t>  약 1,180만 명 (42%)</a:t>
+            </a:r>
+          </a:p>
+          <a:p>
+            <a:pPr>
+              <a:spcBef>
+                <a:spcPts val="600"/>
+              </a:spcBef>
+              <a:defRPr sz="1400">
+                <a:solidFill>
+                  <a:srgbClr val="34495E"/>
+                </a:solidFill>
+              </a:defRPr>
+            </a:pPr>
+          </a:p>
+          <a:p>
+            <a:pPr>
+              <a:spcBef>
+                <a:spcPts val="600"/>
+              </a:spcBef>
+              <a:defRPr sz="1400">
+                <a:solidFill>
+                  <a:srgbClr val="34495E"/>
+                </a:solidFill>
+              </a:defRPr>
+            </a:pPr>
+            <a:r>
+              <a:t>• 펫보험 가입률</a:t>
+            </a:r>
+          </a:p>
+          <a:p>
+            <a:pPr>
+              <a:spcBef>
+                <a:spcPts val="600"/>
+              </a:spcBef>
+              <a:defRPr sz="1400">
+                <a:solidFill>
+                  <a:srgbClr val="34495E"/>
+                </a:solidFill>
+              </a:defRPr>
+            </a:pPr>
+            <a:r>
+              <a:t>  약 15-20% (성장중)</a:t>
+            </a:r>
+          </a:p>
+        </p:txBody>
+      </p:sp>
+      <p:sp>
+        <p:nvSpPr>
+          <p:cNvPr id="5" name="TextBox 4"/>
+          <p:cNvSpPr txBox="1"/>
+          <p:nvPr/>
+        </p:nvSpPr>
+        <p:spPr>
+          <a:xfrm>
+            <a:off x="4846320" y="1097280"/>
+            <a:ext cx="3840480" cy="5303520"/>
+          </a:xfrm>
+          <a:prstGeom prst="rect">
+            <a:avLst/>
+          </a:prstGeom>
+          <a:noFill/>
+        </p:spPr>
+        <p:txBody>
+          <a:bodyPr wrap="square">
+            <a:spAutoFit/>
+          </a:bodyPr>
+          <a:lstStyle/>
+          <a:p>
+            <a:pPr>
+              <a:defRPr sz="2000" b="1">
+                <a:solidFill>
+                  <a:srgbClr val="2980B9"/>
+                </a:solidFill>
+              </a:defRPr>
+            </a:pPr>
+            <a:r>
+              <a:t>경쟁 우위</a:t>
+            </a:r>
+          </a:p>
+          <a:p>
+            <a:pPr>
+              <a:spcBef>
+                <a:spcPts val="600"/>
+              </a:spcBef>
+              <a:defRPr sz="1400">
+                <a:solidFill>
+                  <a:srgbClr val="34495E"/>
+                </a:solidFill>
+              </a:defRPr>
+            </a:pPr>
+            <a:r>
+              <a:t>✅ AI 기반 맞춤형</a:t>
+            </a:r>
+          </a:p>
+          <a:p>
+            <a:pPr>
+              <a:spcBef>
+                <a:spcPts val="600"/>
+              </a:spcBef>
+              <a:defRPr sz="1400">
+                <a:solidFill>
+                  <a:srgbClr val="34495E"/>
+                </a:solidFill>
+              </a:defRPr>
+            </a:pPr>
+            <a:r>
+              <a:t>   대부분 수동 비교</a:t>
+            </a:r>
+          </a:p>
+          <a:p>
+            <a:pPr>
+              <a:spcBef>
+                <a:spcPts val="600"/>
+              </a:spcBef>
+              <a:defRPr sz="1400">
+                <a:solidFill>
+                  <a:srgbClr val="34495E"/>
+                </a:solidFill>
+              </a:defRPr>
+            </a:pPr>
+          </a:p>
+          <a:p>
+            <a:pPr>
+              <a:spcBef>
+                <a:spcPts val="600"/>
+              </a:spcBef>
+              <a:defRPr sz="1400">
+                <a:solidFill>
+                  <a:srgbClr val="34495E"/>
+                </a:solidFill>
+              </a:defRPr>
+            </a:pPr>
+            <a:r>
+              <a:t>✅ 24시간 무료 상담</a:t>
+            </a:r>
+          </a:p>
+          <a:p>
+            <a:pPr>
+              <a:spcBef>
+                <a:spcPts val="600"/>
+              </a:spcBef>
+              <a:defRPr sz="1400">
+                <a:solidFill>
+                  <a:srgbClr val="34495E"/>
+                </a:solidFill>
+              </a:defRPr>
+            </a:pPr>
+            <a:r>
+              <a:t>   오픈 시간 제한 경쟁사</a:t>
+            </a:r>
+          </a:p>
+          <a:p>
+            <a:pPr>
+              <a:spcBef>
+                <a:spcPts val="600"/>
+              </a:spcBef>
+              <a:defRPr sz="1400">
+                <a:solidFill>
+                  <a:srgbClr val="34495E"/>
+                </a:solidFill>
+              </a:defRPr>
+            </a:pPr>
+          </a:p>
+          <a:p>
+            <a:pPr>
+              <a:spcBef>
+                <a:spcPts val="600"/>
+              </a:spcBef>
+              <a:defRPr sz="1400">
+                <a:solidFill>
+                  <a:srgbClr val="34495E"/>
+                </a:solidFill>
+              </a:defRPr>
+            </a:pPr>
+            <a:r>
+              <a:t>✅ 8개 보험사 통합</a:t>
+            </a:r>
+          </a:p>
+          <a:p>
+            <a:pPr>
+              <a:spcBef>
+                <a:spcPts val="600"/>
+              </a:spcBef>
+              <a:defRPr sz="1400">
+                <a:solidFill>
+                  <a:srgbClr val="34495E"/>
+                </a:solidFill>
+              </a:defRPr>
+            </a:pPr>
+            <a:r>
+              <a:t>   단일 또는 소수만 지원</a:t>
+            </a:r>
+          </a:p>
+          <a:p>
+            <a:pPr>
+              <a:spcBef>
+                <a:spcPts val="600"/>
+              </a:spcBef>
+              <a:defRPr sz="1400">
+                <a:solidFill>
+                  <a:srgbClr val="34495E"/>
+                </a:solidFill>
+              </a:defRPr>
+            </a:pPr>
+          </a:p>
+          <a:p>
+            <a:pPr>
+              <a:spcBef>
+                <a:spcPts val="600"/>
+              </a:spcBef>
+              <a:defRPr sz="1400">
+                <a:solidFill>
+                  <a:srgbClr val="34495E"/>
+                </a:solidFill>
+              </a:defRPr>
+            </a:pPr>
+            <a:r>
+              <a:t>✅ 사용자 친화적 UX</a:t>
             </a:r>
           </a:p>
         </p:txBody>
@@ -5538,17 +6112,9 @@
 </p:sld>
 </file>
 
-<file path=ppt/slides/slide4.xml><?xml version="1.0" encoding="utf-8"?>
+<file path=ppt/slides/slide7.xml><?xml version="1.0" encoding="utf-8"?>
 <p:sld xmlns:a="http://schemas.openxmlformats.org/drawingml/2006/main" xmlns:p="http://schemas.openxmlformats.org/presentationml/2006/main" xmlns:r="http://schemas.openxmlformats.org/officeDocument/2006/relationships">
   <p:cSld>
-    <p:bg>
-      <p:bgPr>
-        <a:solidFill>
-          <a:srgbClr val="FFFFFF"/>
-        </a:solidFill>
-        <a:effectLst/>
-      </p:bgPr>
-    </p:bg>
     <p:spTree>
       <p:nvGrpSpPr>
         <p:cNvPr id="1" name=""/>
@@ -5558,56 +6124,24 @@
       <p:grpSpPr/>
       <p:sp>
         <p:nvSpPr>
-          <p:cNvPr id="2" name="TextBox 1"/>
-          <p:cNvSpPr txBox="1"/>
+          <p:cNvPr id="2" name="Rectangle 1"/>
+          <p:cNvSpPr/>
           <p:nvPr/>
         </p:nvSpPr>
         <p:spPr>
           <a:xfrm>
-            <a:off x="457200" y="274320"/>
-            <a:ext cx="8229600" cy="731520"/>
+            <a:off x="0" y="0"/>
+            <a:ext cx="9144000" cy="731520"/>
           </a:xfrm>
           <a:prstGeom prst="rect">
             <a:avLst/>
           </a:prstGeom>
-          <a:noFill/>
-        </p:spPr>
-        <p:txBody>
-          <a:bodyPr wrap="none">
-            <a:spAutoFit/>
-          </a:bodyPr>
-          <a:lstStyle/>
-          <a:p>
-            <a:pPr>
-              <a:defRPr sz="4400" b="1">
-                <a:solidFill>
-                  <a:srgbClr val="1E293B"/>
-                </a:solidFill>
-              </a:defRPr>
-            </a:pPr>
-            <a:r>
-              <a:t>🎯 문제점 vs 솔루션</a:t>
-            </a:r>
-          </a:p>
-        </p:txBody>
-      </p:sp>
-      <p:sp>
-        <p:nvSpPr>
-          <p:cNvPr id="3" name="Rectangle 2"/>
-          <p:cNvSpPr/>
-          <p:nvPr/>
-        </p:nvSpPr>
-        <p:spPr>
-          <a:xfrm>
-            <a:off x="457200" y="1097280"/>
-            <a:ext cx="8229600" cy="0"/>
-          </a:xfrm>
-          <a:prstGeom prst="rect">
-            <a:avLst/>
-          </a:prstGeom>
-          <a:ln w="38100">
+          <a:solidFill>
+            <a:srgbClr val="2980B9"/>
+          </a:solidFill>
+          <a:ln>
             <a:solidFill>
-              <a:srgbClr val="2563EB"/>
+              <a:srgbClr val="2980B9"/>
             </a:solidFill>
           </a:ln>
         </p:spPr>
@@ -5635,14 +6169,14 @@
       </p:sp>
       <p:sp>
         <p:nvSpPr>
-          <p:cNvPr id="4" name="TextBox 3"/>
+          <p:cNvPr id="3" name="TextBox 2"/>
           <p:cNvSpPr txBox="1"/>
           <p:nvPr/>
         </p:nvSpPr>
         <p:spPr>
           <a:xfrm>
-            <a:off x="731520" y="1371600"/>
-            <a:ext cx="7680960" cy="5029200"/>
+            <a:off x="457200" y="91440"/>
+            <a:ext cx="8229600" cy="548640"/>
           </a:xfrm>
           <a:prstGeom prst="rect">
             <a:avLst/>
@@ -5650,167 +6184,240 @@
           <a:noFill/>
         </p:spPr>
         <p:txBody>
+          <a:bodyPr wrap="none">
+            <a:spAutoFit/>
+          </a:bodyPr>
+          <a:lstStyle/>
+          <a:p>
+            <a:pPr>
+              <a:defRPr sz="4000" b="1">
+                <a:solidFill>
+                  <a:srgbClr val="FFFFFF"/>
+                </a:solidFill>
+              </a:defRPr>
+            </a:pPr>
+            <a:r>
+              <a:t>🛠️ 기술 스택</a:t>
+            </a:r>
+          </a:p>
+        </p:txBody>
+      </p:sp>
+      <p:sp>
+        <p:nvSpPr>
+          <p:cNvPr id="4" name="TextBox 3"/>
+          <p:cNvSpPr txBox="1"/>
+          <p:nvPr/>
+        </p:nvSpPr>
+        <p:spPr>
+          <a:xfrm>
+            <a:off x="457200" y="1097280"/>
+            <a:ext cx="3840480" cy="5303520"/>
+          </a:xfrm>
+          <a:prstGeom prst="rect">
+            <a:avLst/>
+          </a:prstGeom>
+          <a:noFill/>
+        </p:spPr>
+        <p:txBody>
           <a:bodyPr wrap="square">
             <a:spAutoFit/>
           </a:bodyPr>
           <a:lstStyle/>
           <a:p>
             <a:pPr>
-              <a:spcBef>
-                <a:spcPts val="800"/>
-              </a:spcBef>
-              <a:spcAft>
-                <a:spcPts val="800"/>
-              </a:spcAft>
-              <a:defRPr sz="1800">
-                <a:solidFill>
-                  <a:srgbClr val="1E293B"/>
-                </a:solidFill>
-              </a:defRPr>
-            </a:pPr>
-            <a:r>
-              <a:t>❌ 문제점:</a:t>
-            </a:r>
-          </a:p>
-          <a:p>
-            <a:pPr>
-              <a:spcBef>
-                <a:spcPts val="800"/>
-              </a:spcBef>
-              <a:spcAft>
-                <a:spcPts val="800"/>
-              </a:spcAft>
-              <a:defRPr sz="1800">
-                <a:solidFill>
-                  <a:srgbClr val="1E293B"/>
-                </a:solidFill>
-              </a:defRPr>
-            </a:pPr>
-            <a:r>
-              <a:t>• 8개 이상 보험사의 복잡한 상품 비교 어려움</a:t>
-            </a:r>
-          </a:p>
-          <a:p>
-            <a:pPr>
-              <a:spcBef>
-                <a:spcPts val="800"/>
-              </a:spcBef>
-              <a:spcAft>
-                <a:spcPts val="800"/>
-              </a:spcAft>
-              <a:defRPr sz="1800">
-                <a:solidFill>
-                  <a:srgbClr val="1E293B"/>
-                </a:solidFill>
-              </a:defRPr>
-            </a:pPr>
-            <a:r>
-              <a:t>• 고가의 전문 상담 비용 (시간당 5~10만원)</a:t>
-            </a:r>
-          </a:p>
-          <a:p>
-            <a:pPr>
-              <a:spcBef>
-                <a:spcPts val="800"/>
-              </a:spcBef>
-              <a:spcAft>
-                <a:spcPts val="800"/>
-              </a:spcAft>
-              <a:defRPr sz="1800">
-                <a:solidFill>
-                  <a:srgbClr val="1E293B"/>
-                </a:solidFill>
-              </a:defRPr>
-            </a:pPr>
-            <a:r>
-              <a:t>• 야간/휴일 상담 불가능</a:t>
-            </a:r>
-          </a:p>
-          <a:p>
-            <a:pPr>
-              <a:spcBef>
-                <a:spcPts val="800"/>
-              </a:spcBef>
-              <a:spcAft>
-                <a:spcPts val="800"/>
-              </a:spcAft>
-              <a:defRPr sz="1800">
-                <a:solidFill>
-                  <a:srgbClr val="1E293B"/>
-                </a:solidFill>
-              </a:defRPr>
-            </a:pPr>
-          </a:p>
-          <a:p>
-            <a:pPr>
-              <a:spcBef>
-                <a:spcPts val="800"/>
-              </a:spcBef>
-              <a:spcAft>
-                <a:spcPts val="800"/>
-              </a:spcAft>
-              <a:defRPr sz="1800">
-                <a:solidFill>
-                  <a:srgbClr val="1E293B"/>
-                </a:solidFill>
-              </a:defRPr>
-            </a:pPr>
-            <a:r>
-              <a:t>✅ 우리의 솔루션:</a:t>
-            </a:r>
-          </a:p>
-          <a:p>
-            <a:pPr>
-              <a:spcBef>
-                <a:spcPts val="800"/>
-              </a:spcBef>
-              <a:spcAft>
-                <a:spcPts val="800"/>
-              </a:spcAft>
-              <a:defRPr sz="1800">
-                <a:solidFill>
-                  <a:srgbClr val="1E293B"/>
-                </a:solidFill>
-              </a:defRPr>
-            </a:pPr>
-            <a:r>
-              <a:t>• AI 기반 자동 비교 시스템</a:t>
-            </a:r>
-          </a:p>
-          <a:p>
-            <a:pPr>
-              <a:spcBef>
-                <a:spcPts val="800"/>
-              </a:spcBef>
-              <a:spcAft>
-                <a:spcPts val="800"/>
-              </a:spcAft>
-              <a:defRPr sz="1800">
-                <a:solidFill>
-                  <a:srgbClr val="1E293B"/>
-                </a:solidFill>
-              </a:defRPr>
-            </a:pPr>
-            <a:r>
-              <a:t>• 24시간 무료 상담 (Claude AI)</a:t>
-            </a:r>
-          </a:p>
-          <a:p>
-            <a:pPr>
-              <a:spcBef>
-                <a:spcPts val="800"/>
-              </a:spcBef>
-              <a:spcAft>
-                <a:spcPts val="800"/>
-              </a:spcAft>
-              <a:defRPr sz="1800">
-                <a:solidFill>
-                  <a:srgbClr val="1E293B"/>
-                </a:solidFill>
-              </a:defRPr>
-            </a:pPr>
-            <a:r>
-              <a:t>• 완전 자동화된 운영</a:t>
+              <a:defRPr sz="2000" b="1">
+                <a:solidFill>
+                  <a:srgbClr val="2980B9"/>
+                </a:solidFill>
+              </a:defRPr>
+            </a:pPr>
+            <a:r>
+              <a:t>Frontend</a:t>
+            </a:r>
+          </a:p>
+          <a:p>
+            <a:pPr>
+              <a:spcBef>
+                <a:spcPts val="600"/>
+              </a:spcBef>
+              <a:defRPr sz="1400">
+                <a:solidFill>
+                  <a:srgbClr val="34495E"/>
+                </a:solidFill>
+              </a:defRPr>
+            </a:pPr>
+            <a:r>
+              <a:t>• React 18</a:t>
+            </a:r>
+          </a:p>
+          <a:p>
+            <a:pPr>
+              <a:spcBef>
+                <a:spcPts val="600"/>
+              </a:spcBef>
+              <a:defRPr sz="1400">
+                <a:solidFill>
+                  <a:srgbClr val="34495E"/>
+                </a:solidFill>
+              </a:defRPr>
+            </a:pPr>
+            <a:r>
+              <a:t>• Vite (번들러)</a:t>
+            </a:r>
+          </a:p>
+          <a:p>
+            <a:pPr>
+              <a:spcBef>
+                <a:spcPts val="600"/>
+              </a:spcBef>
+              <a:defRPr sz="1400">
+                <a:solidFill>
+                  <a:srgbClr val="34495E"/>
+                </a:solidFill>
+              </a:defRPr>
+            </a:pPr>
+            <a:r>
+              <a:t>• Tailwind CSS</a:t>
+            </a:r>
+          </a:p>
+          <a:p>
+            <a:pPr>
+              <a:spcBef>
+                <a:spcPts val="600"/>
+              </a:spcBef>
+              <a:defRPr sz="1400">
+                <a:solidFill>
+                  <a:srgbClr val="34495E"/>
+                </a:solidFill>
+              </a:defRPr>
+            </a:pPr>
+            <a:r>
+              <a:t>• Google Maps API</a:t>
+            </a:r>
+          </a:p>
+          <a:p>
+            <a:pPr>
+              <a:spcBef>
+                <a:spcPts val="600"/>
+              </a:spcBef>
+              <a:defRPr sz="1400">
+                <a:solidFill>
+                  <a:srgbClr val="34495E"/>
+                </a:solidFill>
+              </a:defRPr>
+            </a:pPr>
+            <a:r>
+              <a:t>• PWA 지원</a:t>
+            </a:r>
+          </a:p>
+        </p:txBody>
+      </p:sp>
+      <p:sp>
+        <p:nvSpPr>
+          <p:cNvPr id="5" name="TextBox 4"/>
+          <p:cNvSpPr txBox="1"/>
+          <p:nvPr/>
+        </p:nvSpPr>
+        <p:spPr>
+          <a:xfrm>
+            <a:off x="4846320" y="1097280"/>
+            <a:ext cx="3840480" cy="5303520"/>
+          </a:xfrm>
+          <a:prstGeom prst="rect">
+            <a:avLst/>
+          </a:prstGeom>
+          <a:noFill/>
+        </p:spPr>
+        <p:txBody>
+          <a:bodyPr wrap="square">
+            <a:spAutoFit/>
+          </a:bodyPr>
+          <a:lstStyle/>
+          <a:p>
+            <a:pPr>
+              <a:defRPr sz="2000" b="1">
+                <a:solidFill>
+                  <a:srgbClr val="2980B9"/>
+                </a:solidFill>
+              </a:defRPr>
+            </a:pPr>
+            <a:r>
+              <a:t>Backend &amp; Infrastructure</a:t>
+            </a:r>
+          </a:p>
+          <a:p>
+            <a:pPr>
+              <a:spcBef>
+                <a:spcPts val="600"/>
+              </a:spcBef>
+              <a:defRPr sz="1400">
+                <a:solidFill>
+                  <a:srgbClr val="34495E"/>
+                </a:solidFill>
+              </a:defRPr>
+            </a:pPr>
+            <a:r>
+              <a:t>• Node.js + Express</a:t>
+            </a:r>
+          </a:p>
+          <a:p>
+            <a:pPr>
+              <a:spcBef>
+                <a:spcPts val="600"/>
+              </a:spcBef>
+              <a:defRPr sz="1400">
+                <a:solidFill>
+                  <a:srgbClr val="34495E"/>
+                </a:solidFill>
+              </a:defRPr>
+            </a:pPr>
+            <a:r>
+              <a:t>• Supabase (DB)</a:t>
+            </a:r>
+          </a:p>
+          <a:p>
+            <a:pPr>
+              <a:spcBef>
+                <a:spcPts val="600"/>
+              </a:spcBef>
+              <a:defRPr sz="1400">
+                <a:solidFill>
+                  <a:srgbClr val="34495E"/>
+                </a:solidFill>
+              </a:defRPr>
+            </a:pPr>
+            <a:r>
+              <a:t>• Claude API</a:t>
+            </a:r>
+          </a:p>
+          <a:p>
+            <a:pPr>
+              <a:spcBef>
+                <a:spcPts val="600"/>
+              </a:spcBef>
+              <a:defRPr sz="1400">
+                <a:solidFill>
+                  <a:srgbClr val="34495E"/>
+                </a:solidFill>
+              </a:defRPr>
+            </a:pPr>
+            <a:r>
+              <a:t>• Resend (이메일)</a:t>
+            </a:r>
+          </a:p>
+          <a:p>
+            <a:pPr>
+              <a:spcBef>
+                <a:spcPts val="600"/>
+              </a:spcBef>
+              <a:defRPr sz="1400">
+                <a:solidFill>
+                  <a:srgbClr val="34495E"/>
+                </a:solidFill>
+              </a:defRPr>
+            </a:pPr>
+            <a:r>
+              <a:t>• Vercel (호스팅)</a:t>
             </a:r>
           </a:p>
         </p:txBody>
@@ -5823,17 +6430,9 @@
 </p:sld>
 </file>
 
-<file path=ppt/slides/slide5.xml><?xml version="1.0" encoding="utf-8"?>
+<file path=ppt/slides/slide8.xml><?xml version="1.0" encoding="utf-8"?>
 <p:sld xmlns:a="http://schemas.openxmlformats.org/drawingml/2006/main" xmlns:p="http://schemas.openxmlformats.org/presentationml/2006/main" xmlns:r="http://schemas.openxmlformats.org/officeDocument/2006/relationships">
   <p:cSld>
-    <p:bg>
-      <p:bgPr>
-        <a:solidFill>
-          <a:srgbClr val="FFFFFF"/>
-        </a:solidFill>
-        <a:effectLst/>
-      </p:bgPr>
-    </p:bg>
     <p:spTree>
       <p:nvGrpSpPr>
         <p:cNvPr id="1" name=""/>
@@ -5843,56 +6442,24 @@
       <p:grpSpPr/>
       <p:sp>
         <p:nvSpPr>
-          <p:cNvPr id="2" name="TextBox 1"/>
-          <p:cNvSpPr txBox="1"/>
+          <p:cNvPr id="2" name="Rectangle 1"/>
+          <p:cNvSpPr/>
           <p:nvPr/>
         </p:nvSpPr>
         <p:spPr>
           <a:xfrm>
-            <a:off x="457200" y="274320"/>
-            <a:ext cx="8229600" cy="731520"/>
+            <a:off x="0" y="0"/>
+            <a:ext cx="9144000" cy="731520"/>
           </a:xfrm>
           <a:prstGeom prst="rect">
             <a:avLst/>
           </a:prstGeom>
-          <a:noFill/>
-        </p:spPr>
-        <p:txBody>
-          <a:bodyPr wrap="none">
-            <a:spAutoFit/>
-          </a:bodyPr>
-          <a:lstStyle/>
-          <a:p>
-            <a:pPr>
-              <a:defRPr sz="4400" b="1">
-                <a:solidFill>
-                  <a:srgbClr val="1E293B"/>
-                </a:solidFill>
-              </a:defRPr>
-            </a:pPr>
-            <a:r>
-              <a:t>2️⃣ 핵심 기술 - AI 챗봇</a:t>
-            </a:r>
-          </a:p>
-        </p:txBody>
-      </p:sp>
-      <p:sp>
-        <p:nvSpPr>
-          <p:cNvPr id="3" name="Rectangle 2"/>
-          <p:cNvSpPr/>
-          <p:nvPr/>
-        </p:nvSpPr>
-        <p:spPr>
-          <a:xfrm>
-            <a:off x="457200" y="1097280"/>
-            <a:ext cx="8229600" cy="0"/>
-          </a:xfrm>
-          <a:prstGeom prst="rect">
-            <a:avLst/>
-          </a:prstGeom>
-          <a:ln w="38100">
+          <a:solidFill>
+            <a:srgbClr val="2980B9"/>
+          </a:solidFill>
+          <a:ln>
             <a:solidFill>
-              <a:srgbClr val="2563EB"/>
+              <a:srgbClr val="2980B9"/>
             </a:solidFill>
           </a:ln>
         </p:spPr>
@@ -5920,14 +6487,14 @@
       </p:sp>
       <p:sp>
         <p:nvSpPr>
-          <p:cNvPr id="4" name="TextBox 3"/>
+          <p:cNvPr id="3" name="TextBox 2"/>
           <p:cNvSpPr txBox="1"/>
           <p:nvPr/>
         </p:nvSpPr>
         <p:spPr>
           <a:xfrm>
-            <a:off x="731520" y="1371600"/>
-            <a:ext cx="7680960" cy="5029200"/>
+            <a:off x="457200" y="91440"/>
+            <a:ext cx="8229600" cy="548640"/>
           </a:xfrm>
           <a:prstGeom prst="rect">
             <a:avLst/>
@@ -5935,6 +6502,41 @@
           <a:noFill/>
         </p:spPr>
         <p:txBody>
+          <a:bodyPr wrap="none">
+            <a:spAutoFit/>
+          </a:bodyPr>
+          <a:lstStyle/>
+          <a:p>
+            <a:pPr>
+              <a:defRPr sz="4000" b="1">
+                <a:solidFill>
+                  <a:srgbClr val="FFFFFF"/>
+                </a:solidFill>
+              </a:defRPr>
+            </a:pPr>
+            <a:r>
+              <a:t>💰 수익 모델</a:t>
+            </a:r>
+          </a:p>
+        </p:txBody>
+      </p:sp>
+      <p:sp>
+        <p:nvSpPr>
+          <p:cNvPr id="4" name="TextBox 3"/>
+          <p:cNvSpPr txBox="1"/>
+          <p:nvPr/>
+        </p:nvSpPr>
+        <p:spPr>
+          <a:xfrm>
+            <a:off x="731520" y="1097280"/>
+            <a:ext cx="7680960" cy="5303520"/>
+          </a:xfrm>
+          <a:prstGeom prst="rect">
+            <a:avLst/>
+          </a:prstGeom>
+          <a:noFill/>
+        </p:spPr>
+        <p:txBody>
           <a:bodyPr wrap="square">
             <a:spAutoFit/>
           </a:bodyPr>
@@ -5949,168 +6551,201 @@
               </a:spcAft>
               <a:defRPr sz="1800">
                 <a:solidFill>
-                  <a:srgbClr val="1E293B"/>
-                </a:solidFill>
-              </a:defRPr>
-            </a:pPr>
-            <a:r>
-              <a:t>기술 스택: Claude API (Sonnet 4.6, Opus 4.6)</a:t>
-            </a:r>
-          </a:p>
-          <a:p>
-            <a:pPr>
-              <a:spcBef>
-                <a:spcPts val="800"/>
-              </a:spcBef>
-              <a:spcAft>
-                <a:spcPts val="800"/>
-              </a:spcAft>
-              <a:defRPr sz="1800">
-                <a:solidFill>
-                  <a:srgbClr val="1E293B"/>
-                </a:solidFill>
-              </a:defRPr>
-            </a:pPr>
-          </a:p>
-          <a:p>
-            <a:pPr>
-              <a:spcBef>
-                <a:spcPts val="800"/>
-              </a:spcBef>
-              <a:spcAft>
-                <a:spcPts val="800"/>
-              </a:spcAft>
-              <a:defRPr sz="1800">
-                <a:solidFill>
-                  <a:srgbClr val="1E293B"/>
-                </a:solidFill>
-              </a:defRPr>
-            </a:pPr>
-            <a:r>
-              <a:t>✨ 구현 내용:</a:t>
-            </a:r>
-          </a:p>
-          <a:p>
-            <a:pPr>
-              <a:spcBef>
-                <a:spcPts val="800"/>
-              </a:spcBef>
-              <a:spcAft>
-                <a:spcPts val="800"/>
-              </a:spcAft>
-              <a:defRPr sz="1800">
-                <a:solidFill>
-                  <a:srgbClr val="1E293B"/>
-                </a:solidFill>
-              </a:defRPr>
-            </a:pPr>
-            <a:r>
-              <a:t>• Claude API 통합: 실시간 자연어 처리</a:t>
-            </a:r>
-          </a:p>
-          <a:p>
-            <a:pPr>
-              <a:spcBef>
-                <a:spcPts val="800"/>
-              </a:spcBef>
-              <a:spcAft>
-                <a:spcPts val="800"/>
-              </a:spcAft>
-              <a:defRPr sz="1800">
-                <a:solidFill>
-                  <a:srgbClr val="1E293B"/>
-                </a:solidFill>
-              </a:defRPr>
-            </a:pPr>
-            <a:r>
-              <a:t>• System Prompt 엔지니어링: 펫보험 전문가 페르소나</a:t>
-            </a:r>
-          </a:p>
-          <a:p>
-            <a:pPr>
-              <a:spcBef>
-                <a:spcPts val="800"/>
-              </a:spcBef>
-              <a:spcAft>
-                <a:spcPts val="800"/>
-              </a:spcAft>
-              <a:defRPr sz="1800">
-                <a:solidFill>
-                  <a:srgbClr val="1E293B"/>
-                </a:solidFill>
-              </a:defRPr>
-            </a:pPr>
-            <a:r>
-              <a:t>• Multi-turn 대화: 견종별/나이별 맞춤 분석</a:t>
-            </a:r>
-          </a:p>
-          <a:p>
-            <a:pPr>
-              <a:spcBef>
-                <a:spcPts val="800"/>
-              </a:spcBef>
-              <a:spcAft>
-                <a:spcPts val="800"/>
-              </a:spcAft>
-              <a:defRPr sz="1800">
-                <a:solidFill>
-                  <a:srgbClr val="1E293B"/>
-                </a:solidFill>
-              </a:defRPr>
-            </a:pPr>
-          </a:p>
-          <a:p>
-            <a:pPr>
-              <a:spcBef>
-                <a:spcPts val="800"/>
-              </a:spcBef>
-              <a:spcAft>
-                <a:spcPts val="800"/>
-              </a:spcAft>
-              <a:defRPr sz="1800">
-                <a:solidFill>
-                  <a:srgbClr val="1E293B"/>
-                </a:solidFill>
-              </a:defRPr>
-            </a:pPr>
-            <a:r>
-              <a:t>💰 효과:</a:t>
-            </a:r>
-          </a:p>
-          <a:p>
-            <a:pPr>
-              <a:spcBef>
-                <a:spcPts val="800"/>
-              </a:spcBef>
-              <a:spcAft>
-                <a:spcPts val="800"/>
-              </a:spcAft>
-              <a:defRPr sz="1800">
-                <a:solidFill>
-                  <a:srgbClr val="1E293B"/>
-                </a:solidFill>
-              </a:defRPr>
-            </a:pPr>
-            <a:r>
-              <a:t>• 상담사 인건비 제거 (월 500만원 절감)</a:t>
-            </a:r>
-          </a:p>
-          <a:p>
-            <a:pPr>
-              <a:spcBef>
-                <a:spcPts val="800"/>
-              </a:spcBef>
-              <a:spcAft>
-                <a:spcPts val="800"/>
-              </a:spcAft>
-              <a:defRPr sz="1800">
-                <a:solidFill>
-                  <a:srgbClr val="1E293B"/>
-                </a:solidFill>
-              </a:defRPr>
-            </a:pPr>
-            <a:r>
-              <a:t>• 1000명 동시 상담 가능</a:t>
+                  <a:srgbClr val="34495E"/>
+                </a:solidFill>
+              </a:defRPr>
+            </a:pPr>
+            <a:r>
+              <a:t>Phase 1 (현재): 무료 서비스 통한 사용자 확보</a:t>
+            </a:r>
+          </a:p>
+          <a:p>
+            <a:pPr>
+              <a:spcBef>
+                <a:spcPts val="800"/>
+              </a:spcBef>
+              <a:spcAft>
+                <a:spcPts val="800"/>
+              </a:spcAft>
+              <a:defRPr sz="1800">
+                <a:solidFill>
+                  <a:srgbClr val="34495E"/>
+                </a:solidFill>
+              </a:defRPr>
+            </a:pPr>
+          </a:p>
+          <a:p>
+            <a:pPr>
+              <a:spcBef>
+                <a:spcPts val="800"/>
+              </a:spcBef>
+              <a:spcAft>
+                <a:spcPts val="800"/>
+              </a:spcAft>
+              <a:defRPr sz="1800">
+                <a:solidFill>
+                  <a:srgbClr val="34495E"/>
+                </a:solidFill>
+              </a:defRPr>
+            </a:pPr>
+            <a:r>
+              <a:t>Phase 2 (6개월): 보험사 제휴 수익</a:t>
+            </a:r>
+          </a:p>
+          <a:p>
+            <a:pPr>
+              <a:spcBef>
+                <a:spcPts val="800"/>
+              </a:spcBef>
+              <a:spcAft>
+                <a:spcPts val="800"/>
+              </a:spcAft>
+              <a:defRPr sz="1800">
+                <a:solidFill>
+                  <a:srgbClr val="34495E"/>
+                </a:solidFill>
+              </a:defRPr>
+            </a:pPr>
+            <a:r>
+              <a:t>  • 제휴 수수료 (가입당 5~10%)</a:t>
+            </a:r>
+          </a:p>
+          <a:p>
+            <a:pPr>
+              <a:spcBef>
+                <a:spcPts val="800"/>
+              </a:spcBef>
+              <a:spcAft>
+                <a:spcPts val="800"/>
+              </a:spcAft>
+              <a:defRPr sz="1800">
+                <a:solidFill>
+                  <a:srgbClr val="34495E"/>
+                </a:solidFill>
+              </a:defRPr>
+            </a:pPr>
+            <a:r>
+              <a:t>  • 광고 수익 (검색 상단 노출)</a:t>
+            </a:r>
+          </a:p>
+          <a:p>
+            <a:pPr>
+              <a:spcBef>
+                <a:spcPts val="800"/>
+              </a:spcBef>
+              <a:spcAft>
+                <a:spcPts val="800"/>
+              </a:spcAft>
+              <a:defRPr sz="1800">
+                <a:solidFill>
+                  <a:srgbClr val="34495E"/>
+                </a:solidFill>
+              </a:defRPr>
+            </a:pPr>
+            <a:r>
+              <a:t>  • 보험사 데이터 API 라이센싱</a:t>
+            </a:r>
+          </a:p>
+          <a:p>
+            <a:pPr>
+              <a:spcBef>
+                <a:spcPts val="800"/>
+              </a:spcBef>
+              <a:spcAft>
+                <a:spcPts val="800"/>
+              </a:spcAft>
+              <a:defRPr sz="1800">
+                <a:solidFill>
+                  <a:srgbClr val="34495E"/>
+                </a:solidFill>
+              </a:defRPr>
+            </a:pPr>
+          </a:p>
+          <a:p>
+            <a:pPr>
+              <a:spcBef>
+                <a:spcPts val="800"/>
+              </a:spcBef>
+              <a:spcAft>
+                <a:spcPts val="800"/>
+              </a:spcAft>
+              <a:defRPr sz="1800">
+                <a:solidFill>
+                  <a:srgbClr val="34495E"/>
+                </a:solidFill>
+              </a:defRPr>
+            </a:pPr>
+            <a:r>
+              <a:t>Phase 3 (1년): 프리미엄 기능</a:t>
+            </a:r>
+          </a:p>
+          <a:p>
+            <a:pPr>
+              <a:spcBef>
+                <a:spcPts val="800"/>
+              </a:spcBef>
+              <a:spcAft>
+                <a:spcPts val="800"/>
+              </a:spcAft>
+              <a:defRPr sz="1800">
+                <a:solidFill>
+                  <a:srgbClr val="34495E"/>
+                </a:solidFill>
+              </a:defRPr>
+            </a:pPr>
+            <a:r>
+              <a:t>  • 상담 프리미엄 (월 9,900원)</a:t>
+            </a:r>
+          </a:p>
+          <a:p>
+            <a:pPr>
+              <a:spcBef>
+                <a:spcPts val="800"/>
+              </a:spcBef>
+              <a:spcAft>
+                <a:spcPts val="800"/>
+              </a:spcAft>
+              <a:defRPr sz="1800">
+                <a:solidFill>
+                  <a:srgbClr val="34495E"/>
+                </a:solidFill>
+              </a:defRPr>
+            </a:pPr>
+            <a:r>
+              <a:t>  • 맞춤형 리포트 (월 4,900원)</a:t>
+            </a:r>
+          </a:p>
+          <a:p>
+            <a:pPr>
+              <a:spcBef>
+                <a:spcPts val="800"/>
+              </a:spcBef>
+              <a:spcAft>
+                <a:spcPts val="800"/>
+              </a:spcAft>
+              <a:defRPr sz="1800">
+                <a:solidFill>
+                  <a:srgbClr val="34495E"/>
+                </a:solidFill>
+              </a:defRPr>
+            </a:pPr>
+          </a:p>
+          <a:p>
+            <a:pPr>
+              <a:spcBef>
+                <a:spcPts val="800"/>
+              </a:spcBef>
+              <a:spcAft>
+                <a:spcPts val="800"/>
+              </a:spcAft>
+              <a:defRPr sz="1800">
+                <a:solidFill>
+                  <a:srgbClr val="34495E"/>
+                </a:solidFill>
+              </a:defRPr>
+            </a:pPr>
+            <a:r>
+              <a:t>예상 연간 매출 (2027년): 5억원~10억원</a:t>
             </a:r>
           </a:p>
         </p:txBody>
@@ -6123,17 +6758,9 @@
 </p:sld>
 </file>
 
-<file path=ppt/slides/slide6.xml><?xml version="1.0" encoding="utf-8"?>
+<file path=ppt/slides/slide9.xml><?xml version="1.0" encoding="utf-8"?>
 <p:sld xmlns:a="http://schemas.openxmlformats.org/drawingml/2006/main" xmlns:p="http://schemas.openxmlformats.org/presentationml/2006/main" xmlns:r="http://schemas.openxmlformats.org/officeDocument/2006/relationships">
   <p:cSld>
-    <p:bg>
-      <p:bgPr>
-        <a:solidFill>
-          <a:srgbClr val="FFFFFF"/>
-        </a:solidFill>
-        <a:effectLst/>
-      </p:bgPr>
-    </p:bg>
     <p:spTree>
       <p:nvGrpSpPr>
         <p:cNvPr id="1" name=""/>
@@ -6143,56 +6770,24 @@
       <p:grpSpPr/>
       <p:sp>
         <p:nvSpPr>
-          <p:cNvPr id="2" name="TextBox 1"/>
-          <p:cNvSpPr txBox="1"/>
+          <p:cNvPr id="2" name="Rectangle 1"/>
+          <p:cNvSpPr/>
           <p:nvPr/>
         </p:nvSpPr>
         <p:spPr>
           <a:xfrm>
-            <a:off x="457200" y="274320"/>
-            <a:ext cx="8229600" cy="731520"/>
+            <a:off x="0" y="0"/>
+            <a:ext cx="9144000" cy="731520"/>
           </a:xfrm>
           <a:prstGeom prst="rect">
             <a:avLst/>
           </a:prstGeom>
-          <a:noFill/>
-        </p:spPr>
-        <p:txBody>
-          <a:bodyPr wrap="none">
-            <a:spAutoFit/>
-          </a:bodyPr>
-          <a:lstStyle/>
-          <a:p>
-            <a:pPr>
-              <a:defRPr sz="4400" b="1">
-                <a:solidFill>
-                  <a:srgbClr val="1E293B"/>
-                </a:solidFill>
-              </a:defRPr>
-            </a:pPr>
-            <a:r>
-              <a:t>🔄 자동 성능 분석 &amp; 최적화</a:t>
-            </a:r>
-          </a:p>
-        </p:txBody>
-      </p:sp>
-      <p:sp>
-        <p:nvSpPr>
-          <p:cNvPr id="3" name="Rectangle 2"/>
-          <p:cNvSpPr/>
-          <p:nvPr/>
-        </p:nvSpPr>
-        <p:spPr>
-          <a:xfrm>
-            <a:off x="457200" y="1097280"/>
-            <a:ext cx="8229600" cy="0"/>
-          </a:xfrm>
-          <a:prstGeom prst="rect">
-            <a:avLst/>
-          </a:prstGeom>
-          <a:ln w="38100">
+          <a:solidFill>
+            <a:srgbClr val="2980B9"/>
+          </a:solidFill>
+          <a:ln>
             <a:solidFill>
-              <a:srgbClr val="2563EB"/>
+              <a:srgbClr val="2980B9"/>
             </a:solidFill>
           </a:ln>
         </p:spPr>
@@ -6220,14 +6815,14 @@
       </p:sp>
       <p:sp>
         <p:nvSpPr>
-          <p:cNvPr id="4" name="TextBox 3"/>
+          <p:cNvPr id="3" name="TextBox 2"/>
           <p:cNvSpPr txBox="1"/>
           <p:nvPr/>
         </p:nvSpPr>
         <p:spPr>
           <a:xfrm>
-            <a:off x="731520" y="1371600"/>
-            <a:ext cx="7680960" cy="5029200"/>
+            <a:off x="457200" y="91440"/>
+            <a:ext cx="8229600" cy="548640"/>
           </a:xfrm>
           <a:prstGeom prst="rect">
             <a:avLst/>
@@ -6235,186 +6830,34 @@
           <a:noFill/>
         </p:spPr>
         <p:txBody>
-          <a:bodyPr wrap="square">
+          <a:bodyPr wrap="none">
             <a:spAutoFit/>
           </a:bodyPr>
           <a:lstStyle/>
           <a:p>
             <a:pPr>
-              <a:spcBef>
-                <a:spcPts val="800"/>
-              </a:spcBef>
-              <a:spcAft>
-                <a:spcPts val="800"/>
-              </a:spcAft>
-              <a:defRPr sz="1800">
-                <a:solidFill>
-                  <a:srgbClr val="1E293B"/>
-                </a:solidFill>
-              </a:defRPr>
-            </a:pPr>
-            <a:r>
-              <a:t>기술 스택: Custom Analytics Module, Claude AI</a:t>
-            </a:r>
-          </a:p>
-          <a:p>
-            <a:pPr>
-              <a:spcBef>
-                <a:spcPts val="800"/>
-              </a:spcBef>
-              <a:spcAft>
-                <a:spcPts val="800"/>
-              </a:spcAft>
-              <a:defRPr sz="1800">
-                <a:solidFill>
-                  <a:srgbClr val="1E293B"/>
-                </a:solidFill>
-              </a:defRPr>
-            </a:pPr>
-          </a:p>
-          <a:p>
-            <a:pPr>
-              <a:spcBef>
-                <a:spcPts val="800"/>
-              </a:spcBef>
-              <a:spcAft>
-                <a:spcPts val="800"/>
-              </a:spcAft>
-              <a:defRPr sz="1800">
-                <a:solidFill>
-                  <a:srgbClr val="1E293B"/>
-                </a:solidFill>
-              </a:defRPr>
-            </a:pPr>
-            <a:r>
-              <a:t>📊 실시간 분석:</a:t>
-            </a:r>
-          </a:p>
-          <a:p>
-            <a:pPr>
-              <a:spcBef>
-                <a:spcPts val="800"/>
-              </a:spcBef>
-              <a:spcAft>
-                <a:spcPts val="800"/>
-              </a:spcAft>
-              <a:defRPr sz="1800">
-                <a:solidFill>
-                  <a:srgbClr val="1E293B"/>
-                </a:solidFill>
-              </a:defRPr>
-            </a:pPr>
-            <a:r>
-              <a:t>• 클릭 패턴, 스크롤 깊이, 세션 지속시간 추적</a:t>
-            </a:r>
-          </a:p>
-          <a:p>
-            <a:pPr>
-              <a:spcBef>
-                <a:spcPts val="800"/>
-              </a:spcBef>
-              <a:spcAft>
-                <a:spcPts val="800"/>
-              </a:spcAft>
-              <a:defRPr sz="1800">
-                <a:solidFill>
-                  <a:srgbClr val="1E293B"/>
-                </a:solidFill>
-              </a:defRPr>
-            </a:pPr>
-            <a:r>
-              <a:t>• AI 기반 자동 최적화 제안</a:t>
-            </a:r>
-          </a:p>
-          <a:p>
-            <a:pPr>
-              <a:spcBef>
-                <a:spcPts val="800"/>
-              </a:spcBef>
-              <a:spcAft>
-                <a:spcPts val="800"/>
-              </a:spcAft>
-              <a:defRPr sz="1800">
-                <a:solidFill>
-                  <a:srgbClr val="1E293B"/>
-                </a:solidFill>
-              </a:defRPr>
-            </a:pPr>
-            <a:r>
-              <a:t>• A/B 테스트 자동 실행</a:t>
-            </a:r>
-          </a:p>
-          <a:p>
-            <a:pPr>
-              <a:spcBef>
-                <a:spcPts val="800"/>
-              </a:spcBef>
-              <a:spcAft>
-                <a:spcPts val="800"/>
-              </a:spcAft>
-              <a:defRPr sz="1800">
-                <a:solidFill>
-                  <a:srgbClr val="1E293B"/>
-                </a:solidFill>
-              </a:defRPr>
-            </a:pPr>
-          </a:p>
-          <a:p>
-            <a:pPr>
-              <a:spcBef>
-                <a:spcPts val="800"/>
-              </a:spcBef>
-              <a:spcAft>
-                <a:spcPts val="800"/>
-              </a:spcAft>
-              <a:defRPr sz="1800">
-                <a:solidFill>
-                  <a:srgbClr val="1E293B"/>
-                </a:solidFill>
-              </a:defRPr>
-            </a:pPr>
-            <a:r>
-              <a:t>목표: 전환율 30% 증가</a:t>
-            </a:r>
-          </a:p>
-        </p:txBody>
-      </p:sp>
-    </p:spTree>
-  </p:cSld>
-  <p:clrMapOvr>
-    <a:masterClrMapping/>
-  </p:clrMapOvr>
-</p:sld>
-</file>
-
-<file path=ppt/slides/slide7.xml><?xml version="1.0" encoding="utf-8"?>
-<p:sld xmlns:a="http://schemas.openxmlformats.org/drawingml/2006/main" xmlns:p="http://schemas.openxmlformats.org/presentationml/2006/main" xmlns:r="http://schemas.openxmlformats.org/officeDocument/2006/relationships">
-  <p:cSld>
-    <p:bg>
-      <p:bgPr>
-        <a:solidFill>
-          <a:srgbClr val="FFFFFF"/>
-        </a:solidFill>
-        <a:effectLst/>
-      </p:bgPr>
-    </p:bg>
-    <p:spTree>
-      <p:nvGrpSpPr>
-        <p:cNvPr id="1" name=""/>
-        <p:cNvGrpSpPr/>
-        <p:nvPr/>
-      </p:nvGrpSpPr>
-      <p:grpSpPr/>
-      <p:sp>
-        <p:nvSpPr>
-          <p:cNvPr id="2" name="TextBox 1"/>
+              <a:defRPr sz="4000" b="1">
+                <a:solidFill>
+                  <a:srgbClr val="FFFFFF"/>
+                </a:solidFill>
+              </a:defRPr>
+            </a:pPr>
+            <a:r>
+              <a:t>👥 팀 구성</a:t>
+            </a:r>
+          </a:p>
+        </p:txBody>
+      </p:sp>
+      <p:sp>
+        <p:nvSpPr>
+          <p:cNvPr id="4" name="TextBox 3"/>
           <p:cNvSpPr txBox="1"/>
           <p:nvPr/>
         </p:nvSpPr>
         <p:spPr>
           <a:xfrm>
-            <a:off x="457200" y="274320"/>
-            <a:ext cx="8229600" cy="731520"/>
+            <a:off x="457200" y="1097280"/>
+            <a:ext cx="3840480" cy="5303520"/>
           </a:xfrm>
           <a:prstGeom prst="rect">
             <a:avLst/>
@@ -6422,76 +6865,151 @@
           <a:noFill/>
         </p:spPr>
         <p:txBody>
-          <a:bodyPr wrap="none">
+          <a:bodyPr wrap="square">
             <a:spAutoFit/>
           </a:bodyPr>
           <a:lstStyle/>
           <a:p>
             <a:pPr>
-              <a:defRPr sz="4400" b="1">
-                <a:solidFill>
-                  <a:srgbClr val="1E293B"/>
-                </a:solidFill>
-              </a:defRPr>
-            </a:pPr>
-            <a:r>
-              <a:t>📝 AI 콘텐츠 자동 생성</a:t>
-            </a:r>
-          </a:p>
-        </p:txBody>
-      </p:sp>
-      <p:sp>
-        <p:nvSpPr>
-          <p:cNvPr id="3" name="Rectangle 2"/>
-          <p:cNvSpPr/>
+              <a:defRPr sz="2000" b="1">
+                <a:solidFill>
+                  <a:srgbClr val="2980B9"/>
+                </a:solidFill>
+              </a:defRPr>
+            </a:pPr>
+            <a:r>
+              <a:t>현재 (MVP)</a:t>
+            </a:r>
+          </a:p>
+          <a:p>
+            <a:pPr>
+              <a:spcBef>
+                <a:spcPts val="600"/>
+              </a:spcBef>
+              <a:defRPr sz="1400">
+                <a:solidFill>
+                  <a:srgbClr val="34495E"/>
+                </a:solidFill>
+              </a:defRPr>
+            </a:pPr>
+            <a:r>
+              <a:t>👤 이희천</a:t>
+            </a:r>
+          </a:p>
+          <a:p>
+            <a:pPr>
+              <a:spcBef>
+                <a:spcPts val="600"/>
+              </a:spcBef>
+              <a:defRPr sz="1400">
+                <a:solidFill>
+                  <a:srgbClr val="34495E"/>
+                </a:solidFill>
+              </a:defRPr>
+            </a:pPr>
+            <a:r>
+              <a:t>  역할: 대표이사</a:t>
+            </a:r>
+          </a:p>
+          <a:p>
+            <a:pPr>
+              <a:spcBef>
+                <a:spcPts val="600"/>
+              </a:spcBef>
+              <a:defRPr sz="1400">
+                <a:solidFill>
+                  <a:srgbClr val="34495E"/>
+                </a:solidFill>
+              </a:defRPr>
+            </a:pPr>
+            <a:r>
+              <a:t>  경력: 보험컨설턴트</a:t>
+            </a:r>
+          </a:p>
+          <a:p>
+            <a:pPr>
+              <a:spcBef>
+                <a:spcPts val="600"/>
+              </a:spcBef>
+              <a:defRPr sz="1400">
+                <a:solidFill>
+                  <a:srgbClr val="34495E"/>
+                </a:solidFill>
+              </a:defRPr>
+            </a:pPr>
+            <a:r>
+              <a:t>          AI 비즈니스 개발</a:t>
+            </a:r>
+          </a:p>
+          <a:p>
+            <a:pPr>
+              <a:spcBef>
+                <a:spcPts val="600"/>
+              </a:spcBef>
+              <a:defRPr sz="1400">
+                <a:solidFill>
+                  <a:srgbClr val="34495E"/>
+                </a:solidFill>
+              </a:defRPr>
+            </a:pPr>
+          </a:p>
+          <a:p>
+            <a:pPr>
+              <a:spcBef>
+                <a:spcPts val="600"/>
+              </a:spcBef>
+              <a:defRPr sz="1400">
+                <a:solidFill>
+                  <a:srgbClr val="34495E"/>
+                </a:solidFill>
+              </a:defRPr>
+            </a:pPr>
+            <a:r>
+              <a:t>🤖 Claude AI</a:t>
+            </a:r>
+          </a:p>
+          <a:p>
+            <a:pPr>
+              <a:spcBef>
+                <a:spcPts val="600"/>
+              </a:spcBef>
+              <a:defRPr sz="1400">
+                <a:solidFill>
+                  <a:srgbClr val="34495E"/>
+                </a:solidFill>
+              </a:defRPr>
+            </a:pPr>
+            <a:r>
+              <a:t>  역할: AI 상담사</a:t>
+            </a:r>
+          </a:p>
+          <a:p>
+            <a:pPr>
+              <a:spcBef>
+                <a:spcPts val="600"/>
+              </a:spcBef>
+              <a:defRPr sz="1400">
+                <a:solidFill>
+                  <a:srgbClr val="34495E"/>
+                </a:solidFill>
+              </a:defRPr>
+            </a:pPr>
+            <a:r>
+              <a:t>  역량: 24시간 응답</a:t>
+            </a:r>
+          </a:p>
+        </p:txBody>
+      </p:sp>
+      <p:sp>
+        <p:nvSpPr>
+          <p:cNvPr id="5" name="TextBox 4"/>
+          <p:cNvSpPr txBox="1"/>
           <p:nvPr/>
         </p:nvSpPr>
         <p:spPr>
           <a:xfrm>
-            <a:off x="457200" y="1097280"/>
-            <a:ext cx="8229600" cy="0"/>
-          </a:xfrm>
-          <a:prstGeom prst="rect">
-            <a:avLst/>
-          </a:prstGeom>
-          <a:ln w="38100">
-            <a:solidFill>
-              <a:srgbClr val="2563EB"/>
-            </a:solidFill>
-          </a:ln>
-        </p:spPr>
-        <p:style>
-          <a:lnRef idx="1">
-            <a:schemeClr val="accent1"/>
-          </a:lnRef>
-          <a:fillRef idx="3">
-            <a:schemeClr val="accent1"/>
-          </a:fillRef>
-          <a:effectRef idx="2">
-            <a:schemeClr val="accent1"/>
-          </a:effectRef>
-          <a:fontRef idx="minor">
-            <a:schemeClr val="lt1"/>
-          </a:fontRef>
-        </p:style>
-        <p:txBody>
-          <a:bodyPr rtlCol="0" anchor="ctr"/>
-          <a:lstStyle/>
-          <a:p>
-            <a:pPr algn="ctr"/>
-          </a:p>
-        </p:txBody>
-      </p:sp>
-      <p:sp>
-        <p:nvSpPr>
-          <p:cNvPr id="4" name="TextBox 3"/>
-          <p:cNvSpPr txBox="1"/>
-          <p:nvPr/>
-        </p:nvSpPr>
-        <p:spPr>
-          <a:xfrm>
-            <a:off x="731520" y="1371600"/>
-            <a:ext cx="7680960" cy="5029200"/>
+            <a:off x="4846320" y="1097280"/>
+            <a:ext cx="3840480" cy="5303520"/>
           </a:xfrm>
           <a:prstGeom prst="rect">
             <a:avLst/>
@@ -6505,746 +7023,128 @@
           <a:lstStyle/>
           <a:p>
             <a:pPr>
-              <a:spcBef>
-                <a:spcPts val="800"/>
-              </a:spcBef>
-              <a:spcAft>
-                <a:spcPts val="800"/>
-              </a:spcAft>
-              <a:defRPr sz="1800">
-                <a:solidFill>
-                  <a:srgbClr val="1E293B"/>
-                </a:solidFill>
-              </a:defRPr>
-            </a:pPr>
-            <a:r>
-              <a:t>기술 스택: Claude API, Scheduling System</a:t>
-            </a:r>
-          </a:p>
-          <a:p>
-            <a:pPr>
-              <a:spcBef>
-                <a:spcPts val="800"/>
-              </a:spcBef>
-              <a:spcAft>
-                <a:spcPts val="800"/>
-              </a:spcAft>
-              <a:defRPr sz="1800">
-                <a:solidFill>
-                  <a:srgbClr val="1E293B"/>
-                </a:solidFill>
-              </a:defRPr>
-            </a:pPr>
-          </a:p>
-          <a:p>
-            <a:pPr>
-              <a:spcBef>
-                <a:spcPts val="800"/>
-              </a:spcBef>
-              <a:spcAft>
-                <a:spcPts val="800"/>
-              </a:spcAft>
-              <a:defRPr sz="1800">
-                <a:solidFill>
-                  <a:srgbClr val="1E293B"/>
-                </a:solidFill>
-              </a:defRPr>
-            </a:pPr>
-            <a:r>
-              <a:t>자동화 대상:</a:t>
-            </a:r>
-          </a:p>
-          <a:p>
-            <a:pPr>
-              <a:spcBef>
-                <a:spcPts val="800"/>
-              </a:spcBef>
-              <a:spcAft>
-                <a:spcPts val="800"/>
-              </a:spcAft>
-              <a:defRPr sz="1800">
-                <a:solidFill>
-                  <a:srgbClr val="1E293B"/>
-                </a:solidFill>
-              </a:defRPr>
-            </a:pPr>
-            <a:r>
-              <a:t>• 일일 블로그 포스트 (1500-2000자)</a:t>
-            </a:r>
-          </a:p>
-          <a:p>
-            <a:pPr>
-              <a:spcBef>
-                <a:spcPts val="800"/>
-              </a:spcBef>
-              <a:spcAft>
-                <a:spcPts val="800"/>
-              </a:spcAft>
-              <a:defRPr sz="1800">
-                <a:solidFill>
-                  <a:srgbClr val="1E293B"/>
-                </a:solidFill>
-              </a:defRPr>
-            </a:pPr>
-            <a:r>
-              <a:t>• SNS 콘텐츠 (Instagram, Twitter, Facebook)</a:t>
-            </a:r>
-          </a:p>
-          <a:p>
-            <a:pPr>
-              <a:spcBef>
-                <a:spcPts val="800"/>
-              </a:spcBef>
-              <a:spcAft>
-                <a:spcPts val="800"/>
-              </a:spcAft>
-              <a:defRPr sz="1800">
-                <a:solidFill>
-                  <a:srgbClr val="1E293B"/>
-                </a:solidFill>
-              </a:defRPr>
-            </a:pPr>
-          </a:p>
-          <a:p>
-            <a:pPr>
-              <a:spcBef>
-                <a:spcPts val="800"/>
-              </a:spcBef>
-              <a:spcAft>
-                <a:spcPts val="800"/>
-              </a:spcAft>
-              <a:defRPr sz="1800">
-                <a:solidFill>
-                  <a:srgbClr val="1E293B"/>
-                </a:solidFill>
-              </a:defRPr>
-            </a:pPr>
-            <a:r>
-              <a:t>효과:</a:t>
-            </a:r>
-          </a:p>
-          <a:p>
-            <a:pPr>
-              <a:spcBef>
-                <a:spcPts val="800"/>
-              </a:spcBef>
-              <a:spcAft>
-                <a:spcPts val="800"/>
-              </a:spcAft>
-              <a:defRPr sz="1800">
-                <a:solidFill>
-                  <a:srgbClr val="1E293B"/>
-                </a:solidFill>
-              </a:defRPr>
-            </a:pPr>
-            <a:r>
-              <a:t>• 콘텐츠 마케팅 비용 제거 (월 200만원 절감)</a:t>
-            </a:r>
-          </a:p>
-          <a:p>
-            <a:pPr>
-              <a:spcBef>
-                <a:spcPts val="800"/>
-              </a:spcBef>
-              <a:spcAft>
-                <a:spcPts val="800"/>
-              </a:spcAft>
-              <a:defRPr sz="1800">
-                <a:solidFill>
-                  <a:srgbClr val="1E293B"/>
-                </a:solidFill>
-              </a:defRPr>
-            </a:pPr>
-            <a:r>
-              <a:t>• 월 50개 이상 콘텐츠 생성</a:t>
-            </a:r>
-          </a:p>
-          <a:p>
-            <a:pPr>
-              <a:spcBef>
-                <a:spcPts val="800"/>
-              </a:spcBef>
-              <a:spcAft>
-                <a:spcPts val="800"/>
-              </a:spcAft>
-              <a:defRPr sz="1800">
-                <a:solidFill>
-                  <a:srgbClr val="1E293B"/>
-                </a:solidFill>
-              </a:defRPr>
-            </a:pPr>
-            <a:r>
-              <a:t>• 유기 트래픽 35% 증가 예상</a:t>
-            </a:r>
-          </a:p>
-        </p:txBody>
-      </p:sp>
-    </p:spTree>
-  </p:cSld>
-  <p:clrMapOvr>
-    <a:masterClrMapping/>
-  </p:clrMapOvr>
-</p:sld>
-</file>
-
-<file path=ppt/slides/slide8.xml><?xml version="1.0" encoding="utf-8"?>
-<p:sld xmlns:a="http://schemas.openxmlformats.org/drawingml/2006/main" xmlns:p="http://schemas.openxmlformats.org/presentationml/2006/main" xmlns:r="http://schemas.openxmlformats.org/officeDocument/2006/relationships">
-  <p:cSld>
-    <p:bg>
-      <p:bgPr>
-        <a:solidFill>
-          <a:srgbClr val="FFFFFF"/>
-        </a:solidFill>
-        <a:effectLst/>
-      </p:bgPr>
-    </p:bg>
-    <p:spTree>
-      <p:nvGrpSpPr>
-        <p:cNvPr id="1" name=""/>
-        <p:cNvGrpSpPr/>
-        <p:nvPr/>
-      </p:nvGrpSpPr>
-      <p:grpSpPr/>
-      <p:sp>
-        <p:nvSpPr>
-          <p:cNvPr id="2" name="TextBox 1"/>
-          <p:cNvSpPr txBox="1"/>
-          <p:nvPr/>
-        </p:nvSpPr>
-        <p:spPr>
-          <a:xfrm>
-            <a:off x="457200" y="274320"/>
-            <a:ext cx="8229600" cy="731520"/>
-          </a:xfrm>
-          <a:prstGeom prst="rect">
-            <a:avLst/>
-          </a:prstGeom>
-          <a:noFill/>
-        </p:spPr>
-        <p:txBody>
-          <a:bodyPr wrap="none">
-            <a:spAutoFit/>
-          </a:bodyPr>
-          <a:lstStyle/>
-          <a:p>
-            <a:pPr>
-              <a:defRPr sz="4400" b="1">
-                <a:solidFill>
-                  <a:srgbClr val="1E293B"/>
-                </a:solidFill>
-              </a:defRPr>
-            </a:pPr>
-            <a:r>
-              <a:t>3️⃣ 시장 분석</a:t>
-            </a:r>
-          </a:p>
-        </p:txBody>
-      </p:sp>
-      <p:sp>
-        <p:nvSpPr>
-          <p:cNvPr id="3" name="Rectangle 2"/>
-          <p:cNvSpPr/>
-          <p:nvPr/>
-        </p:nvSpPr>
-        <p:spPr>
-          <a:xfrm>
-            <a:off x="457200" y="1097280"/>
-            <a:ext cx="8229600" cy="0"/>
-          </a:xfrm>
-          <a:prstGeom prst="rect">
-            <a:avLst/>
-          </a:prstGeom>
-          <a:ln w="38100">
-            <a:solidFill>
-              <a:srgbClr val="2563EB"/>
-            </a:solidFill>
-          </a:ln>
-        </p:spPr>
-        <p:style>
-          <a:lnRef idx="1">
-            <a:schemeClr val="accent1"/>
-          </a:lnRef>
-          <a:fillRef idx="3">
-            <a:schemeClr val="accent1"/>
-          </a:fillRef>
-          <a:effectRef idx="2">
-            <a:schemeClr val="accent1"/>
-          </a:effectRef>
-          <a:fontRef idx="minor">
-            <a:schemeClr val="lt1"/>
-          </a:fontRef>
-        </p:style>
-        <p:txBody>
-          <a:bodyPr rtlCol="0" anchor="ctr"/>
-          <a:lstStyle/>
-          <a:p>
-            <a:pPr algn="ctr"/>
-          </a:p>
-        </p:txBody>
-      </p:sp>
-      <p:sp>
-        <p:nvSpPr>
-          <p:cNvPr id="4" name="TextBox 3"/>
-          <p:cNvSpPr txBox="1"/>
-          <p:nvPr/>
-        </p:nvSpPr>
-        <p:spPr>
-          <a:xfrm>
-            <a:off x="731520" y="1371600"/>
-            <a:ext cx="7680960" cy="5029200"/>
-          </a:xfrm>
-          <a:prstGeom prst="rect">
-            <a:avLst/>
-          </a:prstGeom>
-          <a:noFill/>
-        </p:spPr>
-        <p:txBody>
-          <a:bodyPr wrap="square">
-            <a:spAutoFit/>
-          </a:bodyPr>
-          <a:lstStyle/>
-          <a:p>
-            <a:pPr>
-              <a:spcBef>
-                <a:spcPts val="800"/>
-              </a:spcBef>
-              <a:spcAft>
-                <a:spcPts val="800"/>
-              </a:spcAft>
-              <a:defRPr sz="1800">
-                <a:solidFill>
-                  <a:srgbClr val="1E293B"/>
-                </a:solidFill>
-              </a:defRPr>
-            </a:pPr>
-            <a:r>
-              <a:t>📈 시장 규모:</a:t>
-            </a:r>
-          </a:p>
-          <a:p>
-            <a:pPr>
-              <a:spcBef>
-                <a:spcPts val="800"/>
-              </a:spcBef>
-              <a:spcAft>
-                <a:spcPts val="800"/>
-              </a:spcAft>
-              <a:defRPr sz="1800">
-                <a:solidFill>
-                  <a:srgbClr val="1E293B"/>
-                </a:solidFill>
-              </a:defRPr>
-            </a:pPr>
-            <a:r>
-              <a:t>• 펫보험 시장: 5,000억원 (2024)</a:t>
-            </a:r>
-          </a:p>
-          <a:p>
-            <a:pPr>
-              <a:spcBef>
-                <a:spcPts val="800"/>
-              </a:spcBef>
-              <a:spcAft>
-                <a:spcPts val="800"/>
-              </a:spcAft>
-              <a:defRPr sz="1800">
-                <a:solidFill>
-                  <a:srgbClr val="1E293B"/>
-                </a:solidFill>
-              </a:defRPr>
-            </a:pPr>
-            <a:r>
-              <a:t>• 연평균 성장률: 15-20%</a:t>
-            </a:r>
-          </a:p>
-          <a:p>
-            <a:pPr>
-              <a:spcBef>
-                <a:spcPts val="800"/>
-              </a:spcBef>
-              <a:spcAft>
-                <a:spcPts val="800"/>
-              </a:spcAft>
-              <a:defRPr sz="1800">
-                <a:solidFill>
-                  <a:srgbClr val="1E293B"/>
-                </a:solidFill>
-              </a:defRPr>
-            </a:pPr>
-            <a:r>
-              <a:t>• 2028년 예상: 약 10,000억원</a:t>
-            </a:r>
-          </a:p>
-          <a:p>
-            <a:pPr>
-              <a:spcBef>
-                <a:spcPts val="800"/>
-              </a:spcBef>
-              <a:spcAft>
-                <a:spcPts val="800"/>
-              </a:spcAft>
-              <a:defRPr sz="1800">
-                <a:solidFill>
-                  <a:srgbClr val="1E293B"/>
-                </a:solidFill>
-              </a:defRPr>
-            </a:pPr>
-          </a:p>
-          <a:p>
-            <a:pPr>
-              <a:spcBef>
-                <a:spcPts val="800"/>
-              </a:spcBef>
-              <a:spcAft>
-                <a:spcPts val="800"/>
-              </a:spcAft>
-              <a:defRPr sz="1800">
-                <a:solidFill>
-                  <a:srgbClr val="1E293B"/>
-                </a:solidFill>
-              </a:defRPr>
-            </a:pPr>
-            <a:r>
-              <a:t>🎯 타겟 고객:</a:t>
-            </a:r>
-          </a:p>
-          <a:p>
-            <a:pPr>
-              <a:spcBef>
-                <a:spcPts val="800"/>
-              </a:spcBef>
-              <a:spcAft>
-                <a:spcPts val="800"/>
-              </a:spcAft>
-              <a:defRPr sz="1800">
-                <a:solidFill>
-                  <a:srgbClr val="1E293B"/>
-                </a:solidFill>
-              </a:defRPr>
-            </a:pPr>
-            <a:r>
-              <a:t>• 반려동물 보유 가구: 600만 가구</a:t>
-            </a:r>
-          </a:p>
-          <a:p>
-            <a:pPr>
-              <a:spcBef>
-                <a:spcPts val="800"/>
-              </a:spcBef>
-              <a:spcAft>
-                <a:spcPts val="800"/>
-              </a:spcAft>
-              <a:defRPr sz="1800">
-                <a:solidFill>
-                  <a:srgbClr val="1E293B"/>
-                </a:solidFill>
-              </a:defRPr>
-            </a:pPr>
-            <a:r>
-              <a:t>• 정보 수집 관심층: 150만 가구 (25%)</a:t>
-            </a:r>
-          </a:p>
-          <a:p>
-            <a:pPr>
-              <a:spcBef>
-                <a:spcPts val="800"/>
-              </a:spcBef>
-              <a:spcAft>
-                <a:spcPts val="800"/>
-              </a:spcAft>
-              <a:defRPr sz="1800">
-                <a:solidFill>
-                  <a:srgbClr val="1E293B"/>
-                </a:solidFill>
-              </a:defRPr>
-            </a:pPr>
-            <a:r>
-              <a:t>• 우리의 TAM: 150만 명 (1차), 50만 명 (3년차)</a:t>
-            </a:r>
-          </a:p>
-        </p:txBody>
-      </p:sp>
-    </p:spTree>
-  </p:cSld>
-  <p:clrMapOvr>
-    <a:masterClrMapping/>
-  </p:clrMapOvr>
-</p:sld>
-</file>
-
-<file path=ppt/slides/slide9.xml><?xml version="1.0" encoding="utf-8"?>
-<p:sld xmlns:a="http://schemas.openxmlformats.org/drawingml/2006/main" xmlns:p="http://schemas.openxmlformats.org/presentationml/2006/main" xmlns:r="http://schemas.openxmlformats.org/officeDocument/2006/relationships">
-  <p:cSld>
-    <p:bg>
-      <p:bgPr>
-        <a:solidFill>
-          <a:srgbClr val="FFFFFF"/>
-        </a:solidFill>
-        <a:effectLst/>
-      </p:bgPr>
-    </p:bg>
-    <p:spTree>
-      <p:nvGrpSpPr>
-        <p:cNvPr id="1" name=""/>
-        <p:cNvGrpSpPr/>
-        <p:nvPr/>
-      </p:nvGrpSpPr>
-      <p:grpSpPr/>
-      <p:sp>
-        <p:nvSpPr>
-          <p:cNvPr id="2" name="TextBox 1"/>
-          <p:cNvSpPr txBox="1"/>
-          <p:nvPr/>
-        </p:nvSpPr>
-        <p:spPr>
-          <a:xfrm>
-            <a:off x="457200" y="274320"/>
-            <a:ext cx="8229600" cy="731520"/>
-          </a:xfrm>
-          <a:prstGeom prst="rect">
-            <a:avLst/>
-          </a:prstGeom>
-          <a:noFill/>
-        </p:spPr>
-        <p:txBody>
-          <a:bodyPr wrap="none">
-            <a:spAutoFit/>
-          </a:bodyPr>
-          <a:lstStyle/>
-          <a:p>
-            <a:pPr>
-              <a:defRPr sz="4400" b="1">
-                <a:solidFill>
-                  <a:srgbClr val="1E293B"/>
-                </a:solidFill>
-              </a:defRPr>
-            </a:pPr>
-            <a:r>
-              <a:t>⚔️ 경쟁사 비교</a:t>
-            </a:r>
-          </a:p>
-        </p:txBody>
-      </p:sp>
-      <p:sp>
-        <p:nvSpPr>
-          <p:cNvPr id="3" name="Rectangle 2"/>
-          <p:cNvSpPr/>
-          <p:nvPr/>
-        </p:nvSpPr>
-        <p:spPr>
-          <a:xfrm>
-            <a:off x="457200" y="1097280"/>
-            <a:ext cx="8229600" cy="0"/>
-          </a:xfrm>
-          <a:prstGeom prst="rect">
-            <a:avLst/>
-          </a:prstGeom>
-          <a:ln w="38100">
-            <a:solidFill>
-              <a:srgbClr val="2563EB"/>
-            </a:solidFill>
-          </a:ln>
-        </p:spPr>
-        <p:style>
-          <a:lnRef idx="1">
-            <a:schemeClr val="accent1"/>
-          </a:lnRef>
-          <a:fillRef idx="3">
-            <a:schemeClr val="accent1"/>
-          </a:fillRef>
-          <a:effectRef idx="2">
-            <a:schemeClr val="accent1"/>
-          </a:effectRef>
-          <a:fontRef idx="minor">
-            <a:schemeClr val="lt1"/>
-          </a:fontRef>
-        </p:style>
-        <p:txBody>
-          <a:bodyPr rtlCol="0" anchor="ctr"/>
-          <a:lstStyle/>
-          <a:p>
-            <a:pPr algn="ctr"/>
-          </a:p>
-        </p:txBody>
-      </p:sp>
-      <p:sp>
-        <p:nvSpPr>
-          <p:cNvPr id="4" name="TextBox 3"/>
-          <p:cNvSpPr txBox="1"/>
-          <p:nvPr/>
-        </p:nvSpPr>
-        <p:spPr>
-          <a:xfrm>
-            <a:off x="731520" y="1371600"/>
-            <a:ext cx="7680960" cy="5029200"/>
-          </a:xfrm>
-          <a:prstGeom prst="rect">
-            <a:avLst/>
-          </a:prstGeom>
-          <a:noFill/>
-        </p:spPr>
-        <p:txBody>
-          <a:bodyPr wrap="square">
-            <a:spAutoFit/>
-          </a:bodyPr>
-          <a:lstStyle/>
-          <a:p>
-            <a:pPr>
-              <a:spcBef>
-                <a:spcPts val="800"/>
-              </a:spcBef>
-              <a:spcAft>
-                <a:spcPts val="800"/>
-              </a:spcAft>
-              <a:defRPr sz="1800">
-                <a:solidFill>
-                  <a:srgbClr val="1E293B"/>
-                </a:solidFill>
-              </a:defRPr>
-            </a:pPr>
-            <a:r>
-              <a:t>기존 플레이어:</a:t>
-            </a:r>
-          </a:p>
-          <a:p>
-            <a:pPr>
-              <a:spcBef>
-                <a:spcPts val="800"/>
-              </a:spcBef>
-              <a:spcAft>
-                <a:spcPts val="800"/>
-              </a:spcAft>
-              <a:defRPr sz="1800">
-                <a:solidFill>
-                  <a:srgbClr val="1E293B"/>
-                </a:solidFill>
-              </a:defRPr>
-            </a:pPr>
-            <a:r>
-              <a:t>• 보험사 홈페이지: 복잡, 상담 유료</a:t>
-            </a:r>
-          </a:p>
-          <a:p>
-            <a:pPr>
-              <a:spcBef>
-                <a:spcPts val="800"/>
-              </a:spcBef>
-              <a:spcAft>
-                <a:spcPts val="800"/>
-              </a:spcAft>
-              <a:defRPr sz="1800">
-                <a:solidFill>
-                  <a:srgbClr val="1E293B"/>
-                </a:solidFill>
-              </a:defRPr>
-            </a:pPr>
-            <a:r>
-              <a:t>• 비교 사이트: 수동 상담, AI 없음</a:t>
-            </a:r>
-          </a:p>
-          <a:p>
-            <a:pPr>
-              <a:spcBef>
-                <a:spcPts val="800"/>
-              </a:spcBef>
-              <a:spcAft>
-                <a:spcPts val="800"/>
-              </a:spcAft>
-              <a:defRPr sz="1800">
-                <a:solidFill>
-                  <a:srgbClr val="1E293B"/>
-                </a:solidFill>
-              </a:defRPr>
-            </a:pPr>
-            <a:r>
-              <a:t>• 직거래 상담: 비용 높음, 시간 제한</a:t>
-            </a:r>
-          </a:p>
-          <a:p>
-            <a:pPr>
-              <a:spcBef>
-                <a:spcPts val="800"/>
-              </a:spcBef>
-              <a:spcAft>
-                <a:spcPts val="800"/>
-              </a:spcAft>
-              <a:defRPr sz="1800">
-                <a:solidFill>
-                  <a:srgbClr val="1E293B"/>
-                </a:solidFill>
-              </a:defRPr>
-            </a:pPr>
-          </a:p>
-          <a:p>
-            <a:pPr>
-              <a:spcBef>
-                <a:spcPts val="800"/>
-              </a:spcBef>
-              <a:spcAft>
-                <a:spcPts val="800"/>
-              </a:spcAft>
-              <a:defRPr sz="1800">
-                <a:solidFill>
-                  <a:srgbClr val="1E293B"/>
-                </a:solidFill>
-              </a:defRPr>
-            </a:pPr>
-            <a:r>
-              <a:t>🌟 PetCare+ 차별점:</a:t>
-            </a:r>
-          </a:p>
-          <a:p>
-            <a:pPr>
-              <a:spcBef>
-                <a:spcPts val="800"/>
-              </a:spcBef>
-              <a:spcAft>
-                <a:spcPts val="800"/>
-              </a:spcAft>
-              <a:defRPr sz="1800">
-                <a:solidFill>
-                  <a:srgbClr val="1E293B"/>
-                </a:solidFill>
-              </a:defRPr>
-            </a:pPr>
-            <a:r>
-              <a:t>✅ Claude AI 기반 24시간 무료 상담</a:t>
-            </a:r>
-          </a:p>
-          <a:p>
-            <a:pPr>
-              <a:spcBef>
-                <a:spcPts val="800"/>
-              </a:spcBef>
-              <a:spcAft>
-                <a:spcPts val="800"/>
-              </a:spcAft>
-              <a:defRPr sz="1800">
-                <a:solidFill>
-                  <a:srgbClr val="1E293B"/>
-                </a:solidFill>
-              </a:defRPr>
-            </a:pPr>
-            <a:r>
-              <a:t>✅ 자동화로 초저가 모델</a:t>
-            </a:r>
-          </a:p>
-          <a:p>
-            <a:pPr>
-              <a:spcBef>
-                <a:spcPts val="800"/>
-              </a:spcBef>
-              <a:spcAft>
-                <a:spcPts val="800"/>
-              </a:spcAft>
-              <a:defRPr sz="1800">
-                <a:solidFill>
-                  <a:srgbClr val="1E293B"/>
-                </a:solidFill>
-              </a:defRPr>
-            </a:pPr>
-            <a:r>
-              <a:t>✅ 자동 콘텐츠 마케팅</a:t>
+              <a:defRPr sz="2000" b="1">
+                <a:solidFill>
+                  <a:srgbClr val="2980B9"/>
+                </a:solidFill>
+              </a:defRPr>
+            </a:pPr>
+            <a:r>
+              <a:t>향후 확대 계획</a:t>
+            </a:r>
+          </a:p>
+          <a:p>
+            <a:pPr>
+              <a:spcBef>
+                <a:spcPts val="600"/>
+              </a:spcBef>
+              <a:defRPr sz="1400">
+                <a:solidFill>
+                  <a:srgbClr val="34495E"/>
+                </a:solidFill>
+              </a:defRPr>
+            </a:pPr>
+            <a:r>
+              <a:t>👨‍💼 영업팀</a:t>
+            </a:r>
+          </a:p>
+          <a:p>
+            <a:pPr>
+              <a:spcBef>
+                <a:spcPts val="600"/>
+              </a:spcBef>
+              <a:defRPr sz="1400">
+                <a:solidFill>
+                  <a:srgbClr val="34495E"/>
+                </a:solidFill>
+              </a:defRPr>
+            </a:pPr>
+            <a:r>
+              <a:t>  보험사 제휴 담당</a:t>
+            </a:r>
+          </a:p>
+          <a:p>
+            <a:pPr>
+              <a:spcBef>
+                <a:spcPts val="600"/>
+              </a:spcBef>
+              <a:defRPr sz="1400">
+                <a:solidFill>
+                  <a:srgbClr val="34495E"/>
+                </a:solidFill>
+              </a:defRPr>
+            </a:pPr>
+          </a:p>
+          <a:p>
+            <a:pPr>
+              <a:spcBef>
+                <a:spcPts val="600"/>
+              </a:spcBef>
+              <a:defRPr sz="1400">
+                <a:solidFill>
+                  <a:srgbClr val="34495E"/>
+                </a:solidFill>
+              </a:defRPr>
+            </a:pPr>
+            <a:r>
+              <a:t>👨‍💻 개발팀</a:t>
+            </a:r>
+          </a:p>
+          <a:p>
+            <a:pPr>
+              <a:spcBef>
+                <a:spcPts val="600"/>
+              </a:spcBef>
+              <a:defRPr sz="1400">
+                <a:solidFill>
+                  <a:srgbClr val="34495E"/>
+                </a:solidFill>
+              </a:defRPr>
+            </a:pPr>
+            <a:r>
+              <a:t>  프로덕션 운영 및 개선</a:t>
+            </a:r>
+          </a:p>
+          <a:p>
+            <a:pPr>
+              <a:spcBef>
+                <a:spcPts val="600"/>
+              </a:spcBef>
+              <a:defRPr sz="1400">
+                <a:solidFill>
+                  <a:srgbClr val="34495E"/>
+                </a:solidFill>
+              </a:defRPr>
+            </a:pPr>
+          </a:p>
+          <a:p>
+            <a:pPr>
+              <a:spcBef>
+                <a:spcPts val="600"/>
+              </a:spcBef>
+              <a:defRPr sz="1400">
+                <a:solidFill>
+                  <a:srgbClr val="34495E"/>
+                </a:solidFill>
+              </a:defRPr>
+            </a:pPr>
+            <a:r>
+              <a:t>🎨 UX/UI팀</a:t>
+            </a:r>
+          </a:p>
+          <a:p>
+            <a:pPr>
+              <a:spcBef>
+                <a:spcPts val="600"/>
+              </a:spcBef>
+              <a:defRPr sz="1400">
+                <a:solidFill>
+                  <a:srgbClr val="34495E"/>
+                </a:solidFill>
+              </a:defRPr>
+            </a:pPr>
+            <a:r>
+              <a:t>  사용자 경험 최적화</a:t>
             </a:r>
           </a:p>
         </p:txBody>
